--- a/PPTs/L1 Data Representation Exercises ANS.pptx
+++ b/PPTs/L1 Data Representation Exercises ANS.pptx
@@ -15,9 +15,9 @@
     <p:sldId id="353" r:id="rId6"/>
     <p:sldId id="354" r:id="rId7"/>
     <p:sldId id="355" r:id="rId8"/>
-    <p:sldId id="363" r:id="rId9"/>
-    <p:sldId id="349" r:id="rId10"/>
-    <p:sldId id="348" r:id="rId11"/>
+    <p:sldId id="349" r:id="rId9"/>
+    <p:sldId id="348" r:id="rId10"/>
+    <p:sldId id="363" r:id="rId11"/>
     <p:sldId id="364" r:id="rId12"/>
     <p:sldId id="365" r:id="rId13"/>
     <p:sldId id="366" r:id="rId14"/>
@@ -157,253 +157,21 @@
 </p:presentation>
 </file>
 
-<file path=ppt/revisionInfo.xml><?xml version="1.0" encoding="utf-8"?>
-<p1510:revInfo xmlns:a="http://schemas.openxmlformats.org/drawingml/2006/main" xmlns:r="http://schemas.openxmlformats.org/officeDocument/2006/relationships" xmlns:p1510="http://schemas.microsoft.com/office/powerpoint/2015/10/main">
-  <p1510:revLst>
-    <p1510:client id="{0D7B9918-F8B8-448A-BE73-9D4DAA7963B4}" v="57" dt="2025-09-22T01:50:06.096"/>
-  </p1510:revLst>
-</p1510:revInfo>
-</file>
-
 <file path=ppt/changesInfos/changesInfo1.xml><?xml version="1.0" encoding="utf-8"?>
 <pc:chgInfo xmlns:a="http://schemas.openxmlformats.org/drawingml/2006/main" xmlns:r="http://schemas.openxmlformats.org/officeDocument/2006/relationships" xmlns:ac="http://schemas.microsoft.com/office/drawing/2013/main/command" xmlns:pc="http://schemas.microsoft.com/office/powerpoint/2013/main/command">
   <pc:docChgLst>
     <pc:chgData name="Zonghua Gu" userId="9a7e1853e1951ef5" providerId="LiveId" clId="{CF1FAA12-072C-4ED5-BA76-0FFFAEFDB88A}"/>
-    <pc:docChg chg="undo custSel addSld delSld modSld">
-      <pc:chgData name="Zonghua Gu" userId="9a7e1853e1951ef5" providerId="LiveId" clId="{CF1FAA12-072C-4ED5-BA76-0FFFAEFDB88A}" dt="2025-09-22T01:50:10.314" v="266" actId="1076"/>
+    <pc:docChg chg="undo custSel addSld delSld modSld sldOrd">
+      <pc:chgData name="Zonghua Gu" userId="9a7e1853e1951ef5" providerId="LiveId" clId="{CF1FAA12-072C-4ED5-BA76-0FFFAEFDB88A}" dt="2025-12-06T14:36:06.345" v="268"/>
       <pc:docMkLst>
         <pc:docMk/>
       </pc:docMkLst>
-      <pc:sldChg chg="delSp modSp mod">
-        <pc:chgData name="Zonghua Gu" userId="9a7e1853e1951ef5" providerId="LiveId" clId="{CF1FAA12-072C-4ED5-BA76-0FFFAEFDB88A}" dt="2025-09-02T23:29:51.318" v="4" actId="20577"/>
+      <pc:sldChg chg="ord">
+        <pc:chgData name="Zonghua Gu" userId="9a7e1853e1951ef5" providerId="LiveId" clId="{CF1FAA12-072C-4ED5-BA76-0FFFAEFDB88A}" dt="2025-12-06T14:36:06.345" v="268"/>
         <pc:sldMkLst>
           <pc:docMk/>
-          <pc:sldMk cId="1692472849" sldId="342"/>
+          <pc:sldMk cId="2461711799" sldId="363"/>
         </pc:sldMkLst>
-        <pc:spChg chg="mod">
-          <ac:chgData name="Zonghua Gu" userId="9a7e1853e1951ef5" providerId="LiveId" clId="{CF1FAA12-072C-4ED5-BA76-0FFFAEFDB88A}" dt="2025-09-02T23:29:51.318" v="4" actId="20577"/>
-          <ac:spMkLst>
-            <pc:docMk/>
-            <pc:sldMk cId="1692472849" sldId="342"/>
-            <ac:spMk id="16386" creationId="{00000000-0000-0000-0000-000000000000}"/>
-          </ac:spMkLst>
-        </pc:spChg>
-      </pc:sldChg>
-      <pc:sldChg chg="modSp mod">
-        <pc:chgData name="Zonghua Gu" userId="9a7e1853e1951ef5" providerId="LiveId" clId="{CF1FAA12-072C-4ED5-BA76-0FFFAEFDB88A}" dt="2025-09-04T20:39:19.683" v="20" actId="20577"/>
-        <pc:sldMkLst>
-          <pc:docMk/>
-          <pc:sldMk cId="3239216658" sldId="365"/>
-        </pc:sldMkLst>
-        <pc:spChg chg="mod">
-          <ac:chgData name="Zonghua Gu" userId="9a7e1853e1951ef5" providerId="LiveId" clId="{CF1FAA12-072C-4ED5-BA76-0FFFAEFDB88A}" dt="2025-09-04T20:39:19.683" v="20" actId="20577"/>
-          <ac:spMkLst>
-            <pc:docMk/>
-            <pc:sldMk cId="3239216658" sldId="365"/>
-            <ac:spMk id="3" creationId="{00000000-0000-0000-0000-000000000000}"/>
-          </ac:spMkLst>
-        </pc:spChg>
-      </pc:sldChg>
-      <pc:sldChg chg="addSp delSp modSp mod modAnim">
-        <pc:chgData name="Zonghua Gu" userId="9a7e1853e1951ef5" providerId="LiveId" clId="{CF1FAA12-072C-4ED5-BA76-0FFFAEFDB88A}" dt="2025-09-04T21:10:23.949" v="152" actId="1076"/>
-        <pc:sldMkLst>
-          <pc:docMk/>
-          <pc:sldMk cId="3413348423" sldId="367"/>
-        </pc:sldMkLst>
-        <pc:spChg chg="mod">
-          <ac:chgData name="Zonghua Gu" userId="9a7e1853e1951ef5" providerId="LiveId" clId="{CF1FAA12-072C-4ED5-BA76-0FFFAEFDB88A}" dt="2025-09-04T21:09:16.596" v="150" actId="20577"/>
-          <ac:spMkLst>
-            <pc:docMk/>
-            <pc:sldMk cId="3413348423" sldId="367"/>
-            <ac:spMk id="3" creationId="{00000000-0000-0000-0000-000000000000}"/>
-          </ac:spMkLst>
-        </pc:spChg>
-        <pc:graphicFrameChg chg="add mod modGraphic">
-          <ac:chgData name="Zonghua Gu" userId="9a7e1853e1951ef5" providerId="LiveId" clId="{CF1FAA12-072C-4ED5-BA76-0FFFAEFDB88A}" dt="2025-09-04T21:10:23.949" v="152" actId="1076"/>
-          <ac:graphicFrameMkLst>
-            <pc:docMk/>
-            <pc:sldMk cId="3413348423" sldId="367"/>
-            <ac:graphicFrameMk id="4" creationId="{E675A2F8-1917-E32A-1D6F-9612FFD62311}"/>
-          </ac:graphicFrameMkLst>
-        </pc:graphicFrameChg>
-      </pc:sldChg>
-      <pc:sldChg chg="modSp mod">
-        <pc:chgData name="Zonghua Gu" userId="9a7e1853e1951ef5" providerId="LiveId" clId="{CF1FAA12-072C-4ED5-BA76-0FFFAEFDB88A}" dt="2025-09-11T23:45:29.939" v="162" actId="20577"/>
-        <pc:sldMkLst>
-          <pc:docMk/>
-          <pc:sldMk cId="1834379896" sldId="375"/>
-        </pc:sldMkLst>
-        <pc:spChg chg="mod">
-          <ac:chgData name="Zonghua Gu" userId="9a7e1853e1951ef5" providerId="LiveId" clId="{CF1FAA12-072C-4ED5-BA76-0FFFAEFDB88A}" dt="2025-09-11T23:45:29.939" v="162" actId="20577"/>
-          <ac:spMkLst>
-            <pc:docMk/>
-            <pc:sldMk cId="1834379896" sldId="375"/>
-            <ac:spMk id="4" creationId="{00000000-0000-0000-0000-000000000000}"/>
-          </ac:spMkLst>
-        </pc:spChg>
-      </pc:sldChg>
-      <pc:sldChg chg="modSp">
-        <pc:chgData name="Zonghua Gu" userId="9a7e1853e1951ef5" providerId="LiveId" clId="{CF1FAA12-072C-4ED5-BA76-0FFFAEFDB88A}" dt="2025-09-11T23:48:53.230" v="200"/>
-        <pc:sldMkLst>
-          <pc:docMk/>
-          <pc:sldMk cId="74280192" sldId="377"/>
-        </pc:sldMkLst>
-        <pc:spChg chg="mod">
-          <ac:chgData name="Zonghua Gu" userId="9a7e1853e1951ef5" providerId="LiveId" clId="{CF1FAA12-072C-4ED5-BA76-0FFFAEFDB88A}" dt="2025-09-11T23:48:53.230" v="200"/>
-          <ac:spMkLst>
-            <pc:docMk/>
-            <pc:sldMk cId="74280192" sldId="377"/>
-            <ac:spMk id="3" creationId="{00000000-0000-0000-0000-000000000000}"/>
-          </ac:spMkLst>
-        </pc:spChg>
-      </pc:sldChg>
-      <pc:sldChg chg="modSp mod">
-        <pc:chgData name="Zonghua Gu" userId="9a7e1853e1951ef5" providerId="LiveId" clId="{CF1FAA12-072C-4ED5-BA76-0FFFAEFDB88A}" dt="2025-09-11T23:46:09.597" v="190" actId="20577"/>
-        <pc:sldMkLst>
-          <pc:docMk/>
-          <pc:sldMk cId="811871471" sldId="380"/>
-        </pc:sldMkLst>
-        <pc:spChg chg="mod">
-          <ac:chgData name="Zonghua Gu" userId="9a7e1853e1951ef5" providerId="LiveId" clId="{CF1FAA12-072C-4ED5-BA76-0FFFAEFDB88A}" dt="2025-09-11T23:46:09.597" v="190" actId="20577"/>
-          <ac:spMkLst>
-            <pc:docMk/>
-            <pc:sldMk cId="811871471" sldId="380"/>
-            <ac:spMk id="4" creationId="{00000000-0000-0000-0000-000000000000}"/>
-          </ac:spMkLst>
-        </pc:spChg>
-      </pc:sldChg>
-      <pc:sldChg chg="modSp mod">
-        <pc:chgData name="Zonghua Gu" userId="9a7e1853e1951ef5" providerId="LiveId" clId="{CF1FAA12-072C-4ED5-BA76-0FFFAEFDB88A}" dt="2025-09-11T23:46:20.666" v="199" actId="20577"/>
-        <pc:sldMkLst>
-          <pc:docMk/>
-          <pc:sldMk cId="3132920451" sldId="382"/>
-        </pc:sldMkLst>
-        <pc:spChg chg="mod">
-          <ac:chgData name="Zonghua Gu" userId="9a7e1853e1951ef5" providerId="LiveId" clId="{CF1FAA12-072C-4ED5-BA76-0FFFAEFDB88A}" dt="2025-09-11T23:46:20.666" v="199" actId="20577"/>
-          <ac:spMkLst>
-            <pc:docMk/>
-            <pc:sldMk cId="3132920451" sldId="382"/>
-            <ac:spMk id="4" creationId="{00000000-0000-0000-0000-000000000000}"/>
-          </ac:spMkLst>
-        </pc:spChg>
-      </pc:sldChg>
-      <pc:sldChg chg="modSp mod">
-        <pc:chgData name="Zonghua Gu" userId="9a7e1853e1951ef5" providerId="LiveId" clId="{CF1FAA12-072C-4ED5-BA76-0FFFAEFDB88A}" dt="2025-09-22T01:50:10.314" v="266" actId="1076"/>
-        <pc:sldMkLst>
-          <pc:docMk/>
-          <pc:sldMk cId="2623990252" sldId="383"/>
-        </pc:sldMkLst>
-        <pc:spChg chg="mod">
-          <ac:chgData name="Zonghua Gu" userId="9a7e1853e1951ef5" providerId="LiveId" clId="{CF1FAA12-072C-4ED5-BA76-0FFFAEFDB88A}" dt="2025-09-22T01:50:10.314" v="266" actId="1076"/>
-          <ac:spMkLst>
-            <pc:docMk/>
-            <pc:sldMk cId="2623990252" sldId="383"/>
-            <ac:spMk id="16" creationId="{00000000-0000-0000-0000-000000000000}"/>
-          </ac:spMkLst>
-        </pc:spChg>
-        <pc:spChg chg="mod">
-          <ac:chgData name="Zonghua Gu" userId="9a7e1853e1951ef5" providerId="LiveId" clId="{CF1FAA12-072C-4ED5-BA76-0FFFAEFDB88A}" dt="2025-09-22T01:50:06.096" v="265" actId="1036"/>
-          <ac:spMkLst>
-            <pc:docMk/>
-            <pc:sldMk cId="2623990252" sldId="383"/>
-            <ac:spMk id="17" creationId="{00000000-0000-0000-0000-000000000000}"/>
-          </ac:spMkLst>
-        </pc:spChg>
-        <pc:spChg chg="mod">
-          <ac:chgData name="Zonghua Gu" userId="9a7e1853e1951ef5" providerId="LiveId" clId="{CF1FAA12-072C-4ED5-BA76-0FFFAEFDB88A}" dt="2025-09-22T01:50:06.096" v="265" actId="1036"/>
-          <ac:spMkLst>
-            <pc:docMk/>
-            <pc:sldMk cId="2623990252" sldId="383"/>
-            <ac:spMk id="18" creationId="{00000000-0000-0000-0000-000000000000}"/>
-          </ac:spMkLst>
-        </pc:spChg>
-        <pc:spChg chg="mod">
-          <ac:chgData name="Zonghua Gu" userId="9a7e1853e1951ef5" providerId="LiveId" clId="{CF1FAA12-072C-4ED5-BA76-0FFFAEFDB88A}" dt="2025-09-22T01:50:06.096" v="265" actId="1036"/>
-          <ac:spMkLst>
-            <pc:docMk/>
-            <pc:sldMk cId="2623990252" sldId="383"/>
-            <ac:spMk id="19" creationId="{00000000-0000-0000-0000-000000000000}"/>
-          </ac:spMkLst>
-        </pc:spChg>
-        <pc:spChg chg="mod">
-          <ac:chgData name="Zonghua Gu" userId="9a7e1853e1951ef5" providerId="LiveId" clId="{CF1FAA12-072C-4ED5-BA76-0FFFAEFDB88A}" dt="2025-09-22T01:50:06.096" v="265" actId="1036"/>
-          <ac:spMkLst>
-            <pc:docMk/>
-            <pc:sldMk cId="2623990252" sldId="383"/>
-            <ac:spMk id="20" creationId="{00000000-0000-0000-0000-000000000000}"/>
-          </ac:spMkLst>
-        </pc:spChg>
-        <pc:spChg chg="mod">
-          <ac:chgData name="Zonghua Gu" userId="9a7e1853e1951ef5" providerId="LiveId" clId="{CF1FAA12-072C-4ED5-BA76-0FFFAEFDB88A}" dt="2025-09-22T01:50:06.096" v="265" actId="1036"/>
-          <ac:spMkLst>
-            <pc:docMk/>
-            <pc:sldMk cId="2623990252" sldId="383"/>
-            <ac:spMk id="21" creationId="{00000000-0000-0000-0000-000000000000}"/>
-          </ac:spMkLst>
-        </pc:spChg>
-        <pc:spChg chg="mod">
-          <ac:chgData name="Zonghua Gu" userId="9a7e1853e1951ef5" providerId="LiveId" clId="{CF1FAA12-072C-4ED5-BA76-0FFFAEFDB88A}" dt="2025-09-22T01:50:06.096" v="265" actId="1036"/>
-          <ac:spMkLst>
-            <pc:docMk/>
-            <pc:sldMk cId="2623990252" sldId="383"/>
-            <ac:spMk id="22" creationId="{00000000-0000-0000-0000-000000000000}"/>
-          </ac:spMkLst>
-        </pc:spChg>
-        <pc:spChg chg="mod">
-          <ac:chgData name="Zonghua Gu" userId="9a7e1853e1951ef5" providerId="LiveId" clId="{CF1FAA12-072C-4ED5-BA76-0FFFAEFDB88A}" dt="2025-09-22T01:50:06.096" v="265" actId="1036"/>
-          <ac:spMkLst>
-            <pc:docMk/>
-            <pc:sldMk cId="2623990252" sldId="383"/>
-            <ac:spMk id="23" creationId="{00000000-0000-0000-0000-000000000000}"/>
-          </ac:spMkLst>
-        </pc:spChg>
-        <pc:spChg chg="mod">
-          <ac:chgData name="Zonghua Gu" userId="9a7e1853e1951ef5" providerId="LiveId" clId="{CF1FAA12-072C-4ED5-BA76-0FFFAEFDB88A}" dt="2025-09-22T01:50:06.096" v="265" actId="1036"/>
-          <ac:spMkLst>
-            <pc:docMk/>
-            <pc:sldMk cId="2623990252" sldId="383"/>
-            <ac:spMk id="24" creationId="{00000000-0000-0000-0000-000000000000}"/>
-          </ac:spMkLst>
-        </pc:spChg>
-        <pc:spChg chg="mod">
-          <ac:chgData name="Zonghua Gu" userId="9a7e1853e1951ef5" providerId="LiveId" clId="{CF1FAA12-072C-4ED5-BA76-0FFFAEFDB88A}" dt="2025-09-22T01:50:06.096" v="265" actId="1036"/>
-          <ac:spMkLst>
-            <pc:docMk/>
-            <pc:sldMk cId="2623990252" sldId="383"/>
-            <ac:spMk id="38917" creationId="{00000000-0000-0000-0000-000000000000}"/>
-          </ac:spMkLst>
-        </pc:spChg>
-        <pc:graphicFrameChg chg="mod">
-          <ac:chgData name="Zonghua Gu" userId="9a7e1853e1951ef5" providerId="LiveId" clId="{CF1FAA12-072C-4ED5-BA76-0FFFAEFDB88A}" dt="2025-09-22T01:50:06.096" v="265" actId="1036"/>
-          <ac:graphicFrameMkLst>
-            <pc:docMk/>
-            <pc:sldMk cId="2623990252" sldId="383"/>
-            <ac:graphicFrameMk id="39012" creationId="{00000000-0000-0000-0000-000000000000}"/>
-          </ac:graphicFrameMkLst>
-        </pc:graphicFrameChg>
-      </pc:sldChg>
-      <pc:sldChg chg="modSp new del mod">
-        <pc:chgData name="Zonghua Gu" userId="9a7e1853e1951ef5" providerId="LiveId" clId="{CF1FAA12-072C-4ED5-BA76-0FFFAEFDB88A}" dt="2025-09-22T01:28:57.058" v="259" actId="2696"/>
-        <pc:sldMkLst>
-          <pc:docMk/>
-          <pc:sldMk cId="1456166100" sldId="384"/>
-        </pc:sldMkLst>
-        <pc:spChg chg="mod">
-          <ac:chgData name="Zonghua Gu" userId="9a7e1853e1951ef5" providerId="LiveId" clId="{CF1FAA12-072C-4ED5-BA76-0FFFAEFDB88A}" dt="2025-09-22T01:28:02.930" v="254" actId="20577"/>
-          <ac:spMkLst>
-            <pc:docMk/>
-            <pc:sldMk cId="1456166100" sldId="384"/>
-            <ac:spMk id="2" creationId="{F03CE9CC-DEC3-BC36-FF0A-FD088EB33CA9}"/>
-          </ac:spMkLst>
-        </pc:spChg>
-        <pc:spChg chg="mod">
-          <ac:chgData name="Zonghua Gu" userId="9a7e1853e1951ef5" providerId="LiveId" clId="{CF1FAA12-072C-4ED5-BA76-0FFFAEFDB88A}" dt="2025-09-22T01:28:44.738" v="258"/>
-          <ac:spMkLst>
-            <pc:docMk/>
-            <pc:sldMk cId="1456166100" sldId="384"/>
-            <ac:spMk id="4" creationId="{FD21DA5F-0B0C-5E4B-FFBA-4A8692F7A975}"/>
-          </ac:spMkLst>
-        </pc:spChg>
       </pc:sldChg>
     </pc:docChg>
   </pc:docChgLst>
@@ -493,7 +261,7 @@
             <a:fld id="{2AEAFE1F-9E52-45C8-9793-E819F0044A1C}" type="datetimeFigureOut">
               <a:rPr lang="en-US" smtClean="0"/>
               <a:pPr/>
-              <a:t>9/21/2025</a:t>
+              <a:t>12/6/2025</a:t>
             </a:fld>
             <a:endParaRPr lang="en-US"/>
           </a:p>
@@ -780,6 +548,215 @@
       </p:grpSpPr>
       <p:sp>
         <p:nvSpPr>
+          <p:cNvPr id="1324034" name="Rectangle 2"/>
+          <p:cNvSpPr>
+            <a:spLocks noGrp="1" noRot="1" noChangeAspect="1" noChangeArrowheads="1" noTextEdit="1"/>
+          </p:cNvSpPr>
+          <p:nvPr>
+            <p:ph type="sldImg"/>
+          </p:nvPr>
+        </p:nvSpPr>
+        <p:spPr/>
+      </p:sp>
+      <p:sp>
+        <p:nvSpPr>
+          <p:cNvPr id="1324035" name="Rectangle 3"/>
+          <p:cNvSpPr>
+            <a:spLocks noGrp="1" noChangeArrowheads="1"/>
+          </p:cNvSpPr>
+          <p:nvPr>
+            <p:ph type="body" idx="1"/>
+          </p:nvPr>
+        </p:nvSpPr>
+        <p:spPr/>
+        <p:txBody>
+          <a:bodyPr/>
+          <a:lstStyle/>
+          <a:p>
+            <a:endParaRPr lang="en-US"/>
+          </a:p>
+        </p:txBody>
+      </p:sp>
+    </p:spTree>
+    <p:extLst>
+      <p:ext uri="{BB962C8B-B14F-4D97-AF65-F5344CB8AC3E}">
+        <p14:creationId xmlns:p14="http://schemas.microsoft.com/office/powerpoint/2010/main" val="338861215"/>
+      </p:ext>
+    </p:extLst>
+  </p:cSld>
+  <p:clrMapOvr>
+    <a:masterClrMapping/>
+  </p:clrMapOvr>
+</p:notes>
+</file>
+
+<file path=ppt/notesSlides/notesSlide2.xml><?xml version="1.0" encoding="utf-8"?>
+<p:notes xmlns:a="http://schemas.openxmlformats.org/drawingml/2006/main" xmlns:r="http://schemas.openxmlformats.org/officeDocument/2006/relationships" xmlns:p="http://schemas.openxmlformats.org/presentationml/2006/main">
+  <p:cSld>
+    <p:spTree>
+      <p:nvGrpSpPr>
+        <p:cNvPr id="1" name=""/>
+        <p:cNvGrpSpPr/>
+        <p:nvPr/>
+      </p:nvGrpSpPr>
+      <p:grpSpPr>
+        <a:xfrm>
+          <a:off x="0" y="0"/>
+          <a:ext cx="0" cy="0"/>
+          <a:chOff x="0" y="0"/>
+          <a:chExt cx="0" cy="0"/>
+        </a:xfrm>
+      </p:grpSpPr>
+      <p:sp>
+        <p:nvSpPr>
+          <p:cNvPr id="7" name="Rectangle 7"/>
+          <p:cNvSpPr>
+            <a:spLocks noGrp="1" noChangeArrowheads="1"/>
+          </p:cNvSpPr>
+          <p:nvPr>
+            <p:ph type="sldNum" sz="quarter" idx="5"/>
+          </p:nvPr>
+        </p:nvSpPr>
+        <p:spPr>
+          <a:ln/>
+        </p:spPr>
+        <p:txBody>
+          <a:bodyPr/>
+          <a:lstStyle/>
+          <a:p>
+            <a:pPr marL="0" marR="0" lvl="0" indent="0" algn="r" defTabSz="914400" rtl="0" eaLnBrk="1" fontAlgn="auto" latinLnBrk="0" hangingPunct="1">
+              <a:lnSpc>
+                <a:spcPct val="100000"/>
+              </a:lnSpc>
+              <a:spcBef>
+                <a:spcPts val="0"/>
+              </a:spcBef>
+              <a:spcAft>
+                <a:spcPts val="0"/>
+              </a:spcAft>
+              <a:buClrTx/>
+              <a:buSzTx/>
+              <a:buFontTx/>
+              <a:buNone/>
+              <a:tabLst/>
+              <a:defRPr/>
+            </a:pPr>
+            <a:fld id="{29C167F7-1B06-44DE-A83B-5844B4E34198}" type="slidenum">
+              <a:rPr kumimoji="0" lang="en-US" sz="1200" b="0" i="0" u="none" strike="noStrike" kern="1200" cap="none" spc="0" normalizeH="0" baseline="0" noProof="0">
+                <a:ln>
+                  <a:noFill/>
+                </a:ln>
+                <a:solidFill>
+                  <a:prstClr val="black"/>
+                </a:solidFill>
+                <a:effectLst/>
+                <a:uLnTx/>
+                <a:uFillTx/>
+                <a:latin typeface="Calibri"/>
+                <a:ea typeface="+mn-ea"/>
+                <a:cs typeface="+mn-cs"/>
+              </a:rPr>
+              <a:pPr marL="0" marR="0" lvl="0" indent="0" algn="r" defTabSz="914400" rtl="0" eaLnBrk="1" fontAlgn="auto" latinLnBrk="0" hangingPunct="1">
+                <a:lnSpc>
+                  <a:spcPct val="100000"/>
+                </a:lnSpc>
+                <a:spcBef>
+                  <a:spcPts val="0"/>
+                </a:spcBef>
+                <a:spcAft>
+                  <a:spcPts val="0"/>
+                </a:spcAft>
+                <a:buClrTx/>
+                <a:buSzTx/>
+                <a:buFontTx/>
+                <a:buNone/>
+                <a:tabLst/>
+                <a:defRPr/>
+              </a:pPr>
+              <a:t>6</a:t>
+            </a:fld>
+            <a:endParaRPr kumimoji="0" lang="en-US" sz="1200" b="0" i="0" u="none" strike="noStrike" kern="1200" cap="none" spc="0" normalizeH="0" baseline="0" noProof="0">
+              <a:ln>
+                <a:noFill/>
+              </a:ln>
+              <a:solidFill>
+                <a:prstClr val="black"/>
+              </a:solidFill>
+              <a:effectLst/>
+              <a:uLnTx/>
+              <a:uFillTx/>
+              <a:latin typeface="Calibri"/>
+              <a:ea typeface="+mn-ea"/>
+              <a:cs typeface="+mn-cs"/>
+            </a:endParaRPr>
+          </a:p>
+        </p:txBody>
+      </p:sp>
+      <p:sp>
+        <p:nvSpPr>
+          <p:cNvPr id="186370" name="Rectangle 2"/>
+          <p:cNvSpPr>
+            <a:spLocks noGrp="1" noRot="1" noChangeAspect="1" noChangeArrowheads="1" noTextEdit="1"/>
+          </p:cNvSpPr>
+          <p:nvPr>
+            <p:ph type="sldImg"/>
+          </p:nvPr>
+        </p:nvSpPr>
+        <p:spPr>
+          <a:ln/>
+        </p:spPr>
+      </p:sp>
+      <p:sp>
+        <p:nvSpPr>
+          <p:cNvPr id="186371" name="Rectangle 3"/>
+          <p:cNvSpPr>
+            <a:spLocks noGrp="1" noChangeArrowheads="1"/>
+          </p:cNvSpPr>
+          <p:nvPr>
+            <p:ph type="body" idx="1"/>
+          </p:nvPr>
+        </p:nvSpPr>
+        <p:spPr/>
+        <p:txBody>
+          <a:bodyPr/>
+          <a:lstStyle/>
+          <a:p>
+            <a:endParaRPr lang="en-US" dirty="0"/>
+          </a:p>
+        </p:txBody>
+      </p:sp>
+    </p:spTree>
+    <p:extLst>
+      <p:ext uri="{BB962C8B-B14F-4D97-AF65-F5344CB8AC3E}">
+        <p14:creationId xmlns:p14="http://schemas.microsoft.com/office/powerpoint/2010/main" val="736948836"/>
+      </p:ext>
+    </p:extLst>
+  </p:cSld>
+  <p:clrMapOvr>
+    <a:masterClrMapping/>
+  </p:clrMapOvr>
+</p:notes>
+</file>
+
+<file path=ppt/notesSlides/notesSlide3.xml><?xml version="1.0" encoding="utf-8"?>
+<p:notes xmlns:a="http://schemas.openxmlformats.org/drawingml/2006/main" xmlns:r="http://schemas.openxmlformats.org/officeDocument/2006/relationships" xmlns:p="http://schemas.openxmlformats.org/presentationml/2006/main">
+  <p:cSld>
+    <p:spTree>
+      <p:nvGrpSpPr>
+        <p:cNvPr id="1" name=""/>
+        <p:cNvGrpSpPr/>
+        <p:nvPr/>
+      </p:nvGrpSpPr>
+      <p:grpSpPr>
+        <a:xfrm>
+          <a:off x="0" y="0"/>
+          <a:ext cx="0" cy="0"/>
+          <a:chOff x="0" y="0"/>
+          <a:chExt cx="0" cy="0"/>
+        </a:xfrm>
+      </p:grpSpPr>
+      <p:sp>
+        <p:nvSpPr>
           <p:cNvPr id="2" name="Slide Image Placeholder 1"/>
           <p:cNvSpPr>
             <a:spLocks noGrp="1" noRot="1" noChangeAspect="1"/>
@@ -1150,182 +1127,6 @@
                 <a:tabLst/>
                 <a:defRPr/>
               </a:pPr>
-              <a:t>5</a:t>
-            </a:fld>
-            <a:endParaRPr kumimoji="0" lang="en-US" sz="1200" b="0" i="0" u="none" strike="noStrike" kern="1200" cap="none" spc="0" normalizeH="0" baseline="0" noProof="0">
-              <a:ln>
-                <a:noFill/>
-              </a:ln>
-              <a:solidFill>
-                <a:prstClr val="black"/>
-              </a:solidFill>
-              <a:effectLst/>
-              <a:uLnTx/>
-              <a:uFillTx/>
-              <a:latin typeface="Calibri"/>
-              <a:ea typeface="+mn-ea"/>
-              <a:cs typeface="+mn-cs"/>
-            </a:endParaRPr>
-          </a:p>
-        </p:txBody>
-      </p:sp>
-    </p:spTree>
-    <p:extLst>
-      <p:ext uri="{BB962C8B-B14F-4D97-AF65-F5344CB8AC3E}">
-        <p14:creationId xmlns:p14="http://schemas.microsoft.com/office/powerpoint/2010/main" val="1851002411"/>
-      </p:ext>
-    </p:extLst>
-  </p:cSld>
-  <p:clrMapOvr>
-    <a:masterClrMapping/>
-  </p:clrMapOvr>
-</p:notes>
-</file>
-
-<file path=ppt/notesSlides/notesSlide2.xml><?xml version="1.0" encoding="utf-8"?>
-<p:notes xmlns:a="http://schemas.openxmlformats.org/drawingml/2006/main" xmlns:r="http://schemas.openxmlformats.org/officeDocument/2006/relationships" xmlns:p="http://schemas.openxmlformats.org/presentationml/2006/main">
-  <p:cSld>
-    <p:spTree>
-      <p:nvGrpSpPr>
-        <p:cNvPr id="1" name=""/>
-        <p:cNvGrpSpPr/>
-        <p:nvPr/>
-      </p:nvGrpSpPr>
-      <p:grpSpPr>
-        <a:xfrm>
-          <a:off x="0" y="0"/>
-          <a:ext cx="0" cy="0"/>
-          <a:chOff x="0" y="0"/>
-          <a:chExt cx="0" cy="0"/>
-        </a:xfrm>
-      </p:grpSpPr>
-      <p:sp>
-        <p:nvSpPr>
-          <p:cNvPr id="1324034" name="Rectangle 2"/>
-          <p:cNvSpPr>
-            <a:spLocks noGrp="1" noRot="1" noChangeAspect="1" noChangeArrowheads="1" noTextEdit="1"/>
-          </p:cNvSpPr>
-          <p:nvPr>
-            <p:ph type="sldImg"/>
-          </p:nvPr>
-        </p:nvSpPr>
-        <p:spPr/>
-      </p:sp>
-      <p:sp>
-        <p:nvSpPr>
-          <p:cNvPr id="1324035" name="Rectangle 3"/>
-          <p:cNvSpPr>
-            <a:spLocks noGrp="1" noChangeArrowheads="1"/>
-          </p:cNvSpPr>
-          <p:nvPr>
-            <p:ph type="body" idx="1"/>
-          </p:nvPr>
-        </p:nvSpPr>
-        <p:spPr/>
-        <p:txBody>
-          <a:bodyPr/>
-          <a:lstStyle/>
-          <a:p>
-            <a:endParaRPr lang="en-US"/>
-          </a:p>
-        </p:txBody>
-      </p:sp>
-    </p:spTree>
-    <p:extLst>
-      <p:ext uri="{BB962C8B-B14F-4D97-AF65-F5344CB8AC3E}">
-        <p14:creationId xmlns:p14="http://schemas.microsoft.com/office/powerpoint/2010/main" val="338861215"/>
-      </p:ext>
-    </p:extLst>
-  </p:cSld>
-  <p:clrMapOvr>
-    <a:masterClrMapping/>
-  </p:clrMapOvr>
-</p:notes>
-</file>
-
-<file path=ppt/notesSlides/notesSlide3.xml><?xml version="1.0" encoding="utf-8"?>
-<p:notes xmlns:a="http://schemas.openxmlformats.org/drawingml/2006/main" xmlns:r="http://schemas.openxmlformats.org/officeDocument/2006/relationships" xmlns:p="http://schemas.openxmlformats.org/presentationml/2006/main">
-  <p:cSld>
-    <p:spTree>
-      <p:nvGrpSpPr>
-        <p:cNvPr id="1" name=""/>
-        <p:cNvGrpSpPr/>
-        <p:nvPr/>
-      </p:nvGrpSpPr>
-      <p:grpSpPr>
-        <a:xfrm>
-          <a:off x="0" y="0"/>
-          <a:ext cx="0" cy="0"/>
-          <a:chOff x="0" y="0"/>
-          <a:chExt cx="0" cy="0"/>
-        </a:xfrm>
-      </p:grpSpPr>
-      <p:sp>
-        <p:nvSpPr>
-          <p:cNvPr id="7" name="Rectangle 7"/>
-          <p:cNvSpPr>
-            <a:spLocks noGrp="1" noChangeArrowheads="1"/>
-          </p:cNvSpPr>
-          <p:nvPr>
-            <p:ph type="sldNum" sz="quarter" idx="5"/>
-          </p:nvPr>
-        </p:nvSpPr>
-        <p:spPr>
-          <a:ln/>
-        </p:spPr>
-        <p:txBody>
-          <a:bodyPr/>
-          <a:lstStyle/>
-          <a:p>
-            <a:pPr marL="0" marR="0" lvl="0" indent="0" algn="r" defTabSz="914400" rtl="0" eaLnBrk="1" fontAlgn="auto" latinLnBrk="0" hangingPunct="1">
-              <a:lnSpc>
-                <a:spcPct val="100000"/>
-              </a:lnSpc>
-              <a:spcBef>
-                <a:spcPts val="0"/>
-              </a:spcBef>
-              <a:spcAft>
-                <a:spcPts val="0"/>
-              </a:spcAft>
-              <a:buClrTx/>
-              <a:buSzTx/>
-              <a:buFontTx/>
-              <a:buNone/>
-              <a:tabLst/>
-              <a:defRPr/>
-            </a:pPr>
-            <a:fld id="{29C167F7-1B06-44DE-A83B-5844B4E34198}" type="slidenum">
-              <a:rPr kumimoji="0" lang="en-US" sz="1200" b="0" i="0" u="none" strike="noStrike" kern="1200" cap="none" spc="0" normalizeH="0" baseline="0" noProof="0">
-                <a:ln>
-                  <a:noFill/>
-                </a:ln>
-                <a:solidFill>
-                  <a:prstClr val="black"/>
-                </a:solidFill>
-                <a:effectLst/>
-                <a:uLnTx/>
-                <a:uFillTx/>
-                <a:latin typeface="Calibri"/>
-                <a:ea typeface="+mn-ea"/>
-                <a:cs typeface="+mn-cs"/>
-              </a:rPr>
-              <a:pPr marL="0" marR="0" lvl="0" indent="0" algn="r" defTabSz="914400" rtl="0" eaLnBrk="1" fontAlgn="auto" latinLnBrk="0" hangingPunct="1">
-                <a:lnSpc>
-                  <a:spcPct val="100000"/>
-                </a:lnSpc>
-                <a:spcBef>
-                  <a:spcPts val="0"/>
-                </a:spcBef>
-                <a:spcAft>
-                  <a:spcPts val="0"/>
-                </a:spcAft>
-                <a:buClrTx/>
-                <a:buSzTx/>
-                <a:buFontTx/>
-                <a:buNone/>
-                <a:tabLst/>
-                <a:defRPr/>
-              </a:pPr>
               <a:t>7</a:t>
             </a:fld>
             <a:endParaRPr kumimoji="0" lang="en-US" sz="1200" b="0" i="0" u="none" strike="noStrike" kern="1200" cap="none" spc="0" normalizeH="0" baseline="0" noProof="0">
@@ -1345,43 +1146,10 @@
           </a:p>
         </p:txBody>
       </p:sp>
-      <p:sp>
-        <p:nvSpPr>
-          <p:cNvPr id="186370" name="Rectangle 2"/>
-          <p:cNvSpPr>
-            <a:spLocks noGrp="1" noRot="1" noChangeAspect="1" noChangeArrowheads="1" noTextEdit="1"/>
-          </p:cNvSpPr>
-          <p:nvPr>
-            <p:ph type="sldImg"/>
-          </p:nvPr>
-        </p:nvSpPr>
-        <p:spPr>
-          <a:ln/>
-        </p:spPr>
-      </p:sp>
-      <p:sp>
-        <p:nvSpPr>
-          <p:cNvPr id="186371" name="Rectangle 3"/>
-          <p:cNvSpPr>
-            <a:spLocks noGrp="1" noChangeArrowheads="1"/>
-          </p:cNvSpPr>
-          <p:nvPr>
-            <p:ph type="body" idx="1"/>
-          </p:nvPr>
-        </p:nvSpPr>
-        <p:spPr/>
-        <p:txBody>
-          <a:bodyPr/>
-          <a:lstStyle/>
-          <a:p>
-            <a:endParaRPr lang="en-US" dirty="0"/>
-          </a:p>
-        </p:txBody>
-      </p:sp>
     </p:spTree>
     <p:extLst>
       <p:ext uri="{BB962C8B-B14F-4D97-AF65-F5344CB8AC3E}">
-        <p14:creationId xmlns:p14="http://schemas.microsoft.com/office/powerpoint/2010/main" val="736948836"/>
+        <p14:creationId xmlns:p14="http://schemas.microsoft.com/office/powerpoint/2010/main" val="1851002411"/>
       </p:ext>
     </p:extLst>
   </p:cSld>
@@ -2466,7 +2234,7 @@
             <a:fld id="{2E26774B-6488-4259-9342-6CBDB2BFD4E4}" type="datetime1">
               <a:rPr lang="en-US" smtClean="0"/>
               <a:pPr eaLnBrk="1" latinLnBrk="0" hangingPunct="1"/>
-              <a:t>9/21/2025</a:t>
+              <a:t>12/6/2025</a:t>
             </a:fld>
             <a:endParaRPr lang="en-US" sz="1600" dirty="0"/>
           </a:p>
@@ -2841,7 +2609,7 @@
             <a:fld id="{9B2E7711-0BE3-4AFC-959B-CB5C31A7AE48}" type="datetime1">
               <a:rPr lang="en-US" smtClean="0"/>
               <a:pPr eaLnBrk="1" latinLnBrk="0" hangingPunct="1"/>
-              <a:t>9/21/2025</a:t>
+              <a:t>12/6/2025</a:t>
             </a:fld>
             <a:endParaRPr lang="en-US"/>
           </a:p>
@@ -3042,7 +2810,7 @@
             <a:fld id="{825AAB62-A572-4E37-B772-B4A75ADE0B18}" type="datetime1">
               <a:rPr lang="en-US" smtClean="0"/>
               <a:pPr eaLnBrk="1" latinLnBrk="0" hangingPunct="1"/>
-              <a:t>9/21/2025</a:t>
+              <a:t>12/6/2025</a:t>
             </a:fld>
             <a:endParaRPr lang="en-US"/>
           </a:p>
@@ -5092,7 +4860,7 @@
             <a:fld id="{B0F52420-10F8-488E-969A-A9BE388BE9C4}" type="datetime1">
               <a:rPr lang="en-US" smtClean="0"/>
               <a:pPr eaLnBrk="1" latinLnBrk="0" hangingPunct="1"/>
-              <a:t>9/21/2025</a:t>
+              <a:t>12/6/2025</a:t>
             </a:fld>
             <a:endParaRPr lang="en-US" dirty="0"/>
           </a:p>
@@ -6404,7 +6172,7 @@
           <a:p>
             <a:fld id="{C31F198E-4891-0744-982A-035A8E9D5E57}" type="datetime1">
               <a:rPr lang="en-US" smtClean="0"/>
-              <a:t>9/21/2025</a:t>
+              <a:t>12/6/2025</a:t>
             </a:fld>
             <a:endParaRPr lang="en-US"/>
           </a:p>
@@ -6602,7 +6370,7 @@
           <a:p>
             <a:fld id="{69240954-B576-9D4D-A4A4-BAF4EBC7B2CF}" type="datetime1">
               <a:rPr lang="en-US" smtClean="0"/>
-              <a:t>9/21/2025</a:t>
+              <a:t>12/6/2025</a:t>
             </a:fld>
             <a:endParaRPr lang="en-US"/>
           </a:p>
@@ -6877,7 +6645,7 @@
           <a:p>
             <a:fld id="{CBDD84B5-E081-4443-9C9D-23B64540996F}" type="datetime1">
               <a:rPr lang="en-US" smtClean="0"/>
-              <a:t>9/21/2025</a:t>
+              <a:t>12/6/2025</a:t>
             </a:fld>
             <a:endParaRPr lang="en-US"/>
           </a:p>
@@ -7192,7 +6960,7 @@
           <a:p>
             <a:fld id="{7203B415-761D-814B-B6F6-D8584C5DFB68}" type="datetime1">
               <a:rPr lang="en-US" smtClean="0"/>
-              <a:t>9/21/2025</a:t>
+              <a:t>12/6/2025</a:t>
             </a:fld>
             <a:endParaRPr lang="en-US"/>
           </a:p>
@@ -7641,7 +7409,7 @@
           <a:p>
             <a:fld id="{CE4CC544-E270-624B-A146-427A1328771C}" type="datetime1">
               <a:rPr lang="en-US" smtClean="0"/>
-              <a:t>9/21/2025</a:t>
+              <a:t>12/6/2025</a:t>
             </a:fld>
             <a:endParaRPr lang="en-US"/>
           </a:p>
@@ -7892,7 +7660,7 @@
             <a:fld id="{96E96F24-58CF-47DA-907C-A9CD6353E425}" type="datetime1">
               <a:rPr lang="en-US" smtClean="0"/>
               <a:pPr eaLnBrk="1" latinLnBrk="0" hangingPunct="1"/>
-              <a:t>9/21/2025</a:t>
+              <a:t>12/6/2025</a:t>
             </a:fld>
             <a:endParaRPr lang="en-US" dirty="0"/>
           </a:p>
@@ -8113,7 +7881,7 @@
           <a:p>
             <a:fld id="{3CEF9BDF-98D8-2E40-B9CD-119F66CA07F0}" type="datetime1">
               <a:rPr lang="en-US" smtClean="0"/>
-              <a:t>9/21/2025</a:t>
+              <a:t>12/6/2025</a:t>
             </a:fld>
             <a:endParaRPr lang="en-US"/>
           </a:p>
@@ -8238,7 +8006,7 @@
           <a:p>
             <a:fld id="{E6FB255F-2FE0-274D-998F-31FB20EFB046}" type="datetime1">
               <a:rPr lang="en-US" smtClean="0"/>
-              <a:t>9/21/2025</a:t>
+              <a:t>12/6/2025</a:t>
             </a:fld>
             <a:endParaRPr lang="en-US"/>
           </a:p>
@@ -8543,7 +8311,7 @@
           <a:p>
             <a:fld id="{C3975A16-A311-5046-89EC-B02DC029DBB6}" type="datetime1">
               <a:rPr lang="en-US" smtClean="0"/>
-              <a:t>9/21/2025</a:t>
+              <a:t>12/6/2025</a:t>
             </a:fld>
             <a:endParaRPr lang="en-US"/>
           </a:p>
@@ -8825,7 +8593,7 @@
           <a:p>
             <a:fld id="{11CADE38-462A-F74A-9AF0-365C45329AEC}" type="datetime1">
               <a:rPr lang="en-US" smtClean="0"/>
-              <a:t>9/21/2025</a:t>
+              <a:t>12/6/2025</a:t>
             </a:fld>
             <a:endParaRPr lang="en-US"/>
           </a:p>
@@ -9005,7 +8773,7 @@
           <a:p>
             <a:fld id="{27E5EB6D-9795-774A-B846-CEE32CCDB9F4}" type="datetime1">
               <a:rPr lang="en-US" smtClean="0"/>
-              <a:t>9/21/2025</a:t>
+              <a:t>12/6/2025</a:t>
             </a:fld>
             <a:endParaRPr lang="en-US"/>
           </a:p>
@@ -9195,7 +8963,7 @@
           <a:p>
             <a:fld id="{2D2FCB11-01EB-AC45-9E2D-185B38D86EC5}" type="datetime1">
               <a:rPr lang="en-US" smtClean="0"/>
-              <a:t>9/21/2025</a:t>
+              <a:t>12/6/2025</a:t>
             </a:fld>
             <a:endParaRPr lang="en-US"/>
           </a:p>
@@ -10245,7 +10013,7 @@
             <a:fld id="{53AE4463-726A-4A35-9F46-98893432A3F9}" type="datetime1">
               <a:rPr lang="en-US" smtClean="0"/>
               <a:pPr eaLnBrk="1" latinLnBrk="0" hangingPunct="1"/>
-              <a:t>9/21/2025</a:t>
+              <a:t>12/6/2025</a:t>
             </a:fld>
             <a:endParaRPr lang="en-US"/>
           </a:p>
@@ -12295,7 +12063,7 @@
             <a:fld id="{FDF404D0-E306-4E90-90E3-E44D26246FFC}" type="datetime1">
               <a:rPr lang="en-US" smtClean="0"/>
               <a:pPr eaLnBrk="1" latinLnBrk="0" hangingPunct="1"/>
-              <a:t>9/21/2025</a:t>
+              <a:t>12/6/2025</a:t>
             </a:fld>
             <a:endParaRPr lang="en-US"/>
           </a:p>
@@ -12553,7 +12321,7 @@
             <a:fld id="{1485DA14-76F0-4D93-83FB-7878C79A1986}" type="datetime1">
               <a:rPr lang="en-US" smtClean="0"/>
               <a:pPr eaLnBrk="1" latinLnBrk="0" hangingPunct="1"/>
-              <a:t>9/21/2025</a:t>
+              <a:t>12/6/2025</a:t>
             </a:fld>
             <a:endParaRPr lang="en-US"/>
           </a:p>
@@ -12720,7 +12488,7 @@
             <a:fld id="{A15E552D-49E1-496B-B79C-E100986B8B5F}" type="datetime1">
               <a:rPr lang="en-US" smtClean="0"/>
               <a:pPr eaLnBrk="1" latinLnBrk="0" hangingPunct="1"/>
-              <a:t>9/21/2025</a:t>
+              <a:t>12/6/2025</a:t>
             </a:fld>
             <a:endParaRPr lang="en-US"/>
           </a:p>
@@ -13023,7 +12791,7 @@
             <a:fld id="{CEC72505-1551-4A98-97CD-F520B07184AD}" type="datetime1">
               <a:rPr lang="en-US" smtClean="0"/>
               <a:pPr eaLnBrk="1" latinLnBrk="0" hangingPunct="1"/>
-              <a:t>9/21/2025</a:t>
+              <a:t>12/6/2025</a:t>
             </a:fld>
             <a:endParaRPr lang="en-US"/>
           </a:p>
@@ -13456,7 +13224,7 @@
             <a:fld id="{7218F47B-BA16-4F20-B5BA-73F598D94B51}" type="datetime1">
               <a:rPr lang="en-US" smtClean="0"/>
               <a:pPr eaLnBrk="1" latinLnBrk="0" hangingPunct="1"/>
-              <a:t>9/21/2025</a:t>
+              <a:t>12/6/2025</a:t>
             </a:fld>
             <a:endParaRPr lang="en-US"/>
           </a:p>
@@ -15118,7 +14886,7 @@
           <a:p>
             <a:fld id="{20BAFD48-45E2-B54F-B7CB-E8D59064A99E}" type="datetime1">
               <a:rPr lang="en-US" smtClean="0"/>
-              <a:t>9/21/2025</a:t>
+              <a:t>12/6/2025</a:t>
             </a:fld>
             <a:endParaRPr lang="en-US"/>
           </a:p>
@@ -17544,7 +17312,7 @@
                 <a:tabLst/>
                 <a:defRPr/>
               </a:pPr>
-              <a:t>9/21/2025</a:t>
+              <a:t>12/6/2025</a:t>
             </a:fld>
             <a:endParaRPr kumimoji="0" lang="en-US" sz="900" b="0" i="0" u="none" strike="noStrike" kern="1200" cap="none" spc="0" normalizeH="0" baseline="0" noProof="0">
               <a:ln>
@@ -18140,7 +17908,7 @@
                 <a:tabLst/>
                 <a:defRPr/>
               </a:pPr>
-              <a:t>9/21/2025</a:t>
+              <a:t>12/6/2025</a:t>
             </a:fld>
             <a:endParaRPr kumimoji="0" lang="en-US" sz="900" b="0" i="0" u="none" strike="noStrike" kern="1200" cap="none" spc="0" normalizeH="0" baseline="0" noProof="0">
               <a:ln>
@@ -19228,7 +18996,7 @@
                 <a:tabLst/>
                 <a:defRPr/>
               </a:pPr>
-              <a:t>9/21/2025</a:t>
+              <a:t>12/6/2025</a:t>
             </a:fld>
             <a:endParaRPr kumimoji="0" lang="en-US" sz="900" b="0" i="0" u="none" strike="noStrike" kern="1200" cap="none" spc="0" normalizeH="0" baseline="0" noProof="0">
               <a:ln>
@@ -19824,7 +19592,7 @@
                 <a:tabLst/>
                 <a:defRPr/>
               </a:pPr>
-              <a:t>9/21/2025</a:t>
+              <a:t>12/6/2025</a:t>
             </a:fld>
             <a:endParaRPr kumimoji="0" lang="en-US" sz="900" b="0" i="0" u="none" strike="noStrike" kern="1200" cap="none" spc="0" normalizeH="0" baseline="0" noProof="0">
               <a:ln>
@@ -28142,270 +27910,7 @@
       </p:grpSpPr>
       <p:sp>
         <p:nvSpPr>
-          <p:cNvPr id="62" name="Rectangle 61"/>
-          <p:cNvSpPr/>
-          <p:nvPr/>
-        </p:nvSpPr>
-        <p:spPr>
-          <a:xfrm>
-            <a:off x="6426258" y="4419600"/>
-            <a:ext cx="802182" cy="589080"/>
-          </a:xfrm>
-          <a:prstGeom prst="rect">
-            <a:avLst/>
-          </a:prstGeom>
-          <a:solidFill>
-            <a:schemeClr val="bg1">
-              <a:lumMod val="75000"/>
-            </a:schemeClr>
-          </a:solidFill>
-          <a:ln>
-            <a:noFill/>
-          </a:ln>
-        </p:spPr>
-        <p:style>
-          <a:lnRef idx="2">
-            <a:schemeClr val="accent1">
-              <a:shade val="50000"/>
-            </a:schemeClr>
-          </a:lnRef>
-          <a:fillRef idx="1">
-            <a:schemeClr val="accent1"/>
-          </a:fillRef>
-          <a:effectRef idx="0">
-            <a:schemeClr val="accent1"/>
-          </a:effectRef>
-          <a:fontRef idx="minor">
-            <a:schemeClr val="lt1"/>
-          </a:fontRef>
-        </p:style>
-        <p:txBody>
-          <a:bodyPr rtlCol="0" anchor="ctr"/>
-          <a:lstStyle/>
-          <a:p>
-            <a:pPr marL="0" marR="0" lvl="0" indent="0" algn="ctr" defTabSz="914400" rtl="0" eaLnBrk="1" fontAlgn="auto" latinLnBrk="0" hangingPunct="1">
-              <a:lnSpc>
-                <a:spcPct val="100000"/>
-              </a:lnSpc>
-              <a:spcBef>
-                <a:spcPts val="0"/>
-              </a:spcBef>
-              <a:spcAft>
-                <a:spcPts val="0"/>
-              </a:spcAft>
-              <a:buClrTx/>
-              <a:buSzTx/>
-              <a:buFontTx/>
-              <a:buNone/>
-              <a:tabLst/>
-              <a:defRPr/>
-            </a:pPr>
-            <a:endParaRPr kumimoji="0" lang="en-US" sz="1800" b="0" i="0" u="none" strike="noStrike" kern="1200" cap="none" spc="0" normalizeH="0" baseline="0" noProof="0">
-              <a:ln>
-                <a:noFill/>
-              </a:ln>
-              <a:solidFill>
-                <a:prstClr val="white"/>
-              </a:solidFill>
-              <a:effectLst/>
-              <a:uLnTx/>
-              <a:uFillTx/>
-              <a:latin typeface="Gill Sans MT"/>
-              <a:ea typeface="+mn-ea"/>
-              <a:cs typeface="+mn-cs"/>
-            </a:endParaRPr>
-          </a:p>
-        </p:txBody>
-      </p:sp>
-      <p:sp>
-        <p:nvSpPr>
-          <p:cNvPr id="30" name="Rectangle 29"/>
-          <p:cNvSpPr/>
-          <p:nvPr/>
-        </p:nvSpPr>
-        <p:spPr>
-          <a:xfrm>
-            <a:off x="685800" y="1814215"/>
-            <a:ext cx="3962400" cy="3362920"/>
-          </a:xfrm>
-          <a:prstGeom prst="rect">
-            <a:avLst/>
-          </a:prstGeom>
-          <a:solidFill>
-            <a:schemeClr val="bg1">
-              <a:lumMod val="75000"/>
-            </a:schemeClr>
-          </a:solidFill>
-        </p:spPr>
-        <p:style>
-          <a:lnRef idx="2">
-            <a:schemeClr val="accent1">
-              <a:shade val="50000"/>
-            </a:schemeClr>
-          </a:lnRef>
-          <a:fillRef idx="1">
-            <a:schemeClr val="accent1"/>
-          </a:fillRef>
-          <a:effectRef idx="0">
-            <a:schemeClr val="accent1"/>
-          </a:effectRef>
-          <a:fontRef idx="minor">
-            <a:schemeClr val="lt1"/>
-          </a:fontRef>
-        </p:style>
-        <p:txBody>
-          <a:bodyPr rtlCol="0" anchor="ctr"/>
-          <a:lstStyle/>
-          <a:p>
-            <a:pPr marL="0" marR="0" lvl="0" indent="0" algn="ctr" defTabSz="914400" rtl="0" eaLnBrk="1" fontAlgn="auto" latinLnBrk="0" hangingPunct="1">
-              <a:lnSpc>
-                <a:spcPct val="100000"/>
-              </a:lnSpc>
-              <a:spcBef>
-                <a:spcPts val="0"/>
-              </a:spcBef>
-              <a:spcAft>
-                <a:spcPts val="0"/>
-              </a:spcAft>
-              <a:buClrTx/>
-              <a:buSzTx/>
-              <a:buFontTx/>
-              <a:buNone/>
-              <a:tabLst/>
-              <a:defRPr/>
-            </a:pPr>
-            <a:endParaRPr kumimoji="0" lang="en-US" sz="1800" b="0" i="0" u="none" strike="noStrike" kern="1200" cap="none" spc="0" normalizeH="0" baseline="0" noProof="0">
-              <a:ln>
-                <a:noFill/>
-              </a:ln>
-              <a:solidFill>
-                <a:prstClr val="white"/>
-              </a:solidFill>
-              <a:effectLst/>
-              <a:uLnTx/>
-              <a:uFillTx/>
-              <a:latin typeface="Gill Sans MT"/>
-              <a:ea typeface="+mn-ea"/>
-              <a:cs typeface="+mn-cs"/>
-            </a:endParaRPr>
-          </a:p>
-        </p:txBody>
-      </p:sp>
-      <p:sp>
-        <p:nvSpPr>
-          <p:cNvPr id="49" name="Rectangle 48"/>
-          <p:cNvSpPr/>
-          <p:nvPr/>
-        </p:nvSpPr>
-        <p:spPr>
-          <a:xfrm>
-            <a:off x="7410643" y="1773120"/>
-            <a:ext cx="802182" cy="589080"/>
-          </a:xfrm>
-          <a:prstGeom prst="rect">
-            <a:avLst/>
-          </a:prstGeom>
-          <a:solidFill>
-            <a:schemeClr val="bg1">
-              <a:lumMod val="75000"/>
-            </a:schemeClr>
-          </a:solidFill>
-          <a:ln>
-            <a:noFill/>
-          </a:ln>
-        </p:spPr>
-        <p:style>
-          <a:lnRef idx="2">
-            <a:schemeClr val="accent1">
-              <a:shade val="50000"/>
-            </a:schemeClr>
-          </a:lnRef>
-          <a:fillRef idx="1">
-            <a:schemeClr val="accent1"/>
-          </a:fillRef>
-          <a:effectRef idx="0">
-            <a:schemeClr val="accent1"/>
-          </a:effectRef>
-          <a:fontRef idx="minor">
-            <a:schemeClr val="lt1"/>
-          </a:fontRef>
-        </p:style>
-        <p:txBody>
-          <a:bodyPr rtlCol="0" anchor="ctr"/>
-          <a:lstStyle/>
-          <a:p>
-            <a:pPr marL="0" marR="0" lvl="0" indent="0" algn="ctr" defTabSz="914400" rtl="0" eaLnBrk="1" fontAlgn="auto" latinLnBrk="0" hangingPunct="1">
-              <a:lnSpc>
-                <a:spcPct val="100000"/>
-              </a:lnSpc>
-              <a:spcBef>
-                <a:spcPts val="0"/>
-              </a:spcBef>
-              <a:spcAft>
-                <a:spcPts val="0"/>
-              </a:spcAft>
-              <a:buClrTx/>
-              <a:buSzTx/>
-              <a:buFontTx/>
-              <a:buNone/>
-              <a:tabLst/>
-              <a:defRPr/>
-            </a:pPr>
-            <a:endParaRPr kumimoji="0" lang="en-US" sz="1800" b="0" i="0" u="none" strike="noStrike" kern="1200" cap="none" spc="0" normalizeH="0" baseline="0" noProof="0">
-              <a:ln>
-                <a:noFill/>
-              </a:ln>
-              <a:solidFill>
-                <a:prstClr val="white"/>
-              </a:solidFill>
-              <a:effectLst/>
-              <a:uLnTx/>
-              <a:uFillTx/>
-              <a:latin typeface="Gill Sans MT"/>
-              <a:ea typeface="+mn-ea"/>
-              <a:cs typeface="+mn-cs"/>
-            </a:endParaRPr>
-          </a:p>
-        </p:txBody>
-      </p:sp>
-      <p:sp>
-        <p:nvSpPr>
-          <p:cNvPr id="2" name="Title 1"/>
-          <p:cNvSpPr>
-            <a:spLocks noGrp="1"/>
-          </p:cNvSpPr>
-          <p:nvPr>
-            <p:ph type="title"/>
-          </p:nvPr>
-        </p:nvSpPr>
-        <p:spPr/>
-        <p:txBody>
-          <a:bodyPr>
-            <a:normAutofit/>
-          </a:bodyPr>
-          <a:lstStyle/>
-          <a:p>
-            <a:r>
-              <a:rPr lang="en-US" dirty="0">
-                <a:solidFill>
-                  <a:srgbClr val="FF0000"/>
-                </a:solidFill>
-              </a:rPr>
-              <a:t>Adding two integers</a:t>
-            </a:r>
-            <a:endParaRPr lang="en-US" b="1" dirty="0">
-              <a:solidFill>
-                <a:srgbClr val="FF0000"/>
-              </a:solidFill>
-              <a:latin typeface="Consolas" panose="020B0609020204030204" pitchFamily="49" charset="0"/>
-              <a:cs typeface="Consolas" panose="020B0609020204030204" pitchFamily="49" charset="0"/>
-            </a:endParaRPr>
-          </a:p>
-        </p:txBody>
-      </p:sp>
-      <p:sp>
-        <p:nvSpPr>
-          <p:cNvPr id="3" name="Slide Number Placeholder 2"/>
+          <p:cNvPr id="2" name="Slide Number Placeholder 1"/>
           <p:cNvSpPr>
             <a:spLocks noGrp="1"/>
           </p:cNvSpPr>
@@ -28476,6 +27981,4050 @@
                 <a:defRPr/>
               </a:pPr>
               <a:t>5</a:t>
+            </a:fld>
+            <a:endParaRPr kumimoji="0" lang="en-US" sz="1400" b="0" i="0" u="none" strike="noStrike" kern="1200" cap="none" spc="0" normalizeH="0" baseline="0" noProof="0" dirty="0">
+              <a:ln>
+                <a:noFill/>
+              </a:ln>
+              <a:solidFill>
+                <a:srgbClr val="1F497D"/>
+              </a:solidFill>
+              <a:effectLst/>
+              <a:uLnTx/>
+              <a:uFillTx/>
+              <a:latin typeface="Gill Sans MT"/>
+              <a:ea typeface="+mn-ea"/>
+              <a:cs typeface="+mn-cs"/>
+            </a:endParaRPr>
+          </a:p>
+        </p:txBody>
+      </p:sp>
+      <p:sp>
+        <p:nvSpPr>
+          <p:cNvPr id="4" name="Title 3"/>
+          <p:cNvSpPr>
+            <a:spLocks noGrp="1"/>
+          </p:cNvSpPr>
+          <p:nvPr>
+            <p:ph type="title"/>
+          </p:nvPr>
+        </p:nvSpPr>
+        <p:spPr/>
+        <p:txBody>
+          <a:bodyPr>
+            <a:normAutofit/>
+          </a:bodyPr>
+          <a:lstStyle/>
+          <a:p>
+            <a:r>
+              <a:rPr lang="en-US" dirty="0"/>
+              <a:t>Signed Integers</a:t>
+            </a:r>
+            <a:br>
+              <a:rPr lang="en-US" dirty="0"/>
+            </a:br>
+            <a:r>
+              <a:rPr lang="en-US" dirty="0">
+                <a:solidFill>
+                  <a:schemeClr val="accent2"/>
+                </a:solidFill>
+              </a:rPr>
+              <a:t>Method 3: Two’s Complement</a:t>
+            </a:r>
+          </a:p>
+        </p:txBody>
+      </p:sp>
+      <p:pic>
+        <p:nvPicPr>
+          <p:cNvPr id="36866" name="Picture 2"/>
+          <p:cNvPicPr>
+            <a:picLocks noChangeAspect="1" noChangeArrowheads="1"/>
+          </p:cNvPicPr>
+          <p:nvPr/>
+        </p:nvPicPr>
+        <p:blipFill>
+          <a:blip r:embed="rId3">
+            <a:extLst>
+              <a:ext uri="{28A0092B-C50C-407E-A947-70E740481C1C}">
+                <a14:useLocalDpi xmlns:a14="http://schemas.microsoft.com/office/drawing/2010/main" val="0"/>
+              </a:ext>
+            </a:extLst>
+          </a:blip>
+          <a:srcRect/>
+          <a:stretch>
+            <a:fillRect/>
+          </a:stretch>
+        </p:blipFill>
+        <p:spPr bwMode="auto">
+          <a:xfrm>
+            <a:off x="457200" y="2362200"/>
+            <a:ext cx="4202424" cy="4038600"/>
+          </a:xfrm>
+          <a:prstGeom prst="rect">
+            <a:avLst/>
+          </a:prstGeom>
+          <a:noFill/>
+          <a:ln>
+            <a:noFill/>
+          </a:ln>
+          <a:effectLst/>
+          <a:extLst>
+            <a:ext uri="{909E8E84-426E-40DD-AFC4-6F175D3DCCD1}">
+              <a14:hiddenFill xmlns:a14="http://schemas.microsoft.com/office/drawing/2010/main">
+                <a:solidFill>
+                  <a:schemeClr val="accent1"/>
+                </a:solidFill>
+              </a14:hiddenFill>
+            </a:ext>
+            <a:ext uri="{91240B29-F687-4F45-9708-019B960494DF}">
+              <a14:hiddenLine xmlns:a14="http://schemas.microsoft.com/office/drawing/2010/main" w="9525">
+                <a:solidFill>
+                  <a:schemeClr val="tx1"/>
+                </a:solidFill>
+                <a:miter lim="800000"/>
+                <a:headEnd/>
+                <a:tailEnd/>
+              </a14:hiddenLine>
+            </a:ext>
+            <a:ext uri="{AF507438-7753-43E0-B8FC-AC1667EBCBE1}">
+              <a14:hiddenEffects xmlns:a14="http://schemas.microsoft.com/office/drawing/2010/main">
+                <a:effectLst>
+                  <a:outerShdw dist="35921" dir="2700000" algn="ctr" rotWithShape="0">
+                    <a:schemeClr val="bg2"/>
+                  </a:outerShdw>
+                </a:effectLst>
+              </a14:hiddenEffects>
+            </a:ext>
+          </a:extLst>
+        </p:spPr>
+      </p:pic>
+      <mc:AlternateContent xmlns:mc="http://schemas.openxmlformats.org/markup-compatibility/2006" xmlns:a14="http://schemas.microsoft.com/office/drawing/2010/main">
+        <mc:Choice Requires="a14">
+          <p:sp>
+            <p:nvSpPr>
+              <p:cNvPr id="5" name="Rectangle 4"/>
+              <p:cNvSpPr/>
+              <p:nvPr/>
+            </p:nvSpPr>
+            <p:spPr>
+              <a:xfrm>
+                <a:off x="457200" y="1219200"/>
+                <a:ext cx="3352800" cy="707886"/>
+              </a:xfrm>
+              <a:prstGeom prst="rect">
+                <a:avLst/>
+              </a:prstGeom>
+            </p:spPr>
+            <p:txBody>
+              <a:bodyPr wrap="square">
+                <a:spAutoFit/>
+              </a:bodyPr>
+              <a:lstStyle/>
+              <a:p>
+                <a:pPr marL="0" marR="0" lvl="0" indent="0" algn="l" defTabSz="914400" rtl="0" eaLnBrk="1" fontAlgn="auto" latinLnBrk="0" hangingPunct="1">
+                  <a:lnSpc>
+                    <a:spcPct val="100000"/>
+                  </a:lnSpc>
+                  <a:spcBef>
+                    <a:spcPts val="0"/>
+                  </a:spcBef>
+                  <a:spcAft>
+                    <a:spcPts val="0"/>
+                  </a:spcAft>
+                  <a:buClrTx/>
+                  <a:buSzTx/>
+                  <a:buFontTx/>
+                  <a:buNone/>
+                  <a:tabLst/>
+                  <a:defRPr/>
+                </a:pPr>
+                <a:r>
+                  <a:rPr kumimoji="0" lang="en-US" sz="2000" b="1" i="1" u="none" strike="noStrike" kern="1200" cap="none" spc="0" normalizeH="0" baseline="0" noProof="0" dirty="0">
+                    <a:ln>
+                      <a:noFill/>
+                    </a:ln>
+                    <a:solidFill>
+                      <a:prstClr val="black"/>
+                    </a:solidFill>
+                    <a:effectLst/>
+                    <a:uLnTx/>
+                    <a:uFillTx/>
+                    <a:latin typeface="Gill Sans MT"/>
+                    <a:ea typeface="+mn-ea"/>
+                    <a:cs typeface="+mn-cs"/>
+                  </a:rPr>
+                  <a:t>Two’s Complement (</a:t>
+                </a:r>
+                <a14:m>
+                  <m:oMath xmlns:m="http://schemas.openxmlformats.org/officeDocument/2006/math">
+                    <m:acc>
+                      <m:accPr>
+                        <m:chr m:val="̅"/>
+                        <m:ctrlPr>
+                          <a:rPr kumimoji="0" lang="en-US" sz="2000" b="1" i="1" u="none" strike="noStrike" kern="1200" cap="none" spc="0" normalizeH="0" baseline="0" noProof="0">
+                            <a:ln>
+                              <a:noFill/>
+                            </a:ln>
+                            <a:solidFill>
+                              <a:prstClr val="black"/>
+                            </a:solidFill>
+                            <a:effectLst/>
+                            <a:uLnTx/>
+                            <a:uFillTx/>
+                            <a:latin typeface="Cambria Math" panose="02040503050406030204" pitchFamily="18" charset="0"/>
+                            <a:ea typeface="+mn-ea"/>
+                            <a:cs typeface="+mn-cs"/>
+                          </a:rPr>
+                        </m:ctrlPr>
+                      </m:accPr>
+                      <m:e>
+                        <m:r>
+                          <a:rPr kumimoji="0" lang="en-US" sz="2000" b="1" i="1" u="none" strike="noStrike" kern="1200" cap="none" spc="0" normalizeH="0" baseline="0" noProof="0">
+                            <a:ln>
+                              <a:noFill/>
+                            </a:ln>
+                            <a:solidFill>
+                              <a:prstClr val="black"/>
+                            </a:solidFill>
+                            <a:effectLst/>
+                            <a:uLnTx/>
+                            <a:uFillTx/>
+                            <a:latin typeface="Cambria Math"/>
+                            <a:ea typeface="+mn-ea"/>
+                            <a:cs typeface="+mn-cs"/>
+                          </a:rPr>
+                          <m:t>𝜶</m:t>
+                        </m:r>
+                      </m:e>
+                    </m:acc>
+                  </m:oMath>
+                </a14:m>
+                <a:r>
+                  <a:rPr kumimoji="0" lang="en-US" sz="2000" b="1" i="1" u="none" strike="noStrike" kern="1200" cap="none" spc="0" normalizeH="0" baseline="0" noProof="0" dirty="0">
+                    <a:ln>
+                      <a:noFill/>
+                    </a:ln>
+                    <a:solidFill>
+                      <a:prstClr val="black"/>
+                    </a:solidFill>
+                    <a:effectLst/>
+                    <a:uLnTx/>
+                    <a:uFillTx/>
+                    <a:latin typeface="Gill Sans MT"/>
+                    <a:ea typeface="+mn-ea"/>
+                    <a:cs typeface="+mn-cs"/>
+                  </a:rPr>
+                  <a:t>):</a:t>
+                </a:r>
+                <a:endParaRPr kumimoji="0" lang="en-US" sz="2000" b="0" i="0" u="none" strike="noStrike" kern="1200" cap="none" spc="0" normalizeH="0" baseline="0" noProof="0" dirty="0">
+                  <a:ln>
+                    <a:noFill/>
+                  </a:ln>
+                  <a:solidFill>
+                    <a:prstClr val="black"/>
+                  </a:solidFill>
+                  <a:effectLst/>
+                  <a:uLnTx/>
+                  <a:uFillTx/>
+                  <a:latin typeface="Gill Sans MT"/>
+                  <a:ea typeface="+mn-ea"/>
+                  <a:cs typeface="+mn-cs"/>
+                </a:endParaRPr>
+              </a:p>
+              <a:p>
+                <a:pPr marL="0" marR="0" lvl="0" indent="0" algn="l" defTabSz="914400" rtl="0" eaLnBrk="1" fontAlgn="auto" latinLnBrk="0" hangingPunct="1">
+                  <a:lnSpc>
+                    <a:spcPct val="100000"/>
+                  </a:lnSpc>
+                  <a:spcBef>
+                    <a:spcPts val="0"/>
+                  </a:spcBef>
+                  <a:spcAft>
+                    <a:spcPts val="0"/>
+                  </a:spcAft>
+                  <a:buClrTx/>
+                  <a:buSzTx/>
+                  <a:buFontTx/>
+                  <a:buNone/>
+                  <a:tabLst/>
+                  <a:defRPr/>
+                </a:pPr>
+                <a14:m>
+                  <m:oMathPara xmlns:m="http://schemas.openxmlformats.org/officeDocument/2006/math">
+                    <m:oMathParaPr>
+                      <m:jc m:val="centerGroup"/>
+                    </m:oMathParaPr>
+                    <m:oMath xmlns:m="http://schemas.openxmlformats.org/officeDocument/2006/math">
+                      <m:r>
+                        <a:rPr kumimoji="0" lang="en-US" sz="2000" b="1" i="1" u="none" strike="noStrike" kern="1200" cap="none" spc="0" normalizeH="0" baseline="0" noProof="0">
+                          <a:ln>
+                            <a:noFill/>
+                          </a:ln>
+                          <a:solidFill>
+                            <a:prstClr val="black"/>
+                          </a:solidFill>
+                          <a:effectLst/>
+                          <a:uLnTx/>
+                          <a:uFillTx/>
+                          <a:latin typeface="Cambria Math"/>
+                          <a:ea typeface="+mn-ea"/>
+                          <a:cs typeface="+mn-cs"/>
+                        </a:rPr>
+                        <m:t>𝜶</m:t>
+                      </m:r>
+                      <m:r>
+                        <a:rPr kumimoji="0" lang="en-US" sz="2000" b="1" i="1" u="none" strike="noStrike" kern="1200" cap="none" spc="0" normalizeH="0" baseline="0" noProof="0">
+                          <a:ln>
+                            <a:noFill/>
+                          </a:ln>
+                          <a:solidFill>
+                            <a:prstClr val="black"/>
+                          </a:solidFill>
+                          <a:effectLst/>
+                          <a:uLnTx/>
+                          <a:uFillTx/>
+                          <a:latin typeface="Cambria Math"/>
+                          <a:ea typeface="+mn-ea"/>
+                          <a:cs typeface="+mn-cs"/>
+                        </a:rPr>
+                        <m:t>+</m:t>
+                      </m:r>
+                      <m:acc>
+                        <m:accPr>
+                          <m:chr m:val="̅"/>
+                          <m:ctrlPr>
+                            <a:rPr kumimoji="0" lang="en-US" sz="2000" b="1" i="1" u="none" strike="noStrike" kern="1200" cap="none" spc="0" normalizeH="0" baseline="0" noProof="0">
+                              <a:ln>
+                                <a:noFill/>
+                              </a:ln>
+                              <a:solidFill>
+                                <a:prstClr val="black"/>
+                              </a:solidFill>
+                              <a:effectLst/>
+                              <a:uLnTx/>
+                              <a:uFillTx/>
+                              <a:latin typeface="Cambria Math" panose="02040503050406030204" pitchFamily="18" charset="0"/>
+                              <a:ea typeface="+mn-ea"/>
+                              <a:cs typeface="+mn-cs"/>
+                            </a:rPr>
+                          </m:ctrlPr>
+                        </m:accPr>
+                        <m:e>
+                          <m:r>
+                            <a:rPr kumimoji="0" lang="en-US" sz="2000" b="1" i="1" u="none" strike="noStrike" kern="1200" cap="none" spc="0" normalizeH="0" baseline="0" noProof="0">
+                              <a:ln>
+                                <a:noFill/>
+                              </a:ln>
+                              <a:solidFill>
+                                <a:prstClr val="black"/>
+                              </a:solidFill>
+                              <a:effectLst/>
+                              <a:uLnTx/>
+                              <a:uFillTx/>
+                              <a:latin typeface="Cambria Math"/>
+                              <a:ea typeface="+mn-ea"/>
+                              <a:cs typeface="+mn-cs"/>
+                            </a:rPr>
+                            <m:t>𝜶</m:t>
+                          </m:r>
+                        </m:e>
+                      </m:acc>
+                      <m:r>
+                        <a:rPr kumimoji="0" lang="en-US" sz="2000" b="1" i="1" u="none" strike="noStrike" kern="1200" cap="none" spc="0" normalizeH="0" baseline="0" noProof="0">
+                          <a:ln>
+                            <a:noFill/>
+                          </a:ln>
+                          <a:solidFill>
+                            <a:prstClr val="black"/>
+                          </a:solidFill>
+                          <a:effectLst/>
+                          <a:uLnTx/>
+                          <a:uFillTx/>
+                          <a:latin typeface="Cambria Math"/>
+                          <a:ea typeface="+mn-ea"/>
+                          <a:cs typeface="+mn-cs"/>
+                        </a:rPr>
+                        <m:t>=</m:t>
+                      </m:r>
+                      <m:sSup>
+                        <m:sSupPr>
+                          <m:ctrlPr>
+                            <a:rPr kumimoji="0" lang="en-US" sz="2000" b="1" i="1" u="none" strike="noStrike" kern="1200" cap="none" spc="0" normalizeH="0" baseline="0" noProof="0">
+                              <a:ln>
+                                <a:noFill/>
+                              </a:ln>
+                              <a:solidFill>
+                                <a:prstClr val="black"/>
+                              </a:solidFill>
+                              <a:effectLst/>
+                              <a:uLnTx/>
+                              <a:uFillTx/>
+                              <a:latin typeface="Cambria Math" panose="02040503050406030204" pitchFamily="18" charset="0"/>
+                              <a:ea typeface="+mn-ea"/>
+                              <a:cs typeface="+mn-cs"/>
+                            </a:rPr>
+                          </m:ctrlPr>
+                        </m:sSupPr>
+                        <m:e>
+                          <m:r>
+                            <a:rPr kumimoji="0" lang="en-US" sz="2000" b="1" i="1" u="none" strike="noStrike" kern="1200" cap="none" spc="0" normalizeH="0" baseline="0" noProof="0">
+                              <a:ln>
+                                <a:noFill/>
+                              </a:ln>
+                              <a:solidFill>
+                                <a:prstClr val="black"/>
+                              </a:solidFill>
+                              <a:effectLst/>
+                              <a:uLnTx/>
+                              <a:uFillTx/>
+                              <a:latin typeface="Cambria Math"/>
+                              <a:ea typeface="+mn-ea"/>
+                              <a:cs typeface="+mn-cs"/>
+                            </a:rPr>
+                            <m:t>𝟐</m:t>
+                          </m:r>
+                        </m:e>
+                        <m:sup>
+                          <m:r>
+                            <a:rPr kumimoji="0" lang="en-US" sz="2000" b="1" i="1" u="none" strike="noStrike" kern="1200" cap="none" spc="0" normalizeH="0" baseline="0" noProof="0">
+                              <a:ln>
+                                <a:noFill/>
+                              </a:ln>
+                              <a:solidFill>
+                                <a:prstClr val="black"/>
+                              </a:solidFill>
+                              <a:effectLst/>
+                              <a:uLnTx/>
+                              <a:uFillTx/>
+                              <a:latin typeface="Cambria Math"/>
+                              <a:ea typeface="+mn-ea"/>
+                              <a:cs typeface="+mn-cs"/>
+                            </a:rPr>
+                            <m:t>𝒏</m:t>
+                          </m:r>
+                        </m:sup>
+                      </m:sSup>
+                    </m:oMath>
+                  </m:oMathPara>
+                </a14:m>
+                <a:endParaRPr kumimoji="0" lang="en-US" sz="2000" b="0" i="0" u="none" strike="noStrike" kern="1200" cap="none" spc="0" normalizeH="0" baseline="0" noProof="0" dirty="0">
+                  <a:ln>
+                    <a:noFill/>
+                  </a:ln>
+                  <a:solidFill>
+                    <a:prstClr val="black"/>
+                  </a:solidFill>
+                  <a:effectLst/>
+                  <a:uLnTx/>
+                  <a:uFillTx/>
+                  <a:latin typeface="Gill Sans MT"/>
+                  <a:ea typeface="+mn-ea"/>
+                  <a:cs typeface="+mn-cs"/>
+                </a:endParaRPr>
+              </a:p>
+            </p:txBody>
+          </p:sp>
+        </mc:Choice>
+        <mc:Fallback xmlns="">
+          <p:sp>
+            <p:nvSpPr>
+              <p:cNvPr id="5" name="Rectangle 4"/>
+              <p:cNvSpPr>
+                <a:spLocks noRot="1" noChangeAspect="1" noMove="1" noResize="1" noEditPoints="1" noAdjustHandles="1" noChangeArrowheads="1" noChangeShapeType="1" noTextEdit="1"/>
+              </p:cNvSpPr>
+              <p:nvPr/>
+            </p:nvSpPr>
+            <p:spPr>
+              <a:xfrm>
+                <a:off x="457200" y="1219200"/>
+                <a:ext cx="3352800" cy="707886"/>
+              </a:xfrm>
+              <a:prstGeom prst="rect">
+                <a:avLst/>
+              </a:prstGeom>
+              <a:blipFill rotWithShape="1">
+                <a:blip r:embed="rId4"/>
+                <a:stretch>
+                  <a:fillRect l="-1818" t="-4310"/>
+                </a:stretch>
+              </a:blipFill>
+            </p:spPr>
+            <p:txBody>
+              <a:bodyPr/>
+              <a:lstStyle/>
+              <a:p>
+                <a:r>
+                  <a:rPr lang="en-US">
+                    <a:noFill/>
+                  </a:rPr>
+                  <a:t> </a:t>
+                </a:r>
+              </a:p>
+            </p:txBody>
+          </p:sp>
+        </mc:Fallback>
+      </mc:AlternateContent>
+      <p:sp>
+        <p:nvSpPr>
+          <p:cNvPr id="6" name="Rectangle 5"/>
+          <p:cNvSpPr/>
+          <p:nvPr/>
+        </p:nvSpPr>
+        <p:spPr>
+          <a:xfrm>
+            <a:off x="4918862" y="2242388"/>
+            <a:ext cx="3996538" cy="646331"/>
+          </a:xfrm>
+          <a:prstGeom prst="rect">
+            <a:avLst/>
+          </a:prstGeom>
+        </p:spPr>
+        <p:txBody>
+          <a:bodyPr wrap="square">
+            <a:spAutoFit/>
+          </a:bodyPr>
+          <a:lstStyle/>
+          <a:p>
+            <a:pPr marL="0" marR="0" lvl="0" indent="0" algn="l" defTabSz="914400" rtl="0" eaLnBrk="1" fontAlgn="auto" latinLnBrk="0" hangingPunct="1">
+              <a:lnSpc>
+                <a:spcPct val="100000"/>
+              </a:lnSpc>
+              <a:spcBef>
+                <a:spcPts val="0"/>
+              </a:spcBef>
+              <a:spcAft>
+                <a:spcPts val="0"/>
+              </a:spcAft>
+              <a:buClrTx/>
+              <a:buSzTx/>
+              <a:buFontTx/>
+              <a:buNone/>
+              <a:tabLst/>
+              <a:defRPr/>
+            </a:pPr>
+            <a:r>
+              <a:rPr kumimoji="0" lang="en-US" sz="1800" b="1" i="0" u="none" strike="noStrike" kern="1200" cap="none" spc="0" normalizeH="0" baseline="0" noProof="0" dirty="0">
+                <a:ln>
+                  <a:noFill/>
+                </a:ln>
+                <a:solidFill>
+                  <a:srgbClr val="C00000"/>
+                </a:solidFill>
+                <a:effectLst/>
+                <a:uLnTx/>
+                <a:uFillTx/>
+                <a:latin typeface="Gill Sans MT"/>
+                <a:ea typeface="+mn-ea"/>
+                <a:cs typeface="+mn-cs"/>
+              </a:rPr>
+              <a:t>TC of a number can be obtained by its bitwise NOT plus one. </a:t>
+            </a:r>
+          </a:p>
+        </p:txBody>
+      </p:sp>
+      <p:graphicFrame>
+        <p:nvGraphicFramePr>
+          <p:cNvPr id="8" name="Table 7"/>
+          <p:cNvGraphicFramePr>
+            <a:graphicFrameLocks noGrp="1"/>
+          </p:cNvGraphicFramePr>
+          <p:nvPr/>
+        </p:nvGraphicFramePr>
+        <p:xfrm>
+          <a:off x="4871772" y="4013201"/>
+          <a:ext cx="4090718" cy="1589172"/>
+        </p:xfrm>
+        <a:graphic>
+          <a:graphicData uri="http://schemas.openxmlformats.org/drawingml/2006/table">
+            <a:tbl>
+              <a:tblPr firstRow="1" firstCol="1" bandRow="1">
+                <a:tableStyleId>{5C22544A-7EE6-4342-B048-85BDC9FD1C3A}</a:tableStyleId>
+              </a:tblPr>
+              <a:tblGrid>
+                <a:gridCol w="1957118">
+                  <a:extLst>
+                    <a:ext uri="{9D8B030D-6E8A-4147-A177-3AD203B41FA5}">
+                      <a16:colId xmlns:a16="http://schemas.microsoft.com/office/drawing/2014/main" val="20000"/>
+                    </a:ext>
+                  </a:extLst>
+                </a:gridCol>
+                <a:gridCol w="1199988">
+                  <a:extLst>
+                    <a:ext uri="{9D8B030D-6E8A-4147-A177-3AD203B41FA5}">
+                      <a16:colId xmlns:a16="http://schemas.microsoft.com/office/drawing/2014/main" val="20001"/>
+                    </a:ext>
+                  </a:extLst>
+                </a:gridCol>
+                <a:gridCol w="933612">
+                  <a:extLst>
+                    <a:ext uri="{9D8B030D-6E8A-4147-A177-3AD203B41FA5}">
+                      <a16:colId xmlns:a16="http://schemas.microsoft.com/office/drawing/2014/main" val="20002"/>
+                    </a:ext>
+                  </a:extLst>
+                </a:gridCol>
+              </a:tblGrid>
+              <a:tr h="301176">
+                <a:tc>
+                  <a:txBody>
+                    <a:bodyPr/>
+                    <a:lstStyle/>
+                    <a:p>
+                      <a:pPr marL="0" marR="0" algn="r">
+                        <a:spcBef>
+                          <a:spcPts val="0"/>
+                        </a:spcBef>
+                        <a:spcAft>
+                          <a:spcPts val="0"/>
+                        </a:spcAft>
+                      </a:pPr>
+                      <a:r>
+                        <a:rPr lang="en-US" sz="1600" dirty="0">
+                          <a:effectLst/>
+                          <a:latin typeface="Consolas" panose="020B0609020204030204" pitchFamily="49" charset="0"/>
+                          <a:cs typeface="Consolas" panose="020B0609020204030204" pitchFamily="49" charset="0"/>
+                        </a:rPr>
+                        <a:t> </a:t>
+                      </a:r>
+                      <a:endParaRPr lang="en-US" sz="2000" dirty="0">
+                        <a:effectLst/>
+                        <a:latin typeface="Consolas" panose="020B0609020204030204" pitchFamily="49" charset="0"/>
+                        <a:ea typeface="宋体"/>
+                        <a:cs typeface="Consolas" panose="020B0609020204030204" pitchFamily="49" charset="0"/>
+                      </a:endParaRPr>
+                    </a:p>
+                  </a:txBody>
+                  <a:tcPr marL="68580" marR="68580" marT="0" marB="0" anchor="ctr"/>
+                </a:tc>
+                <a:tc>
+                  <a:txBody>
+                    <a:bodyPr/>
+                    <a:lstStyle/>
+                    <a:p>
+                      <a:pPr marL="0" marR="0" algn="r">
+                        <a:spcBef>
+                          <a:spcPts val="0"/>
+                        </a:spcBef>
+                        <a:spcAft>
+                          <a:spcPts val="0"/>
+                        </a:spcAft>
+                      </a:pPr>
+                      <a:r>
+                        <a:rPr lang="en-US" sz="1600">
+                          <a:effectLst/>
+                          <a:latin typeface="Consolas" panose="020B0609020204030204" pitchFamily="49" charset="0"/>
+                          <a:cs typeface="Consolas" panose="020B0609020204030204" pitchFamily="49" charset="0"/>
+                        </a:rPr>
+                        <a:t>Binary</a:t>
+                      </a:r>
+                      <a:endParaRPr lang="en-US" sz="2000">
+                        <a:effectLst/>
+                        <a:latin typeface="Consolas" panose="020B0609020204030204" pitchFamily="49" charset="0"/>
+                        <a:ea typeface="宋体"/>
+                        <a:cs typeface="Consolas" panose="020B0609020204030204" pitchFamily="49" charset="0"/>
+                      </a:endParaRPr>
+                    </a:p>
+                  </a:txBody>
+                  <a:tcPr marL="68580" marR="68580" marT="0" marB="0" anchor="ctr"/>
+                </a:tc>
+                <a:tc>
+                  <a:txBody>
+                    <a:bodyPr/>
+                    <a:lstStyle/>
+                    <a:p>
+                      <a:pPr marL="0" marR="0" algn="r">
+                        <a:spcBef>
+                          <a:spcPts val="0"/>
+                        </a:spcBef>
+                        <a:spcAft>
+                          <a:spcPts val="0"/>
+                        </a:spcAft>
+                      </a:pPr>
+                      <a:r>
+                        <a:rPr lang="en-US" sz="1600">
+                          <a:effectLst/>
+                          <a:latin typeface="Consolas" panose="020B0609020204030204" pitchFamily="49" charset="0"/>
+                          <a:cs typeface="Consolas" panose="020B0609020204030204" pitchFamily="49" charset="0"/>
+                        </a:rPr>
+                        <a:t>Decimal</a:t>
+                      </a:r>
+                      <a:endParaRPr lang="en-US" sz="2000">
+                        <a:effectLst/>
+                        <a:latin typeface="Consolas" panose="020B0609020204030204" pitchFamily="49" charset="0"/>
+                        <a:ea typeface="宋体"/>
+                        <a:cs typeface="Consolas" panose="020B0609020204030204" pitchFamily="49" charset="0"/>
+                      </a:endParaRPr>
+                    </a:p>
+                  </a:txBody>
+                  <a:tcPr marL="68580" marR="68580" marT="0" marB="0" anchor="ctr"/>
+                </a:tc>
+                <a:extLst>
+                  <a:ext uri="{0D108BD9-81ED-4DB2-BD59-A6C34878D82A}">
+                    <a16:rowId xmlns:a16="http://schemas.microsoft.com/office/drawing/2014/main" val="10000"/>
+                  </a:ext>
+                </a:extLst>
+              </a:tr>
+              <a:tr h="233216">
+                <a:tc>
+                  <a:txBody>
+                    <a:bodyPr/>
+                    <a:lstStyle/>
+                    <a:p>
+                      <a:pPr marL="0" marR="0" algn="r">
+                        <a:spcBef>
+                          <a:spcPts val="0"/>
+                        </a:spcBef>
+                        <a:spcAft>
+                          <a:spcPts val="0"/>
+                        </a:spcAft>
+                      </a:pPr>
+                      <a:r>
+                        <a:rPr lang="en-US" sz="1600" dirty="0">
+                          <a:effectLst/>
+                          <a:latin typeface="Consolas" panose="020B0609020204030204" pitchFamily="49" charset="0"/>
+                          <a:cs typeface="Consolas" panose="020B0609020204030204" pitchFamily="49" charset="0"/>
+                        </a:rPr>
+                        <a:t>Original number</a:t>
+                      </a:r>
+                      <a:endParaRPr lang="en-US" sz="2000" dirty="0">
+                        <a:effectLst/>
+                        <a:latin typeface="Consolas" panose="020B0609020204030204" pitchFamily="49" charset="0"/>
+                        <a:ea typeface="宋体"/>
+                        <a:cs typeface="Consolas" panose="020B0609020204030204" pitchFamily="49" charset="0"/>
+                      </a:endParaRPr>
+                    </a:p>
+                  </a:txBody>
+                  <a:tcPr marL="68580" marR="68580" marT="0" marB="0" anchor="ctr"/>
+                </a:tc>
+                <a:tc>
+                  <a:txBody>
+                    <a:bodyPr/>
+                    <a:lstStyle/>
+                    <a:p>
+                      <a:pPr marL="0" marR="0" algn="r">
+                        <a:spcBef>
+                          <a:spcPts val="0"/>
+                        </a:spcBef>
+                        <a:spcAft>
+                          <a:spcPts val="0"/>
+                        </a:spcAft>
+                      </a:pPr>
+                      <a:r>
+                        <a:rPr lang="en-US" sz="1600" dirty="0">
+                          <a:effectLst/>
+                          <a:latin typeface="Consolas" panose="020B0609020204030204" pitchFamily="49" charset="0"/>
+                          <a:cs typeface="Consolas" panose="020B0609020204030204" pitchFamily="49" charset="0"/>
+                        </a:rPr>
+                        <a:t>00011</a:t>
+                      </a:r>
+                      <a:endParaRPr lang="en-US" sz="2000" dirty="0">
+                        <a:effectLst/>
+                        <a:latin typeface="Consolas" panose="020B0609020204030204" pitchFamily="49" charset="0"/>
+                        <a:ea typeface="宋体"/>
+                        <a:cs typeface="Consolas" panose="020B0609020204030204" pitchFamily="49" charset="0"/>
+                      </a:endParaRPr>
+                    </a:p>
+                  </a:txBody>
+                  <a:tcPr marL="68580" marR="68580" marT="0" marB="0" anchor="ctr"/>
+                </a:tc>
+                <a:tc>
+                  <a:txBody>
+                    <a:bodyPr/>
+                    <a:lstStyle/>
+                    <a:p>
+                      <a:pPr marL="0" marR="0" algn="r">
+                        <a:spcBef>
+                          <a:spcPts val="0"/>
+                        </a:spcBef>
+                        <a:spcAft>
+                          <a:spcPts val="0"/>
+                        </a:spcAft>
+                      </a:pPr>
+                      <a:r>
+                        <a:rPr lang="en-US" sz="1600">
+                          <a:effectLst/>
+                          <a:latin typeface="Consolas" panose="020B0609020204030204" pitchFamily="49" charset="0"/>
+                          <a:cs typeface="Consolas" panose="020B0609020204030204" pitchFamily="49" charset="0"/>
+                        </a:rPr>
+                        <a:t>3</a:t>
+                      </a:r>
+                      <a:endParaRPr lang="en-US" sz="2000">
+                        <a:effectLst/>
+                        <a:latin typeface="Consolas" panose="020B0609020204030204" pitchFamily="49" charset="0"/>
+                        <a:ea typeface="宋体"/>
+                        <a:cs typeface="Consolas" panose="020B0609020204030204" pitchFamily="49" charset="0"/>
+                      </a:endParaRPr>
+                    </a:p>
+                  </a:txBody>
+                  <a:tcPr marL="68580" marR="68580" marT="0" marB="0" anchor="ctr"/>
+                </a:tc>
+                <a:extLst>
+                  <a:ext uri="{0D108BD9-81ED-4DB2-BD59-A6C34878D82A}">
+                    <a16:rowId xmlns:a16="http://schemas.microsoft.com/office/drawing/2014/main" val="10001"/>
+                  </a:ext>
+                </a:extLst>
+              </a:tr>
+              <a:tr h="466433">
+                <a:tc>
+                  <a:txBody>
+                    <a:bodyPr/>
+                    <a:lstStyle/>
+                    <a:p>
+                      <a:pPr marL="0" marR="0" algn="r">
+                        <a:spcBef>
+                          <a:spcPts val="0"/>
+                        </a:spcBef>
+                        <a:spcAft>
+                          <a:spcPts val="0"/>
+                        </a:spcAft>
+                      </a:pPr>
+                      <a:r>
+                        <a:rPr lang="en-US" sz="1600" dirty="0">
+                          <a:effectLst/>
+                          <a:latin typeface="Consolas" panose="020B0609020204030204" pitchFamily="49" charset="0"/>
+                          <a:cs typeface="Consolas" panose="020B0609020204030204" pitchFamily="49" charset="0"/>
+                        </a:rPr>
+                        <a:t>Step 1: Invert every bit</a:t>
+                      </a:r>
+                      <a:endParaRPr lang="en-US" sz="2000" dirty="0">
+                        <a:effectLst/>
+                        <a:latin typeface="Consolas" panose="020B0609020204030204" pitchFamily="49" charset="0"/>
+                        <a:ea typeface="宋体"/>
+                        <a:cs typeface="Consolas" panose="020B0609020204030204" pitchFamily="49" charset="0"/>
+                      </a:endParaRPr>
+                    </a:p>
+                  </a:txBody>
+                  <a:tcPr marL="68580" marR="68580" marT="0" marB="0" anchor="ctr"/>
+                </a:tc>
+                <a:tc>
+                  <a:txBody>
+                    <a:bodyPr/>
+                    <a:lstStyle/>
+                    <a:p>
+                      <a:pPr marL="0" marR="0" algn="r">
+                        <a:spcBef>
+                          <a:spcPts val="0"/>
+                        </a:spcBef>
+                        <a:spcAft>
+                          <a:spcPts val="0"/>
+                        </a:spcAft>
+                      </a:pPr>
+                      <a:r>
+                        <a:rPr lang="en-US" sz="1600" dirty="0">
+                          <a:effectLst/>
+                          <a:latin typeface="Consolas" panose="020B0609020204030204" pitchFamily="49" charset="0"/>
+                          <a:cs typeface="Consolas" panose="020B0609020204030204" pitchFamily="49" charset="0"/>
+                        </a:rPr>
+                        <a:t>11100</a:t>
+                      </a:r>
+                      <a:endParaRPr lang="en-US" sz="2000" dirty="0">
+                        <a:effectLst/>
+                        <a:latin typeface="Consolas" panose="020B0609020204030204" pitchFamily="49" charset="0"/>
+                        <a:ea typeface="宋体"/>
+                        <a:cs typeface="Consolas" panose="020B0609020204030204" pitchFamily="49" charset="0"/>
+                      </a:endParaRPr>
+                    </a:p>
+                  </a:txBody>
+                  <a:tcPr marL="68580" marR="68580" marT="0" marB="0" anchor="ctr"/>
+                </a:tc>
+                <a:tc>
+                  <a:txBody>
+                    <a:bodyPr/>
+                    <a:lstStyle/>
+                    <a:p>
+                      <a:pPr marL="0" marR="0" algn="r">
+                        <a:spcBef>
+                          <a:spcPts val="0"/>
+                        </a:spcBef>
+                        <a:spcAft>
+                          <a:spcPts val="0"/>
+                        </a:spcAft>
+                      </a:pPr>
+                      <a:r>
+                        <a:rPr lang="en-US" sz="1600">
+                          <a:effectLst/>
+                          <a:latin typeface="Consolas" panose="020B0609020204030204" pitchFamily="49" charset="0"/>
+                          <a:cs typeface="Consolas" panose="020B0609020204030204" pitchFamily="49" charset="0"/>
+                        </a:rPr>
+                        <a:t> </a:t>
+                      </a:r>
+                      <a:endParaRPr lang="en-US" sz="2000">
+                        <a:effectLst/>
+                        <a:latin typeface="Consolas" panose="020B0609020204030204" pitchFamily="49" charset="0"/>
+                        <a:ea typeface="宋体"/>
+                        <a:cs typeface="Consolas" panose="020B0609020204030204" pitchFamily="49" charset="0"/>
+                      </a:endParaRPr>
+                    </a:p>
+                  </a:txBody>
+                  <a:tcPr marL="68580" marR="68580" marT="0" marB="0" anchor="ctr"/>
+                </a:tc>
+                <a:extLst>
+                  <a:ext uri="{0D108BD9-81ED-4DB2-BD59-A6C34878D82A}">
+                    <a16:rowId xmlns:a16="http://schemas.microsoft.com/office/drawing/2014/main" val="10002"/>
+                  </a:ext>
+                </a:extLst>
+              </a:tr>
+              <a:tr h="288737">
+                <a:tc>
+                  <a:txBody>
+                    <a:bodyPr/>
+                    <a:lstStyle/>
+                    <a:p>
+                      <a:pPr marL="0" marR="0" algn="r">
+                        <a:spcBef>
+                          <a:spcPts val="0"/>
+                        </a:spcBef>
+                        <a:spcAft>
+                          <a:spcPts val="0"/>
+                        </a:spcAft>
+                      </a:pPr>
+                      <a:r>
+                        <a:rPr lang="en-US" sz="1600">
+                          <a:effectLst/>
+                          <a:latin typeface="Consolas" panose="020B0609020204030204" pitchFamily="49" charset="0"/>
+                          <a:cs typeface="Consolas" panose="020B0609020204030204" pitchFamily="49" charset="0"/>
+                        </a:rPr>
+                        <a:t>Step 2: Add 1</a:t>
+                      </a:r>
+                      <a:endParaRPr lang="en-US" sz="2000">
+                        <a:effectLst/>
+                        <a:latin typeface="Consolas" panose="020B0609020204030204" pitchFamily="49" charset="0"/>
+                        <a:ea typeface="宋体"/>
+                        <a:cs typeface="Consolas" panose="020B0609020204030204" pitchFamily="49" charset="0"/>
+                      </a:endParaRPr>
+                    </a:p>
+                  </a:txBody>
+                  <a:tcPr marL="68580" marR="68580" marT="0" marB="0" anchor="ctr">
+                    <a:lnB w="12700" cap="flat" cmpd="sng" algn="ctr">
+                      <a:solidFill>
+                        <a:schemeClr val="tx1"/>
+                      </a:solidFill>
+                      <a:prstDash val="solid"/>
+                      <a:round/>
+                      <a:headEnd type="none" w="med" len="med"/>
+                      <a:tailEnd type="none" w="med" len="med"/>
+                    </a:lnB>
+                  </a:tcPr>
+                </a:tc>
+                <a:tc>
+                  <a:txBody>
+                    <a:bodyPr/>
+                    <a:lstStyle/>
+                    <a:p>
+                      <a:pPr marL="0" marR="0" algn="r">
+                        <a:spcBef>
+                          <a:spcPts val="0"/>
+                        </a:spcBef>
+                        <a:spcAft>
+                          <a:spcPts val="0"/>
+                        </a:spcAft>
+                      </a:pPr>
+                      <a:r>
+                        <a:rPr lang="en-US" sz="1600" dirty="0">
+                          <a:effectLst/>
+                          <a:latin typeface="Consolas" panose="020B0609020204030204" pitchFamily="49" charset="0"/>
+                          <a:cs typeface="Consolas" panose="020B0609020204030204" pitchFamily="49" charset="0"/>
+                        </a:rPr>
+                        <a:t>+ 00001</a:t>
+                      </a:r>
+                      <a:endParaRPr lang="en-US" sz="2000" dirty="0">
+                        <a:effectLst/>
+                        <a:latin typeface="Consolas" panose="020B0609020204030204" pitchFamily="49" charset="0"/>
+                        <a:ea typeface="宋体"/>
+                        <a:cs typeface="Consolas" panose="020B0609020204030204" pitchFamily="49" charset="0"/>
+                      </a:endParaRPr>
+                    </a:p>
+                  </a:txBody>
+                  <a:tcPr marL="68580" marR="68580" marT="0" marB="0" anchor="ctr">
+                    <a:lnB w="12700" cap="flat" cmpd="sng" algn="ctr">
+                      <a:solidFill>
+                        <a:schemeClr val="tx1"/>
+                      </a:solidFill>
+                      <a:prstDash val="solid"/>
+                      <a:round/>
+                      <a:headEnd type="none" w="med" len="med"/>
+                      <a:tailEnd type="none" w="med" len="med"/>
+                    </a:lnB>
+                  </a:tcPr>
+                </a:tc>
+                <a:tc>
+                  <a:txBody>
+                    <a:bodyPr/>
+                    <a:lstStyle/>
+                    <a:p>
+                      <a:pPr marL="0" marR="0" algn="r">
+                        <a:spcBef>
+                          <a:spcPts val="0"/>
+                        </a:spcBef>
+                        <a:spcAft>
+                          <a:spcPts val="0"/>
+                        </a:spcAft>
+                      </a:pPr>
+                      <a:r>
+                        <a:rPr lang="en-US" sz="1600">
+                          <a:effectLst/>
+                          <a:latin typeface="Consolas" panose="020B0609020204030204" pitchFamily="49" charset="0"/>
+                          <a:cs typeface="Consolas" panose="020B0609020204030204" pitchFamily="49" charset="0"/>
+                        </a:rPr>
+                        <a:t> </a:t>
+                      </a:r>
+                      <a:endParaRPr lang="en-US" sz="2000">
+                        <a:effectLst/>
+                        <a:latin typeface="Consolas" panose="020B0609020204030204" pitchFamily="49" charset="0"/>
+                        <a:ea typeface="宋体"/>
+                        <a:cs typeface="Consolas" panose="020B0609020204030204" pitchFamily="49" charset="0"/>
+                      </a:endParaRPr>
+                    </a:p>
+                  </a:txBody>
+                  <a:tcPr marL="68580" marR="68580" marT="0" marB="0" anchor="ctr"/>
+                </a:tc>
+                <a:extLst>
+                  <a:ext uri="{0D108BD9-81ED-4DB2-BD59-A6C34878D82A}">
+                    <a16:rowId xmlns:a16="http://schemas.microsoft.com/office/drawing/2014/main" val="10003"/>
+                  </a:ext>
+                </a:extLst>
+              </a:tr>
+              <a:tr h="267739">
+                <a:tc>
+                  <a:txBody>
+                    <a:bodyPr/>
+                    <a:lstStyle/>
+                    <a:p>
+                      <a:pPr marL="0" marR="0" algn="r">
+                        <a:spcBef>
+                          <a:spcPts val="0"/>
+                        </a:spcBef>
+                        <a:spcAft>
+                          <a:spcPts val="0"/>
+                        </a:spcAft>
+                      </a:pPr>
+                      <a:r>
+                        <a:rPr lang="en-US" sz="1600">
+                          <a:effectLst/>
+                          <a:latin typeface="Consolas" panose="020B0609020204030204" pitchFamily="49" charset="0"/>
+                          <a:cs typeface="Consolas" panose="020B0609020204030204" pitchFamily="49" charset="0"/>
+                        </a:rPr>
+                        <a:t>Two’s complement</a:t>
+                      </a:r>
+                      <a:endParaRPr lang="en-US" sz="2000">
+                        <a:effectLst/>
+                        <a:latin typeface="Consolas" panose="020B0609020204030204" pitchFamily="49" charset="0"/>
+                        <a:ea typeface="宋体"/>
+                        <a:cs typeface="Consolas" panose="020B0609020204030204" pitchFamily="49" charset="0"/>
+                      </a:endParaRPr>
+                    </a:p>
+                  </a:txBody>
+                  <a:tcPr marL="68580" marR="68580" marT="0" marB="0" anchor="ctr">
+                    <a:lnT w="12700" cap="flat" cmpd="sng" algn="ctr">
+                      <a:solidFill>
+                        <a:schemeClr val="tx1"/>
+                      </a:solidFill>
+                      <a:prstDash val="solid"/>
+                      <a:round/>
+                      <a:headEnd type="none" w="med" len="med"/>
+                      <a:tailEnd type="none" w="med" len="med"/>
+                    </a:lnT>
+                  </a:tcPr>
+                </a:tc>
+                <a:tc>
+                  <a:txBody>
+                    <a:bodyPr/>
+                    <a:lstStyle/>
+                    <a:p>
+                      <a:pPr marL="0" marR="0" algn="r">
+                        <a:spcBef>
+                          <a:spcPts val="0"/>
+                        </a:spcBef>
+                        <a:spcAft>
+                          <a:spcPts val="0"/>
+                        </a:spcAft>
+                      </a:pPr>
+                      <a:r>
+                        <a:rPr lang="en-US" sz="1600" dirty="0">
+                          <a:effectLst/>
+                          <a:latin typeface="Consolas" panose="020B0609020204030204" pitchFamily="49" charset="0"/>
+                          <a:cs typeface="Consolas" panose="020B0609020204030204" pitchFamily="49" charset="0"/>
+                        </a:rPr>
+                        <a:t>11101</a:t>
+                      </a:r>
+                      <a:endParaRPr lang="en-US" sz="2000" dirty="0">
+                        <a:effectLst/>
+                        <a:latin typeface="Consolas" panose="020B0609020204030204" pitchFamily="49" charset="0"/>
+                        <a:ea typeface="宋体"/>
+                        <a:cs typeface="Consolas" panose="020B0609020204030204" pitchFamily="49" charset="0"/>
+                      </a:endParaRPr>
+                    </a:p>
+                  </a:txBody>
+                  <a:tcPr marL="68580" marR="68580" marT="0" marB="0" anchor="ctr">
+                    <a:lnT w="12700" cap="flat" cmpd="sng" algn="ctr">
+                      <a:solidFill>
+                        <a:schemeClr val="tx1"/>
+                      </a:solidFill>
+                      <a:prstDash val="solid"/>
+                      <a:round/>
+                      <a:headEnd type="none" w="med" len="med"/>
+                      <a:tailEnd type="none" w="med" len="med"/>
+                    </a:lnT>
+                  </a:tcPr>
+                </a:tc>
+                <a:tc>
+                  <a:txBody>
+                    <a:bodyPr/>
+                    <a:lstStyle/>
+                    <a:p>
+                      <a:pPr marL="0" marR="0" algn="r">
+                        <a:spcBef>
+                          <a:spcPts val="0"/>
+                        </a:spcBef>
+                        <a:spcAft>
+                          <a:spcPts val="0"/>
+                        </a:spcAft>
+                      </a:pPr>
+                      <a:r>
+                        <a:rPr lang="en-US" sz="1600" dirty="0">
+                          <a:effectLst/>
+                          <a:latin typeface="Consolas" panose="020B0609020204030204" pitchFamily="49" charset="0"/>
+                          <a:cs typeface="Consolas" panose="020B0609020204030204" pitchFamily="49" charset="0"/>
+                        </a:rPr>
+                        <a:t>-3</a:t>
+                      </a:r>
+                      <a:endParaRPr lang="en-US" sz="2000" dirty="0">
+                        <a:effectLst/>
+                        <a:latin typeface="Consolas" panose="020B0609020204030204" pitchFamily="49" charset="0"/>
+                        <a:ea typeface="宋体"/>
+                        <a:cs typeface="Consolas" panose="020B0609020204030204" pitchFamily="49" charset="0"/>
+                      </a:endParaRPr>
+                    </a:p>
+                  </a:txBody>
+                  <a:tcPr marL="68580" marR="68580" marT="0" marB="0" anchor="ctr"/>
+                </a:tc>
+                <a:extLst>
+                  <a:ext uri="{0D108BD9-81ED-4DB2-BD59-A6C34878D82A}">
+                    <a16:rowId xmlns:a16="http://schemas.microsoft.com/office/drawing/2014/main" val="10004"/>
+                  </a:ext>
+                </a:extLst>
+              </a:tr>
+            </a:tbl>
+          </a:graphicData>
+        </a:graphic>
+      </p:graphicFrame>
+      <p:sp>
+        <p:nvSpPr>
+          <p:cNvPr id="9" name="TextBox 8"/>
+          <p:cNvSpPr txBox="1"/>
+          <p:nvPr/>
+        </p:nvSpPr>
+        <p:spPr>
+          <a:xfrm>
+            <a:off x="4892320" y="3409846"/>
+            <a:ext cx="2270480" cy="369332"/>
+          </a:xfrm>
+          <a:prstGeom prst="rect">
+            <a:avLst/>
+          </a:prstGeom>
+          <a:noFill/>
+        </p:spPr>
+        <p:txBody>
+          <a:bodyPr wrap="square" rtlCol="0">
+            <a:spAutoFit/>
+          </a:bodyPr>
+          <a:lstStyle/>
+          <a:p>
+            <a:pPr marL="0" marR="0" lvl="0" indent="0" algn="l" defTabSz="914400" rtl="0" eaLnBrk="1" fontAlgn="auto" latinLnBrk="0" hangingPunct="1">
+              <a:lnSpc>
+                <a:spcPct val="100000"/>
+              </a:lnSpc>
+              <a:spcBef>
+                <a:spcPts val="0"/>
+              </a:spcBef>
+              <a:spcAft>
+                <a:spcPts val="0"/>
+              </a:spcAft>
+              <a:buClrTx/>
+              <a:buSzTx/>
+              <a:buFontTx/>
+              <a:buNone/>
+              <a:tabLst/>
+              <a:defRPr/>
+            </a:pPr>
+            <a:r>
+              <a:rPr kumimoji="0" lang="en-US" sz="1800" b="0" i="0" u="none" strike="noStrike" kern="1200" cap="none" spc="0" normalizeH="0" baseline="0" noProof="0" dirty="0">
+                <a:ln>
+                  <a:noFill/>
+                </a:ln>
+                <a:solidFill>
+                  <a:prstClr val="black"/>
+                </a:solidFill>
+                <a:effectLst/>
+                <a:uLnTx/>
+                <a:uFillTx/>
+                <a:latin typeface="Gill Sans MT"/>
+                <a:ea typeface="+mn-ea"/>
+                <a:cs typeface="+mn-cs"/>
+              </a:rPr>
+              <a:t>Example </a:t>
+            </a:r>
+            <a:r>
+              <a:rPr kumimoji="0" lang="en-US" sz="1800" b="1" i="0" u="none" strike="noStrike" kern="1200" cap="none" spc="0" normalizeH="0" baseline="0" noProof="0" dirty="0">
+                <a:ln>
+                  <a:noFill/>
+                </a:ln>
+                <a:solidFill>
+                  <a:prstClr val="black"/>
+                </a:solidFill>
+                <a:effectLst/>
+                <a:uLnTx/>
+                <a:uFillTx/>
+                <a:latin typeface="Consolas" panose="020B0609020204030204" pitchFamily="49" charset="0"/>
+                <a:ea typeface="+mn-ea"/>
+                <a:cs typeface="Consolas" panose="020B0609020204030204" pitchFamily="49" charset="0"/>
+              </a:rPr>
+              <a:t>1</a:t>
+            </a:r>
+            <a:r>
+              <a:rPr kumimoji="0" lang="en-US" sz="1800" b="0" i="0" u="none" strike="noStrike" kern="1200" cap="none" spc="0" normalizeH="0" baseline="0" noProof="0" dirty="0">
+                <a:ln>
+                  <a:noFill/>
+                </a:ln>
+                <a:solidFill>
+                  <a:prstClr val="black"/>
+                </a:solidFill>
+                <a:effectLst/>
+                <a:uLnTx/>
+                <a:uFillTx/>
+                <a:latin typeface="Gill Sans MT"/>
+                <a:ea typeface="+mn-ea"/>
+                <a:cs typeface="+mn-cs"/>
+              </a:rPr>
+              <a:t>:  </a:t>
+            </a:r>
+            <a:r>
+              <a:rPr kumimoji="0" lang="en-US" sz="1800" b="0" i="0" u="none" strike="noStrike" kern="1200" cap="none" spc="0" normalizeH="0" baseline="0" noProof="0" dirty="0">
+                <a:ln>
+                  <a:noFill/>
+                </a:ln>
+                <a:solidFill>
+                  <a:srgbClr val="C00000"/>
+                </a:solidFill>
+                <a:effectLst/>
+                <a:uLnTx/>
+                <a:uFillTx/>
+                <a:latin typeface="Gill Sans MT"/>
+                <a:ea typeface="+mn-ea"/>
+                <a:cs typeface="+mn-cs"/>
+              </a:rPr>
+              <a:t>TC(3)</a:t>
+            </a:r>
+          </a:p>
+        </p:txBody>
+      </p:sp>
+      <p:sp>
+        <p:nvSpPr>
+          <p:cNvPr id="10" name="Oval 9"/>
+          <p:cNvSpPr/>
+          <p:nvPr/>
+        </p:nvSpPr>
+        <p:spPr>
+          <a:xfrm rot="18357225">
+            <a:off x="3080056" y="2718154"/>
+            <a:ext cx="902864" cy="415032"/>
+          </a:xfrm>
+          <a:prstGeom prst="ellipse">
+            <a:avLst/>
+          </a:prstGeom>
+          <a:noFill/>
+          <a:ln>
+            <a:solidFill>
+              <a:srgbClr val="C00000"/>
+            </a:solidFill>
+          </a:ln>
+        </p:spPr>
+        <p:style>
+          <a:lnRef idx="2">
+            <a:schemeClr val="accent1">
+              <a:shade val="50000"/>
+            </a:schemeClr>
+          </a:lnRef>
+          <a:fillRef idx="1">
+            <a:schemeClr val="accent1"/>
+          </a:fillRef>
+          <a:effectRef idx="0">
+            <a:schemeClr val="accent1"/>
+          </a:effectRef>
+          <a:fontRef idx="minor">
+            <a:schemeClr val="lt1"/>
+          </a:fontRef>
+        </p:style>
+        <p:txBody>
+          <a:bodyPr rtlCol="0" anchor="ctr"/>
+          <a:lstStyle/>
+          <a:p>
+            <a:pPr marL="0" marR="0" lvl="0" indent="0" algn="ctr" defTabSz="914400" rtl="0" eaLnBrk="1" fontAlgn="auto" latinLnBrk="0" hangingPunct="1">
+              <a:lnSpc>
+                <a:spcPct val="100000"/>
+              </a:lnSpc>
+              <a:spcBef>
+                <a:spcPts val="0"/>
+              </a:spcBef>
+              <a:spcAft>
+                <a:spcPts val="0"/>
+              </a:spcAft>
+              <a:buClrTx/>
+              <a:buSzTx/>
+              <a:buFontTx/>
+              <a:buNone/>
+              <a:tabLst/>
+              <a:defRPr/>
+            </a:pPr>
+            <a:endParaRPr kumimoji="0" lang="en-US" sz="1800" b="0" i="0" u="none" strike="noStrike" kern="1200" cap="none" spc="0" normalizeH="0" baseline="0" noProof="0">
+              <a:ln>
+                <a:noFill/>
+              </a:ln>
+              <a:solidFill>
+                <a:prstClr val="white"/>
+              </a:solidFill>
+              <a:effectLst/>
+              <a:uLnTx/>
+              <a:uFillTx/>
+              <a:latin typeface="Gill Sans MT"/>
+              <a:ea typeface="+mn-ea"/>
+              <a:cs typeface="+mn-cs"/>
+            </a:endParaRPr>
+          </a:p>
+        </p:txBody>
+      </p:sp>
+      <p:sp>
+        <p:nvSpPr>
+          <p:cNvPr id="11" name="Oval 10"/>
+          <p:cNvSpPr/>
+          <p:nvPr/>
+        </p:nvSpPr>
+        <p:spPr>
+          <a:xfrm rot="2867065">
+            <a:off x="1148587" y="2704659"/>
+            <a:ext cx="902864" cy="415032"/>
+          </a:xfrm>
+          <a:prstGeom prst="ellipse">
+            <a:avLst/>
+          </a:prstGeom>
+          <a:noFill/>
+          <a:ln>
+            <a:solidFill>
+              <a:srgbClr val="C00000"/>
+            </a:solidFill>
+          </a:ln>
+        </p:spPr>
+        <p:style>
+          <a:lnRef idx="2">
+            <a:schemeClr val="accent1">
+              <a:shade val="50000"/>
+            </a:schemeClr>
+          </a:lnRef>
+          <a:fillRef idx="1">
+            <a:schemeClr val="accent1"/>
+          </a:fillRef>
+          <a:effectRef idx="0">
+            <a:schemeClr val="accent1"/>
+          </a:effectRef>
+          <a:fontRef idx="minor">
+            <a:schemeClr val="lt1"/>
+          </a:fontRef>
+        </p:style>
+        <p:txBody>
+          <a:bodyPr rtlCol="0" anchor="ctr"/>
+          <a:lstStyle/>
+          <a:p>
+            <a:pPr marL="0" marR="0" lvl="0" indent="0" algn="ctr" defTabSz="914400" rtl="0" eaLnBrk="1" fontAlgn="auto" latinLnBrk="0" hangingPunct="1">
+              <a:lnSpc>
+                <a:spcPct val="100000"/>
+              </a:lnSpc>
+              <a:spcBef>
+                <a:spcPts val="0"/>
+              </a:spcBef>
+              <a:spcAft>
+                <a:spcPts val="0"/>
+              </a:spcAft>
+              <a:buClrTx/>
+              <a:buSzTx/>
+              <a:buFontTx/>
+              <a:buNone/>
+              <a:tabLst/>
+              <a:defRPr/>
+            </a:pPr>
+            <a:endParaRPr kumimoji="0" lang="en-US" sz="1800" b="0" i="0" u="none" strike="noStrike" kern="1200" cap="none" spc="0" normalizeH="0" baseline="0" noProof="0">
+              <a:ln>
+                <a:noFill/>
+              </a:ln>
+              <a:solidFill>
+                <a:prstClr val="white"/>
+              </a:solidFill>
+              <a:effectLst/>
+              <a:uLnTx/>
+              <a:uFillTx/>
+              <a:latin typeface="Gill Sans MT"/>
+              <a:ea typeface="+mn-ea"/>
+              <a:cs typeface="+mn-cs"/>
+            </a:endParaRPr>
+          </a:p>
+        </p:txBody>
+      </p:sp>
+      <p:sp>
+        <p:nvSpPr>
+          <p:cNvPr id="12" name="Horizontal Scroll 11"/>
+          <p:cNvSpPr/>
+          <p:nvPr/>
+        </p:nvSpPr>
+        <p:spPr>
+          <a:xfrm>
+            <a:off x="294068" y="178297"/>
+            <a:ext cx="1265712" cy="762000"/>
+          </a:xfrm>
+          <a:prstGeom prst="horizontalScroll">
+            <a:avLst/>
+          </a:prstGeom>
+          <a:gradFill rotWithShape="1">
+            <a:gsLst>
+              <a:gs pos="0">
+                <a:srgbClr val="4F81BD">
+                  <a:tint val="50000"/>
+                  <a:satMod val="300000"/>
+                </a:srgbClr>
+              </a:gs>
+              <a:gs pos="35000">
+                <a:srgbClr val="4F81BD">
+                  <a:tint val="37000"/>
+                  <a:satMod val="300000"/>
+                </a:srgbClr>
+              </a:gs>
+              <a:gs pos="100000">
+                <a:srgbClr val="4F81BD">
+                  <a:tint val="15000"/>
+                  <a:satMod val="350000"/>
+                </a:srgbClr>
+              </a:gs>
+            </a:gsLst>
+            <a:lin ang="16200000" scaled="1"/>
+          </a:gradFill>
+          <a:ln w="9525" cap="flat" cmpd="sng" algn="ctr">
+            <a:solidFill>
+              <a:srgbClr val="4F81BD">
+                <a:shade val="95000"/>
+                <a:satMod val="105000"/>
+              </a:srgbClr>
+            </a:solidFill>
+            <a:prstDash val="solid"/>
+          </a:ln>
+          <a:effectLst>
+            <a:outerShdw blurRad="40000" dist="20000" dir="5400000" rotWithShape="0">
+              <a:srgbClr val="000000">
+                <a:alpha val="38000"/>
+              </a:srgbClr>
+            </a:outerShdw>
+          </a:effectLst>
+        </p:spPr>
+        <p:txBody>
+          <a:bodyPr rtlCol="0" anchor="ctr"/>
+          <a:lstStyle/>
+          <a:p>
+            <a:pPr marL="0" marR="0" lvl="0" indent="0" algn="ctr" defTabSz="457200" eaLnBrk="1" fontAlgn="auto" latinLnBrk="0" hangingPunct="1">
+              <a:lnSpc>
+                <a:spcPct val="100000"/>
+              </a:lnSpc>
+              <a:spcBef>
+                <a:spcPts val="0"/>
+              </a:spcBef>
+              <a:spcAft>
+                <a:spcPts val="0"/>
+              </a:spcAft>
+              <a:buClrTx/>
+              <a:buSzTx/>
+              <a:buFontTx/>
+              <a:buNone/>
+              <a:tabLst/>
+              <a:defRPr/>
+            </a:pPr>
+            <a:r>
+              <a:rPr kumimoji="0" lang="en-US" sz="2400" b="0" i="0" u="none" strike="noStrike" kern="0" cap="none" spc="0" normalizeH="0" baseline="0" noProof="0" dirty="0">
+                <a:ln>
+                  <a:noFill/>
+                </a:ln>
+                <a:solidFill>
+                  <a:prstClr val="black"/>
+                </a:solidFill>
+                <a:effectLst/>
+                <a:uLnTx/>
+                <a:uFillTx/>
+                <a:latin typeface="Calibri"/>
+                <a:ea typeface="+mn-ea"/>
+                <a:cs typeface="+mn-cs"/>
+              </a:rPr>
+              <a:t>Review</a:t>
+            </a:r>
+          </a:p>
+        </p:txBody>
+      </p:sp>
+    </p:spTree>
+    <p:extLst>
+      <p:ext uri="{BB962C8B-B14F-4D97-AF65-F5344CB8AC3E}">
+        <p14:creationId xmlns:p14="http://schemas.microsoft.com/office/powerpoint/2010/main" val="3967346349"/>
+      </p:ext>
+    </p:extLst>
+  </p:cSld>
+  <p:clrMapOvr>
+    <a:masterClrMapping/>
+  </p:clrMapOvr>
+  <p:timing>
+    <p:tnLst>
+      <p:par>
+        <p:cTn id="1" dur="indefinite" restart="never" nodeType="tmRoot">
+          <p:childTnLst>
+            <p:seq concurrent="1" nextAc="seek">
+              <p:cTn id="2" dur="indefinite" nodeType="mainSeq">
+                <p:childTnLst>
+                  <p:par>
+                    <p:cTn id="3" fill="hold">
+                      <p:stCondLst>
+                        <p:cond delay="indefinite"/>
+                      </p:stCondLst>
+                      <p:childTnLst>
+                        <p:par>
+                          <p:cTn id="4" fill="hold">
+                            <p:stCondLst>
+                              <p:cond delay="0"/>
+                            </p:stCondLst>
+                            <p:childTnLst>
+                              <p:par>
+                                <p:cTn id="5" presetID="1" presetClass="entr" presetSubtype="0" fill="hold" nodeType="clickEffect">
+                                  <p:stCondLst>
+                                    <p:cond delay="0"/>
+                                  </p:stCondLst>
+                                  <p:childTnLst>
+                                    <p:set>
+                                      <p:cBhvr>
+                                        <p:cTn id="6" dur="1" fill="hold">
+                                          <p:stCondLst>
+                                            <p:cond delay="0"/>
+                                          </p:stCondLst>
+                                        </p:cTn>
+                                        <p:tgtEl>
+                                          <p:spTgt spid="8"/>
+                                        </p:tgtEl>
+                                        <p:attrNameLst>
+                                          <p:attrName>style.visibility</p:attrName>
+                                        </p:attrNameLst>
+                                      </p:cBhvr>
+                                      <p:to>
+                                        <p:strVal val="visible"/>
+                                      </p:to>
+                                    </p:set>
+                                  </p:childTnLst>
+                                </p:cTn>
+                              </p:par>
+                            </p:childTnLst>
+                          </p:cTn>
+                        </p:par>
+                      </p:childTnLst>
+                    </p:cTn>
+                  </p:par>
+                  <p:par>
+                    <p:cTn id="7" fill="hold">
+                      <p:stCondLst>
+                        <p:cond delay="indefinite"/>
+                      </p:stCondLst>
+                      <p:childTnLst>
+                        <p:par>
+                          <p:cTn id="8" fill="hold">
+                            <p:stCondLst>
+                              <p:cond delay="0"/>
+                            </p:stCondLst>
+                            <p:childTnLst>
+                              <p:par>
+                                <p:cTn id="9" presetID="1" presetClass="entr" presetSubtype="0" fill="hold" grpId="0" nodeType="clickEffect">
+                                  <p:stCondLst>
+                                    <p:cond delay="0"/>
+                                  </p:stCondLst>
+                                  <p:childTnLst>
+                                    <p:set>
+                                      <p:cBhvr>
+                                        <p:cTn id="10" dur="1" fill="hold">
+                                          <p:stCondLst>
+                                            <p:cond delay="0"/>
+                                          </p:stCondLst>
+                                        </p:cTn>
+                                        <p:tgtEl>
+                                          <p:spTgt spid="11"/>
+                                        </p:tgtEl>
+                                        <p:attrNameLst>
+                                          <p:attrName>style.visibility</p:attrName>
+                                        </p:attrNameLst>
+                                      </p:cBhvr>
+                                      <p:to>
+                                        <p:strVal val="visible"/>
+                                      </p:to>
+                                    </p:set>
+                                  </p:childTnLst>
+                                </p:cTn>
+                              </p:par>
+                            </p:childTnLst>
+                          </p:cTn>
+                        </p:par>
+                      </p:childTnLst>
+                    </p:cTn>
+                  </p:par>
+                </p:childTnLst>
+              </p:cTn>
+              <p:prevCondLst>
+                <p:cond evt="onPrev" delay="0">
+                  <p:tgtEl>
+                    <p:sldTgt/>
+                  </p:tgtEl>
+                </p:cond>
+              </p:prevCondLst>
+              <p:nextCondLst>
+                <p:cond evt="onNext" delay="0">
+                  <p:tgtEl>
+                    <p:sldTgt/>
+                  </p:tgtEl>
+                </p:cond>
+              </p:nextCondLst>
+            </p:seq>
+          </p:childTnLst>
+        </p:cTn>
+      </p:par>
+    </p:tnLst>
+    <p:bldLst>
+      <p:bldP spid="11" grpId="0" animBg="1"/>
+    </p:bldLst>
+  </p:timing>
+</p:sld>
+</file>
+
+<file path=ppt/slides/slide6.xml><?xml version="1.0" encoding="utf-8"?>
+<p:sld xmlns:a="http://schemas.openxmlformats.org/drawingml/2006/main" xmlns:r="http://schemas.openxmlformats.org/officeDocument/2006/relationships" xmlns:p="http://schemas.openxmlformats.org/presentationml/2006/main">
+  <p:cSld>
+    <p:spTree>
+      <p:nvGrpSpPr>
+        <p:cNvPr id="1" name=""/>
+        <p:cNvGrpSpPr/>
+        <p:nvPr/>
+      </p:nvGrpSpPr>
+      <p:grpSpPr>
+        <a:xfrm>
+          <a:off x="0" y="0"/>
+          <a:ext cx="0" cy="0"/>
+          <a:chOff x="0" y="0"/>
+          <a:chExt cx="0" cy="0"/>
+        </a:xfrm>
+      </p:grpSpPr>
+      <p:sp>
+        <p:nvSpPr>
+          <p:cNvPr id="4" name="Slide Number Placeholder 5"/>
+          <p:cNvSpPr>
+            <a:spLocks noGrp="1"/>
+          </p:cNvSpPr>
+          <p:nvPr>
+            <p:ph type="sldNum" sz="quarter" idx="4294967295"/>
+          </p:nvPr>
+        </p:nvSpPr>
+        <p:spPr>
+          <a:xfrm>
+            <a:off x="612648" y="6356350"/>
+            <a:ext cx="1981200" cy="365760"/>
+          </a:xfrm>
+          <a:prstGeom prst="rect">
+            <a:avLst/>
+          </a:prstGeom>
+        </p:spPr>
+        <p:txBody>
+          <a:bodyPr/>
+          <a:lstStyle/>
+          <a:p>
+            <a:pPr marL="0" marR="0" lvl="0" indent="0" algn="l" defTabSz="914400" rtl="0" eaLnBrk="1" fontAlgn="auto" latinLnBrk="0" hangingPunct="1">
+              <a:lnSpc>
+                <a:spcPct val="100000"/>
+              </a:lnSpc>
+              <a:spcBef>
+                <a:spcPts val="0"/>
+              </a:spcBef>
+              <a:spcAft>
+                <a:spcPts val="0"/>
+              </a:spcAft>
+              <a:buClrTx/>
+              <a:buSzTx/>
+              <a:buFontTx/>
+              <a:buNone/>
+              <a:tabLst/>
+              <a:defRPr/>
+            </a:pPr>
+            <a:fld id="{A0CDAA7F-72E9-4BAF-9D1D-807702175D95}" type="slidenum">
+              <a:rPr kumimoji="0" lang="en-US" sz="1400" b="0" i="0" u="none" strike="noStrike" kern="1200" cap="none" spc="0" normalizeH="0" baseline="0" noProof="0">
+                <a:ln>
+                  <a:noFill/>
+                </a:ln>
+                <a:solidFill>
+                  <a:srgbClr val="1F497D"/>
+                </a:solidFill>
+                <a:effectLst/>
+                <a:uLnTx/>
+                <a:uFillTx/>
+                <a:latin typeface="Gill Sans MT"/>
+                <a:ea typeface="+mn-ea"/>
+                <a:cs typeface="+mn-cs"/>
+              </a:rPr>
+              <a:pPr marL="0" marR="0" lvl="0" indent="0" algn="l" defTabSz="914400" rtl="0" eaLnBrk="1" fontAlgn="auto" latinLnBrk="0" hangingPunct="1">
+                <a:lnSpc>
+                  <a:spcPct val="100000"/>
+                </a:lnSpc>
+                <a:spcBef>
+                  <a:spcPts val="0"/>
+                </a:spcBef>
+                <a:spcAft>
+                  <a:spcPts val="0"/>
+                </a:spcAft>
+                <a:buClrTx/>
+                <a:buSzTx/>
+                <a:buFontTx/>
+                <a:buNone/>
+                <a:tabLst/>
+                <a:defRPr/>
+              </a:pPr>
+              <a:t>6</a:t>
+            </a:fld>
+            <a:endParaRPr kumimoji="0" lang="en-US" sz="1400" b="0" i="0" u="none" strike="noStrike" kern="1200" cap="none" spc="0" normalizeH="0" baseline="0" noProof="0">
+              <a:ln>
+                <a:noFill/>
+              </a:ln>
+              <a:solidFill>
+                <a:srgbClr val="1F497D"/>
+              </a:solidFill>
+              <a:effectLst/>
+              <a:uLnTx/>
+              <a:uFillTx/>
+              <a:latin typeface="Gill Sans MT"/>
+              <a:ea typeface="+mn-ea"/>
+              <a:cs typeface="+mn-cs"/>
+            </a:endParaRPr>
+          </a:p>
+        </p:txBody>
+      </p:sp>
+      <mc:AlternateContent xmlns:mc="http://schemas.openxmlformats.org/markup-compatibility/2006" xmlns:a14="http://schemas.microsoft.com/office/drawing/2010/main">
+        <mc:Choice Requires="a14">
+          <p:sp>
+            <p:nvSpPr>
+              <p:cNvPr id="185347" name="Rectangle 3"/>
+              <p:cNvSpPr>
+                <a:spLocks noGrp="1" noChangeArrowheads="1"/>
+              </p:cNvSpPr>
+              <p:nvPr>
+                <p:ph type="body" idx="1"/>
+              </p:nvPr>
+            </p:nvSpPr>
+            <p:spPr>
+              <a:xfrm>
+                <a:off x="457200" y="1295400"/>
+                <a:ext cx="7696200" cy="4572000"/>
+              </a:xfrm>
+              <a:noFill/>
+              <a:extLst>
+                <a:ext uri="{909E8E84-426E-40DD-AFC4-6F175D3DCCD1}">
+                  <a14:hiddenFill>
+                    <a:solidFill>
+                      <a:srgbClr val="E4F5FF"/>
+                    </a:solidFill>
+                  </a14:hiddenFill>
+                </a:ext>
+              </a:extLst>
+            </p:spPr>
+            <p:txBody>
+              <a:bodyPr/>
+              <a:lstStyle/>
+              <a:p>
+                <a:r>
+                  <a:rPr lang="en-US" sz="2600" dirty="0">
+                    <a:latin typeface="Arial" charset="0"/>
+                  </a:rPr>
+                  <a:t>Three ways to represent signed binary integers:  </a:t>
+                </a:r>
+              </a:p>
+              <a:p>
+                <a:pPr lvl="1"/>
+                <a:r>
+                  <a:rPr lang="en-US" sz="2200" dirty="0">
+                    <a:latin typeface="Arial" charset="0"/>
+                  </a:rPr>
+                  <a:t>Signed magnitude </a:t>
+                </a:r>
+              </a:p>
+              <a:p>
+                <a:pPr lvl="2"/>
+                <a14:m>
+                  <m:oMath xmlns:m="http://schemas.openxmlformats.org/officeDocument/2006/math">
+                    <m:r>
+                      <a:rPr lang="en-US" sz="1800" b="1" i="1">
+                        <a:latin typeface="Cambria Math"/>
+                      </a:rPr>
+                      <m:t>𝒗𝒂𝒍𝒖𝒆</m:t>
+                    </m:r>
+                    <m:r>
+                      <a:rPr lang="en-US" sz="1800" b="1" i="1">
+                        <a:latin typeface="Cambria Math"/>
+                      </a:rPr>
+                      <m:t>=</m:t>
+                    </m:r>
+                    <m:sSup>
+                      <m:sSupPr>
+                        <m:ctrlPr>
+                          <a:rPr lang="en-US" sz="1800" b="1" i="1">
+                            <a:latin typeface="Cambria Math" panose="02040503050406030204" pitchFamily="18" charset="0"/>
+                          </a:rPr>
+                        </m:ctrlPr>
+                      </m:sSupPr>
+                      <m:e>
+                        <m:r>
+                          <a:rPr lang="en-US" sz="1800" b="1" i="1">
+                            <a:latin typeface="Cambria Math"/>
+                          </a:rPr>
+                          <m:t>(−</m:t>
+                        </m:r>
+                        <m:r>
+                          <a:rPr lang="en-US" sz="1800" b="1" i="1">
+                            <a:latin typeface="Cambria Math"/>
+                          </a:rPr>
+                          <m:t>𝟏</m:t>
+                        </m:r>
+                        <m:r>
+                          <a:rPr lang="en-US" sz="1800" b="1" i="1">
+                            <a:latin typeface="Cambria Math"/>
+                          </a:rPr>
+                          <m:t>)</m:t>
+                        </m:r>
+                      </m:e>
+                      <m:sup>
+                        <m:r>
+                          <a:rPr lang="en-US" sz="1800" b="1" i="1">
+                            <a:solidFill>
+                              <a:srgbClr val="FF0000"/>
+                            </a:solidFill>
+                            <a:latin typeface="Cambria Math"/>
+                          </a:rPr>
+                          <m:t>𝒔𝒊𝒈𝒏</m:t>
+                        </m:r>
+                      </m:sup>
+                    </m:sSup>
+                    <m:r>
+                      <a:rPr lang="en-US" sz="1800" b="1" i="1">
+                        <a:latin typeface="Cambria Math"/>
+                      </a:rPr>
+                      <m:t>×</m:t>
+                    </m:r>
+                    <m:r>
+                      <a:rPr lang="en-US" sz="1800" b="1" i="1">
+                        <a:solidFill>
+                          <a:srgbClr val="0000FF"/>
+                        </a:solidFill>
+                        <a:latin typeface="Cambria Math"/>
+                      </a:rPr>
+                      <m:t>𝑴𝒂𝒈𝒏𝒊𝒕𝒖𝒅𝒆</m:t>
+                    </m:r>
+                  </m:oMath>
+                </a14:m>
+                <a:endParaRPr lang="en-US" sz="1900" dirty="0">
+                  <a:latin typeface="Arial" charset="0"/>
+                </a:endParaRPr>
+              </a:p>
+              <a:p>
+                <a:pPr lvl="1"/>
+                <a:r>
+                  <a:rPr lang="en-US" sz="2200" dirty="0">
+                    <a:latin typeface="Arial" charset="0"/>
+                  </a:rPr>
+                  <a:t>One’s complement (</a:t>
+                </a:r>
+                <a14:m>
+                  <m:oMath xmlns:m="http://schemas.openxmlformats.org/officeDocument/2006/math">
+                    <m:acc>
+                      <m:accPr>
+                        <m:chr m:val="̃"/>
+                        <m:ctrlPr>
+                          <a:rPr lang="en-US" sz="2400" b="1" i="1">
+                            <a:latin typeface="Cambria Math" panose="02040503050406030204" pitchFamily="18" charset="0"/>
+                          </a:rPr>
+                        </m:ctrlPr>
+                      </m:accPr>
+                      <m:e>
+                        <m:r>
+                          <a:rPr lang="en-US" sz="2400" b="1" i="1">
+                            <a:latin typeface="Cambria Math"/>
+                          </a:rPr>
+                          <m:t>𝜶</m:t>
+                        </m:r>
+                      </m:e>
+                    </m:acc>
+                  </m:oMath>
+                </a14:m>
+                <a:r>
+                  <a:rPr lang="en-US" sz="2200" dirty="0">
+                    <a:latin typeface="Arial" charset="0"/>
+                  </a:rPr>
+                  <a:t>)</a:t>
+                </a:r>
+              </a:p>
+              <a:p>
+                <a:pPr lvl="2"/>
+                <a14:m>
+                  <m:oMath xmlns:m="http://schemas.openxmlformats.org/officeDocument/2006/math">
+                    <m:r>
+                      <a:rPr lang="en-US" sz="1800" b="1" i="1">
+                        <a:latin typeface="Cambria Math"/>
+                      </a:rPr>
+                      <m:t>𝜶</m:t>
+                    </m:r>
+                    <m:r>
+                      <a:rPr lang="en-US" sz="1800" b="1" i="1">
+                        <a:latin typeface="Cambria Math"/>
+                      </a:rPr>
+                      <m:t>+</m:t>
+                    </m:r>
+                    <m:acc>
+                      <m:accPr>
+                        <m:chr m:val="̃"/>
+                        <m:ctrlPr>
+                          <a:rPr lang="en-US" sz="1800" b="1" i="1">
+                            <a:latin typeface="Cambria Math" panose="02040503050406030204" pitchFamily="18" charset="0"/>
+                          </a:rPr>
+                        </m:ctrlPr>
+                      </m:accPr>
+                      <m:e>
+                        <m:r>
+                          <a:rPr lang="en-US" sz="1800" b="1" i="1">
+                            <a:latin typeface="Cambria Math"/>
+                          </a:rPr>
+                          <m:t>𝜶</m:t>
+                        </m:r>
+                      </m:e>
+                    </m:acc>
+                    <m:r>
+                      <a:rPr lang="en-US" sz="1800" b="1" i="1">
+                        <a:latin typeface="Cambria Math"/>
+                      </a:rPr>
+                      <m:t>=</m:t>
+                    </m:r>
+                    <m:sSup>
+                      <m:sSupPr>
+                        <m:ctrlPr>
+                          <a:rPr lang="en-US" sz="1800" b="1" i="1">
+                            <a:latin typeface="Cambria Math" panose="02040503050406030204" pitchFamily="18" charset="0"/>
+                          </a:rPr>
+                        </m:ctrlPr>
+                      </m:sSupPr>
+                      <m:e>
+                        <m:r>
+                          <a:rPr lang="en-US" sz="1800" b="1" i="1">
+                            <a:latin typeface="Cambria Math"/>
+                          </a:rPr>
+                          <m:t>𝟐</m:t>
+                        </m:r>
+                      </m:e>
+                      <m:sup>
+                        <m:r>
+                          <a:rPr lang="en-US" sz="1800" b="1" i="1">
+                            <a:latin typeface="Cambria Math"/>
+                          </a:rPr>
+                          <m:t>𝒏</m:t>
+                        </m:r>
+                      </m:sup>
+                    </m:sSup>
+                    <m:r>
+                      <a:rPr lang="en-US" sz="1800" b="1" i="1">
+                        <a:latin typeface="Cambria Math"/>
+                      </a:rPr>
+                      <m:t>−</m:t>
+                    </m:r>
+                    <m:r>
+                      <a:rPr lang="en-US" sz="1800" b="1" i="1">
+                        <a:latin typeface="Cambria Math"/>
+                      </a:rPr>
+                      <m:t>𝟏</m:t>
+                    </m:r>
+                  </m:oMath>
+                </a14:m>
+                <a:endParaRPr lang="en-US" sz="1900" dirty="0">
+                  <a:latin typeface="Arial" charset="0"/>
+                </a:endParaRPr>
+              </a:p>
+              <a:p>
+                <a:pPr lvl="1"/>
+                <a:r>
+                  <a:rPr lang="en-US" sz="2200" dirty="0">
+                    <a:latin typeface="Arial" charset="0"/>
+                  </a:rPr>
+                  <a:t>Two’s complement (</a:t>
+                </a:r>
+                <a14:m>
+                  <m:oMath xmlns:m="http://schemas.openxmlformats.org/officeDocument/2006/math">
+                    <m:acc>
+                      <m:accPr>
+                        <m:chr m:val="̅"/>
+                        <m:ctrlPr>
+                          <a:rPr lang="en-US" sz="2400" b="1" i="1">
+                            <a:latin typeface="Cambria Math" panose="02040503050406030204" pitchFamily="18" charset="0"/>
+                          </a:rPr>
+                        </m:ctrlPr>
+                      </m:accPr>
+                      <m:e>
+                        <m:r>
+                          <a:rPr lang="en-US" sz="2400" b="1" i="1">
+                            <a:latin typeface="Cambria Math"/>
+                          </a:rPr>
+                          <m:t>𝜶</m:t>
+                        </m:r>
+                      </m:e>
+                    </m:acc>
+                  </m:oMath>
+                </a14:m>
+                <a:r>
+                  <a:rPr lang="en-US" sz="2200" dirty="0">
+                    <a:latin typeface="Arial" charset="0"/>
+                  </a:rPr>
+                  <a:t>)</a:t>
+                </a:r>
+              </a:p>
+              <a:p>
+                <a:pPr lvl="2"/>
+                <a14:m>
+                  <m:oMath xmlns:m="http://schemas.openxmlformats.org/officeDocument/2006/math">
+                    <m:r>
+                      <a:rPr lang="en-US" sz="1800" b="1" i="1">
+                        <a:latin typeface="Cambria Math"/>
+                      </a:rPr>
+                      <m:t>𝜶</m:t>
+                    </m:r>
+                    <m:r>
+                      <a:rPr lang="en-US" sz="1800" b="1" i="1">
+                        <a:latin typeface="Cambria Math"/>
+                      </a:rPr>
+                      <m:t>+</m:t>
+                    </m:r>
+                    <m:acc>
+                      <m:accPr>
+                        <m:chr m:val="̅"/>
+                        <m:ctrlPr>
+                          <a:rPr lang="en-US" sz="1800" b="1" i="1">
+                            <a:latin typeface="Cambria Math" panose="02040503050406030204" pitchFamily="18" charset="0"/>
+                          </a:rPr>
+                        </m:ctrlPr>
+                      </m:accPr>
+                      <m:e>
+                        <m:r>
+                          <a:rPr lang="en-US" sz="1800" b="1" i="1">
+                            <a:latin typeface="Cambria Math"/>
+                          </a:rPr>
+                          <m:t>𝜶</m:t>
+                        </m:r>
+                      </m:e>
+                    </m:acc>
+                    <m:r>
+                      <a:rPr lang="en-US" sz="1800" b="1" i="1">
+                        <a:latin typeface="Cambria Math"/>
+                      </a:rPr>
+                      <m:t>=</m:t>
+                    </m:r>
+                    <m:sSup>
+                      <m:sSupPr>
+                        <m:ctrlPr>
+                          <a:rPr lang="en-US" sz="1800" b="1" i="1">
+                            <a:latin typeface="Cambria Math" panose="02040503050406030204" pitchFamily="18" charset="0"/>
+                          </a:rPr>
+                        </m:ctrlPr>
+                      </m:sSupPr>
+                      <m:e>
+                        <m:r>
+                          <a:rPr lang="en-US" sz="1800" b="1" i="1">
+                            <a:latin typeface="Cambria Math"/>
+                          </a:rPr>
+                          <m:t>𝟐</m:t>
+                        </m:r>
+                      </m:e>
+                      <m:sup>
+                        <m:r>
+                          <a:rPr lang="en-US" sz="1800" b="1" i="1">
+                            <a:latin typeface="Cambria Math"/>
+                          </a:rPr>
+                          <m:t>𝒏</m:t>
+                        </m:r>
+                      </m:sup>
+                    </m:sSup>
+                  </m:oMath>
+                </a14:m>
+                <a:endParaRPr lang="en-US" sz="1800" dirty="0"/>
+              </a:p>
+              <a:p>
+                <a:pPr marL="594360" lvl="2" indent="0">
+                  <a:buNone/>
+                </a:pPr>
+                <a:endParaRPr lang="en-US" sz="1900" dirty="0">
+                  <a:latin typeface="Arial" charset="0"/>
+                </a:endParaRPr>
+              </a:p>
+            </p:txBody>
+          </p:sp>
+        </mc:Choice>
+        <mc:Fallback xmlns="">
+          <p:sp>
+            <p:nvSpPr>
+              <p:cNvPr id="185347" name="Rectangle 3"/>
+              <p:cNvSpPr>
+                <a:spLocks noGrp="1" noRot="1" noChangeAspect="1" noMove="1" noResize="1" noEditPoints="1" noAdjustHandles="1" noChangeArrowheads="1" noChangeShapeType="1" noTextEdit="1"/>
+              </p:cNvSpPr>
+              <p:nvPr>
+                <p:ph type="body" idx="1"/>
+              </p:nvPr>
+            </p:nvSpPr>
+            <p:spPr>
+              <a:xfrm>
+                <a:off x="457200" y="1295400"/>
+                <a:ext cx="7696200" cy="4572000"/>
+              </a:xfrm>
+              <a:blipFill rotWithShape="1">
+                <a:blip r:embed="rId3"/>
+                <a:stretch>
+                  <a:fillRect l="-633" t="-1200" r="-475"/>
+                </a:stretch>
+              </a:blipFill>
+              <a:extLst>
+                <a:ext uri="{909E8E84-426E-40DD-AFC4-6F175D3DCCD1}">
+                  <a14:hiddenFill xmlns:a14="http://schemas.microsoft.com/office/drawing/2010/main">
+                    <a:solidFill>
+                      <a:srgbClr val="E4F5FF"/>
+                    </a:solidFill>
+                  </a14:hiddenFill>
+                </a:ext>
+              </a:extLst>
+            </p:spPr>
+            <p:txBody>
+              <a:bodyPr/>
+              <a:lstStyle/>
+              <a:p>
+                <a:r>
+                  <a:rPr lang="en-US">
+                    <a:noFill/>
+                  </a:rPr>
+                  <a:t> </a:t>
+                </a:r>
+              </a:p>
+            </p:txBody>
+          </p:sp>
+        </mc:Fallback>
+      </mc:AlternateContent>
+      <p:sp>
+        <p:nvSpPr>
+          <p:cNvPr id="2" name="Title 1"/>
+          <p:cNvSpPr>
+            <a:spLocks noGrp="1"/>
+          </p:cNvSpPr>
+          <p:nvPr>
+            <p:ph type="title"/>
+          </p:nvPr>
+        </p:nvSpPr>
+        <p:spPr/>
+        <p:txBody>
+          <a:bodyPr>
+            <a:normAutofit/>
+          </a:bodyPr>
+          <a:lstStyle/>
+          <a:p>
+            <a:r>
+              <a:rPr lang="en-US" dirty="0"/>
+              <a:t>Signed Integer Representation</a:t>
+            </a:r>
+            <a:br>
+              <a:rPr lang="en-US" dirty="0"/>
+            </a:br>
+            <a:r>
+              <a:rPr lang="en-US" dirty="0"/>
+              <a:t>Overview</a:t>
+            </a:r>
+          </a:p>
+        </p:txBody>
+      </p:sp>
+      <mc:AlternateContent xmlns:mc="http://schemas.openxmlformats.org/markup-compatibility/2006" xmlns:a14="http://schemas.microsoft.com/office/drawing/2010/main">
+        <mc:Choice Requires="a14">
+          <p:graphicFrame>
+            <p:nvGraphicFramePr>
+              <p:cNvPr id="3" name="Table 2"/>
+              <p:cNvGraphicFramePr>
+                <a:graphicFrameLocks noGrp="1"/>
+              </p:cNvGraphicFramePr>
+              <p:nvPr/>
+            </p:nvGraphicFramePr>
+            <p:xfrm>
+              <a:off x="228600" y="4267200"/>
+              <a:ext cx="8763001" cy="1813560"/>
+            </p:xfrm>
+            <a:graphic>
+              <a:graphicData uri="http://schemas.openxmlformats.org/drawingml/2006/table">
+                <a:tbl>
+                  <a:tblPr firstRow="1" firstCol="1" bandRow="1">
+                    <a:tableStyleId>{5C22544A-7EE6-4342-B048-85BDC9FD1C3A}</a:tableStyleId>
+                  </a:tblPr>
+                  <a:tblGrid>
+                    <a:gridCol w="1447800">
+                      <a:extLst>
+                        <a:ext uri="{9D8B030D-6E8A-4147-A177-3AD203B41FA5}">
+                          <a16:colId xmlns:a16="http://schemas.microsoft.com/office/drawing/2014/main" val="20000"/>
+                        </a:ext>
+                      </a:extLst>
+                    </a:gridCol>
+                    <a:gridCol w="2667000">
+                      <a:extLst>
+                        <a:ext uri="{9D8B030D-6E8A-4147-A177-3AD203B41FA5}">
+                          <a16:colId xmlns:a16="http://schemas.microsoft.com/office/drawing/2014/main" val="20001"/>
+                        </a:ext>
+                      </a:extLst>
+                    </a:gridCol>
+                    <a:gridCol w="2590800">
+                      <a:extLst>
+                        <a:ext uri="{9D8B030D-6E8A-4147-A177-3AD203B41FA5}">
+                          <a16:colId xmlns:a16="http://schemas.microsoft.com/office/drawing/2014/main" val="20002"/>
+                        </a:ext>
+                      </a:extLst>
+                    </a:gridCol>
+                    <a:gridCol w="2057401">
+                      <a:extLst>
+                        <a:ext uri="{9D8B030D-6E8A-4147-A177-3AD203B41FA5}">
+                          <a16:colId xmlns:a16="http://schemas.microsoft.com/office/drawing/2014/main" val="20003"/>
+                        </a:ext>
+                      </a:extLst>
+                    </a:gridCol>
+                  </a:tblGrid>
+                  <a:tr h="0">
+                    <a:tc>
+                      <a:txBody>
+                        <a:bodyPr/>
+                        <a:lstStyle/>
+                        <a:p>
+                          <a:pPr marL="0" marR="0" algn="just">
+                            <a:spcBef>
+                              <a:spcPts val="0"/>
+                            </a:spcBef>
+                            <a:spcAft>
+                              <a:spcPts val="0"/>
+                            </a:spcAft>
+                          </a:pPr>
+                          <a:r>
+                            <a:rPr lang="en-US" sz="1800" dirty="0">
+                              <a:effectLst/>
+                            </a:rPr>
+                            <a:t> </a:t>
+                          </a:r>
+                          <a:endParaRPr lang="en-US" sz="1800" dirty="0">
+                            <a:effectLst/>
+                            <a:latin typeface="Palatino Linotype"/>
+                            <a:ea typeface="宋体"/>
+                            <a:cs typeface="Times New Roman"/>
+                          </a:endParaRPr>
+                        </a:p>
+                      </a:txBody>
+                      <a:tcPr marL="68580" marR="68580" marT="0" marB="0" anchor="ctr"/>
+                    </a:tc>
+                    <a:tc>
+                      <a:txBody>
+                        <a:bodyPr/>
+                        <a:lstStyle/>
+                        <a:p>
+                          <a:pPr marL="0" marR="0" algn="ctr">
+                            <a:spcBef>
+                              <a:spcPts val="0"/>
+                            </a:spcBef>
+                            <a:spcAft>
+                              <a:spcPts val="0"/>
+                            </a:spcAft>
+                          </a:pPr>
+                          <a:r>
+                            <a:rPr lang="en-US" sz="1800">
+                              <a:effectLst/>
+                            </a:rPr>
+                            <a:t>Sign-and-Magnitude</a:t>
+                          </a:r>
+                          <a:endParaRPr lang="en-US" sz="1800">
+                            <a:effectLst/>
+                            <a:latin typeface="Palatino Linotype"/>
+                            <a:ea typeface="宋体"/>
+                            <a:cs typeface="Times New Roman"/>
+                          </a:endParaRPr>
+                        </a:p>
+                      </a:txBody>
+                      <a:tcPr marL="68580" marR="68580" marT="0" marB="0" anchor="ctr"/>
+                    </a:tc>
+                    <a:tc>
+                      <a:txBody>
+                        <a:bodyPr/>
+                        <a:lstStyle/>
+                        <a:p>
+                          <a:pPr marL="0" marR="0" algn="ctr">
+                            <a:spcBef>
+                              <a:spcPts val="0"/>
+                            </a:spcBef>
+                            <a:spcAft>
+                              <a:spcPts val="0"/>
+                            </a:spcAft>
+                          </a:pPr>
+                          <a:r>
+                            <a:rPr lang="en-US" sz="1800" dirty="0">
+                              <a:effectLst/>
+                            </a:rPr>
+                            <a:t>One’s </a:t>
+                          </a:r>
+                        </a:p>
+                        <a:p>
+                          <a:pPr marL="0" marR="0" algn="ctr">
+                            <a:spcBef>
+                              <a:spcPts val="0"/>
+                            </a:spcBef>
+                            <a:spcAft>
+                              <a:spcPts val="0"/>
+                            </a:spcAft>
+                          </a:pPr>
+                          <a:r>
+                            <a:rPr lang="en-US" sz="1800" dirty="0">
+                              <a:effectLst/>
+                            </a:rPr>
+                            <a:t>Complement</a:t>
+                          </a:r>
+                          <a:endParaRPr lang="en-US" sz="1800" dirty="0">
+                            <a:effectLst/>
+                            <a:latin typeface="Palatino Linotype"/>
+                            <a:ea typeface="宋体"/>
+                            <a:cs typeface="Times New Roman"/>
+                          </a:endParaRPr>
+                        </a:p>
+                      </a:txBody>
+                      <a:tcPr marL="68580" marR="68580" marT="0" marB="0" anchor="ctr"/>
+                    </a:tc>
+                    <a:tc>
+                      <a:txBody>
+                        <a:bodyPr/>
+                        <a:lstStyle/>
+                        <a:p>
+                          <a:pPr marL="0" marR="0" algn="ctr">
+                            <a:spcBef>
+                              <a:spcPts val="0"/>
+                            </a:spcBef>
+                            <a:spcAft>
+                              <a:spcPts val="0"/>
+                            </a:spcAft>
+                          </a:pPr>
+                          <a:r>
+                            <a:rPr lang="en-US" sz="1800">
+                              <a:effectLst/>
+                            </a:rPr>
+                            <a:t>Two’s Complement</a:t>
+                          </a:r>
+                          <a:endParaRPr lang="en-US" sz="1800">
+                            <a:effectLst/>
+                            <a:latin typeface="Palatino Linotype"/>
+                            <a:ea typeface="宋体"/>
+                            <a:cs typeface="Times New Roman"/>
+                          </a:endParaRPr>
+                        </a:p>
+                      </a:txBody>
+                      <a:tcPr marL="68580" marR="68580" marT="0" marB="0" anchor="ctr"/>
+                    </a:tc>
+                    <a:extLst>
+                      <a:ext uri="{0D108BD9-81ED-4DB2-BD59-A6C34878D82A}">
+                        <a16:rowId xmlns:a16="http://schemas.microsoft.com/office/drawing/2014/main" val="10000"/>
+                      </a:ext>
+                    </a:extLst>
+                  </a:tr>
+                  <a:tr h="441960">
+                    <a:tc>
+                      <a:txBody>
+                        <a:bodyPr/>
+                        <a:lstStyle/>
+                        <a:p>
+                          <a:pPr marL="0" marR="0" algn="ctr">
+                            <a:spcBef>
+                              <a:spcPts val="0"/>
+                            </a:spcBef>
+                            <a:spcAft>
+                              <a:spcPts val="0"/>
+                            </a:spcAft>
+                          </a:pPr>
+                          <a:r>
+                            <a:rPr lang="en-US" sz="1800" dirty="0">
+                              <a:effectLst/>
+                            </a:rPr>
+                            <a:t>Range</a:t>
+                          </a:r>
+                          <a:endParaRPr lang="en-US" sz="1800" dirty="0">
+                            <a:effectLst/>
+                            <a:latin typeface="Palatino Linotype"/>
+                            <a:ea typeface="宋体"/>
+                            <a:cs typeface="Times New Roman"/>
+                          </a:endParaRPr>
+                        </a:p>
+                      </a:txBody>
+                      <a:tcPr marL="68580" marR="68580" marT="0" marB="0" anchor="ctr"/>
+                    </a:tc>
+                    <a:tc>
+                      <a:txBody>
+                        <a:bodyPr/>
+                        <a:lstStyle/>
+                        <a:p>
+                          <a:pPr marL="0" marR="0" algn="ctr">
+                            <a:spcBef>
+                              <a:spcPts val="0"/>
+                            </a:spcBef>
+                            <a:spcAft>
+                              <a:spcPts val="0"/>
+                            </a:spcAft>
+                          </a:pPr>
+                          <a14:m>
+                            <m:oMathPara xmlns:m="http://schemas.openxmlformats.org/officeDocument/2006/math">
+                              <m:oMathParaPr>
+                                <m:jc m:val="centerGroup"/>
+                              </m:oMathParaPr>
+                              <m:oMath xmlns:m="http://schemas.openxmlformats.org/officeDocument/2006/math">
+                                <m:r>
+                                  <a:rPr lang="en-US" sz="1800">
+                                    <a:effectLst/>
+                                    <a:latin typeface="Cambria Math"/>
+                                  </a:rPr>
+                                  <m:t>[−</m:t>
+                                </m:r>
+                                <m:sSup>
+                                  <m:sSupPr>
+                                    <m:ctrlPr>
+                                      <a:rPr lang="en-US" sz="1800" i="1">
+                                        <a:effectLst/>
+                                        <a:latin typeface="Cambria Math" panose="02040503050406030204" pitchFamily="18" charset="0"/>
+                                      </a:rPr>
+                                    </m:ctrlPr>
+                                  </m:sSupPr>
+                                  <m:e>
+                                    <m:r>
+                                      <a:rPr lang="en-US" sz="1800">
+                                        <a:effectLst/>
+                                        <a:latin typeface="Cambria Math"/>
+                                      </a:rPr>
+                                      <m:t>2</m:t>
+                                    </m:r>
+                                  </m:e>
+                                  <m:sup>
+                                    <m:r>
+                                      <a:rPr lang="en-US" sz="1800">
+                                        <a:effectLst/>
+                                        <a:latin typeface="Cambria Math"/>
+                                      </a:rPr>
+                                      <m:t>𝑛</m:t>
+                                    </m:r>
+                                    <m:r>
+                                      <a:rPr lang="en-US" sz="1800">
+                                        <a:effectLst/>
+                                        <a:latin typeface="Cambria Math"/>
+                                      </a:rPr>
+                                      <m:t>−1</m:t>
+                                    </m:r>
+                                  </m:sup>
+                                </m:sSup>
+                                <m:r>
+                                  <a:rPr lang="en-US" sz="1800">
+                                    <a:effectLst/>
+                                    <a:latin typeface="Cambria Math"/>
+                                  </a:rPr>
+                                  <m:t>+1, </m:t>
+                                </m:r>
+                                <m:sSup>
+                                  <m:sSupPr>
+                                    <m:ctrlPr>
+                                      <a:rPr lang="en-US" sz="1800" i="1">
+                                        <a:effectLst/>
+                                        <a:latin typeface="Cambria Math" panose="02040503050406030204" pitchFamily="18" charset="0"/>
+                                      </a:rPr>
+                                    </m:ctrlPr>
+                                  </m:sSupPr>
+                                  <m:e>
+                                    <m:r>
+                                      <a:rPr lang="en-US" sz="1800">
+                                        <a:effectLst/>
+                                        <a:latin typeface="Cambria Math"/>
+                                      </a:rPr>
+                                      <m:t>2</m:t>
+                                    </m:r>
+                                  </m:e>
+                                  <m:sup>
+                                    <m:r>
+                                      <a:rPr lang="en-US" sz="1800">
+                                        <a:effectLst/>
+                                        <a:latin typeface="Cambria Math"/>
+                                      </a:rPr>
+                                      <m:t>𝑛</m:t>
+                                    </m:r>
+                                    <m:r>
+                                      <a:rPr lang="en-US" sz="1800">
+                                        <a:effectLst/>
+                                        <a:latin typeface="Cambria Math"/>
+                                      </a:rPr>
+                                      <m:t>−1</m:t>
+                                    </m:r>
+                                  </m:sup>
+                                </m:sSup>
+                                <m:r>
+                                  <a:rPr lang="en-US" sz="1800">
+                                    <a:effectLst/>
+                                    <a:latin typeface="Cambria Math"/>
+                                  </a:rPr>
+                                  <m:t>−1]</m:t>
+                                </m:r>
+                              </m:oMath>
+                            </m:oMathPara>
+                          </a14:m>
+                          <a:endParaRPr lang="en-US" sz="1800" dirty="0">
+                            <a:effectLst/>
+                            <a:latin typeface="Palatino Linotype"/>
+                            <a:ea typeface="宋体"/>
+                            <a:cs typeface="Times New Roman"/>
+                          </a:endParaRPr>
+                        </a:p>
+                      </a:txBody>
+                      <a:tcPr marL="68580" marR="68580" marT="0" marB="0" anchor="ctr"/>
+                    </a:tc>
+                    <a:tc>
+                      <a:txBody>
+                        <a:bodyPr/>
+                        <a:lstStyle/>
+                        <a:p>
+                          <a:pPr marL="0" marR="0" algn="ctr">
+                            <a:spcBef>
+                              <a:spcPts val="0"/>
+                            </a:spcBef>
+                            <a:spcAft>
+                              <a:spcPts val="0"/>
+                            </a:spcAft>
+                          </a:pPr>
+                          <a14:m>
+                            <m:oMathPara xmlns:m="http://schemas.openxmlformats.org/officeDocument/2006/math">
+                              <m:oMathParaPr>
+                                <m:jc m:val="centerGroup"/>
+                              </m:oMathParaPr>
+                              <m:oMath xmlns:m="http://schemas.openxmlformats.org/officeDocument/2006/math">
+                                <m:r>
+                                  <a:rPr lang="en-US" sz="1800">
+                                    <a:effectLst/>
+                                    <a:latin typeface="Cambria Math"/>
+                                  </a:rPr>
+                                  <m:t>[−</m:t>
+                                </m:r>
+                                <m:sSup>
+                                  <m:sSupPr>
+                                    <m:ctrlPr>
+                                      <a:rPr lang="en-US" sz="1800" i="1">
+                                        <a:effectLst/>
+                                        <a:latin typeface="Cambria Math" panose="02040503050406030204" pitchFamily="18" charset="0"/>
+                                      </a:rPr>
+                                    </m:ctrlPr>
+                                  </m:sSupPr>
+                                  <m:e>
+                                    <m:r>
+                                      <a:rPr lang="en-US" sz="1800">
+                                        <a:effectLst/>
+                                        <a:latin typeface="Cambria Math"/>
+                                      </a:rPr>
+                                      <m:t>2</m:t>
+                                    </m:r>
+                                  </m:e>
+                                  <m:sup>
+                                    <m:r>
+                                      <a:rPr lang="en-US" sz="1800">
+                                        <a:effectLst/>
+                                        <a:latin typeface="Cambria Math"/>
+                                      </a:rPr>
+                                      <m:t>𝑛</m:t>
+                                    </m:r>
+                                    <m:r>
+                                      <a:rPr lang="en-US" sz="1800">
+                                        <a:effectLst/>
+                                        <a:latin typeface="Cambria Math"/>
+                                      </a:rPr>
+                                      <m:t>−1</m:t>
+                                    </m:r>
+                                  </m:sup>
+                                </m:sSup>
+                                <m:r>
+                                  <a:rPr lang="en-US" sz="1800">
+                                    <a:effectLst/>
+                                    <a:latin typeface="Cambria Math"/>
+                                  </a:rPr>
+                                  <m:t>+1, </m:t>
+                                </m:r>
+                                <m:sSup>
+                                  <m:sSupPr>
+                                    <m:ctrlPr>
+                                      <a:rPr lang="en-US" sz="1800" i="1">
+                                        <a:effectLst/>
+                                        <a:latin typeface="Cambria Math" panose="02040503050406030204" pitchFamily="18" charset="0"/>
+                                      </a:rPr>
+                                    </m:ctrlPr>
+                                  </m:sSupPr>
+                                  <m:e>
+                                    <m:r>
+                                      <a:rPr lang="en-US" sz="1800">
+                                        <a:effectLst/>
+                                        <a:latin typeface="Cambria Math"/>
+                                      </a:rPr>
+                                      <m:t>2</m:t>
+                                    </m:r>
+                                  </m:e>
+                                  <m:sup>
+                                    <m:r>
+                                      <a:rPr lang="en-US" sz="1800">
+                                        <a:effectLst/>
+                                        <a:latin typeface="Cambria Math"/>
+                                      </a:rPr>
+                                      <m:t>𝑛</m:t>
+                                    </m:r>
+                                    <m:r>
+                                      <a:rPr lang="en-US" sz="1800">
+                                        <a:effectLst/>
+                                        <a:latin typeface="Cambria Math"/>
+                                      </a:rPr>
+                                      <m:t>−1</m:t>
+                                    </m:r>
+                                  </m:sup>
+                                </m:sSup>
+                                <m:r>
+                                  <a:rPr lang="en-US" sz="1800">
+                                    <a:effectLst/>
+                                    <a:latin typeface="Cambria Math"/>
+                                  </a:rPr>
+                                  <m:t>−1]</m:t>
+                                </m:r>
+                              </m:oMath>
+                            </m:oMathPara>
+                          </a14:m>
+                          <a:endParaRPr lang="en-US" sz="1800" dirty="0">
+                            <a:effectLst/>
+                            <a:latin typeface="Palatino Linotype"/>
+                            <a:ea typeface="宋体"/>
+                            <a:cs typeface="Times New Roman"/>
+                          </a:endParaRPr>
+                        </a:p>
+                      </a:txBody>
+                      <a:tcPr marL="68580" marR="68580" marT="0" marB="0" anchor="ctr"/>
+                    </a:tc>
+                    <a:tc>
+                      <a:txBody>
+                        <a:bodyPr/>
+                        <a:lstStyle/>
+                        <a:p>
+                          <a:pPr marL="0" marR="0" algn="ctr">
+                            <a:spcBef>
+                              <a:spcPts val="0"/>
+                            </a:spcBef>
+                            <a:spcAft>
+                              <a:spcPts val="0"/>
+                            </a:spcAft>
+                          </a:pPr>
+                          <a14:m>
+                            <m:oMathPara xmlns:m="http://schemas.openxmlformats.org/officeDocument/2006/math">
+                              <m:oMathParaPr>
+                                <m:jc m:val="centerGroup"/>
+                              </m:oMathParaPr>
+                              <m:oMath xmlns:m="http://schemas.openxmlformats.org/officeDocument/2006/math">
+                                <m:r>
+                                  <a:rPr lang="en-US" sz="1800">
+                                    <a:effectLst/>
+                                    <a:latin typeface="Cambria Math"/>
+                                  </a:rPr>
+                                  <m:t> [−</m:t>
+                                </m:r>
+                                <m:sSup>
+                                  <m:sSupPr>
+                                    <m:ctrlPr>
+                                      <a:rPr lang="en-US" sz="1800" i="1">
+                                        <a:effectLst/>
+                                        <a:latin typeface="Cambria Math" panose="02040503050406030204" pitchFamily="18" charset="0"/>
+                                      </a:rPr>
+                                    </m:ctrlPr>
+                                  </m:sSupPr>
+                                  <m:e>
+                                    <m:r>
+                                      <a:rPr lang="en-US" sz="1800">
+                                        <a:effectLst/>
+                                        <a:latin typeface="Cambria Math"/>
+                                      </a:rPr>
+                                      <m:t>2</m:t>
+                                    </m:r>
+                                  </m:e>
+                                  <m:sup>
+                                    <m:r>
+                                      <a:rPr lang="en-US" sz="1800">
+                                        <a:effectLst/>
+                                        <a:latin typeface="Cambria Math"/>
+                                      </a:rPr>
+                                      <m:t>𝑛</m:t>
+                                    </m:r>
+                                    <m:r>
+                                      <a:rPr lang="en-US" sz="1800">
+                                        <a:effectLst/>
+                                        <a:latin typeface="Cambria Math"/>
+                                      </a:rPr>
+                                      <m:t>−1</m:t>
+                                    </m:r>
+                                  </m:sup>
+                                </m:sSup>
+                                <m:r>
+                                  <a:rPr lang="en-US" sz="1800">
+                                    <a:effectLst/>
+                                    <a:latin typeface="Cambria Math"/>
+                                  </a:rPr>
+                                  <m:t>, </m:t>
+                                </m:r>
+                                <m:sSup>
+                                  <m:sSupPr>
+                                    <m:ctrlPr>
+                                      <a:rPr lang="en-US" sz="1800" i="1">
+                                        <a:effectLst/>
+                                        <a:latin typeface="Cambria Math" panose="02040503050406030204" pitchFamily="18" charset="0"/>
+                                      </a:rPr>
+                                    </m:ctrlPr>
+                                  </m:sSupPr>
+                                  <m:e>
+                                    <m:r>
+                                      <a:rPr lang="en-US" sz="1800">
+                                        <a:effectLst/>
+                                        <a:latin typeface="Cambria Math"/>
+                                      </a:rPr>
+                                      <m:t>2</m:t>
+                                    </m:r>
+                                  </m:e>
+                                  <m:sup>
+                                    <m:r>
+                                      <a:rPr lang="en-US" sz="1800">
+                                        <a:effectLst/>
+                                        <a:latin typeface="Cambria Math"/>
+                                      </a:rPr>
+                                      <m:t>𝑛</m:t>
+                                    </m:r>
+                                    <m:r>
+                                      <a:rPr lang="en-US" sz="1800">
+                                        <a:effectLst/>
+                                        <a:latin typeface="Cambria Math"/>
+                                      </a:rPr>
+                                      <m:t>−1</m:t>
+                                    </m:r>
+                                  </m:sup>
+                                </m:sSup>
+                                <m:r>
+                                  <a:rPr lang="en-US" sz="1800">
+                                    <a:effectLst/>
+                                    <a:latin typeface="Cambria Math"/>
+                                  </a:rPr>
+                                  <m:t>−1]</m:t>
+                                </m:r>
+                              </m:oMath>
+                            </m:oMathPara>
+                          </a14:m>
+                          <a:endParaRPr lang="en-US" sz="1800" dirty="0">
+                            <a:effectLst/>
+                            <a:latin typeface="Palatino Linotype"/>
+                            <a:ea typeface="宋体"/>
+                            <a:cs typeface="Times New Roman"/>
+                          </a:endParaRPr>
+                        </a:p>
+                      </a:txBody>
+                      <a:tcPr marL="68580" marR="68580" marT="0" marB="0" anchor="ctr"/>
+                    </a:tc>
+                    <a:extLst>
+                      <a:ext uri="{0D108BD9-81ED-4DB2-BD59-A6C34878D82A}">
+                        <a16:rowId xmlns:a16="http://schemas.microsoft.com/office/drawing/2014/main" val="10001"/>
+                      </a:ext>
+                    </a:extLst>
+                  </a:tr>
+                  <a:tr h="0">
+                    <a:tc>
+                      <a:txBody>
+                        <a:bodyPr/>
+                        <a:lstStyle/>
+                        <a:p>
+                          <a:pPr marL="0" marR="0" algn="ctr">
+                            <a:spcBef>
+                              <a:spcPts val="0"/>
+                            </a:spcBef>
+                            <a:spcAft>
+                              <a:spcPts val="0"/>
+                            </a:spcAft>
+                          </a:pPr>
+                          <a:r>
+                            <a:rPr lang="en-US" sz="1800">
+                              <a:effectLst/>
+                            </a:rPr>
+                            <a:t>Zero</a:t>
+                          </a:r>
+                          <a:endParaRPr lang="en-US" sz="1800">
+                            <a:effectLst/>
+                            <a:latin typeface="Palatino Linotype"/>
+                            <a:ea typeface="宋体"/>
+                            <a:cs typeface="Times New Roman"/>
+                          </a:endParaRPr>
+                        </a:p>
+                      </a:txBody>
+                      <a:tcPr marL="68580" marR="68580" marT="0" marB="0" anchor="ctr"/>
+                    </a:tc>
+                    <a:tc>
+                      <a:txBody>
+                        <a:bodyPr/>
+                        <a:lstStyle/>
+                        <a:p>
+                          <a:pPr marL="0" marR="0" algn="ctr">
+                            <a:spcBef>
+                              <a:spcPts val="0"/>
+                            </a:spcBef>
+                            <a:spcAft>
+                              <a:spcPts val="0"/>
+                            </a:spcAft>
+                          </a:pPr>
+                          <a:r>
+                            <a:rPr lang="en-US" sz="1800" dirty="0">
+                              <a:effectLst/>
+                            </a:rPr>
+                            <a:t>Two zeroes (</a:t>
+                          </a:r>
+                          <a14:m>
+                            <m:oMath xmlns:m="http://schemas.openxmlformats.org/officeDocument/2006/math">
+                              <m:r>
+                                <a:rPr lang="en-US" sz="1800">
+                                  <a:effectLst/>
+                                  <a:latin typeface="Cambria Math"/>
+                                </a:rPr>
+                                <m:t>±0</m:t>
+                              </m:r>
+                            </m:oMath>
+                          </a14:m>
+                          <a:r>
+                            <a:rPr lang="en-US" sz="1800" dirty="0">
+                              <a:effectLst/>
+                            </a:rPr>
+                            <a:t>)</a:t>
+                          </a:r>
+                          <a:endParaRPr lang="en-US" sz="1800" dirty="0">
+                            <a:effectLst/>
+                            <a:latin typeface="Palatino Linotype"/>
+                            <a:ea typeface="宋体"/>
+                            <a:cs typeface="Times New Roman"/>
+                          </a:endParaRPr>
+                        </a:p>
+                      </a:txBody>
+                      <a:tcPr marL="68580" marR="68580" marT="0" marB="0" anchor="ctr"/>
+                    </a:tc>
+                    <a:tc>
+                      <a:txBody>
+                        <a:bodyPr/>
+                        <a:lstStyle/>
+                        <a:p>
+                          <a:pPr marL="0" marR="0" algn="ctr">
+                            <a:spcBef>
+                              <a:spcPts val="0"/>
+                            </a:spcBef>
+                            <a:spcAft>
+                              <a:spcPts val="0"/>
+                            </a:spcAft>
+                          </a:pPr>
+                          <a:r>
+                            <a:rPr lang="en-US" sz="1800">
+                              <a:effectLst/>
+                            </a:rPr>
+                            <a:t>Two zeroes (</a:t>
+                          </a:r>
+                          <a14:m>
+                            <m:oMath xmlns:m="http://schemas.openxmlformats.org/officeDocument/2006/math">
+                              <m:r>
+                                <a:rPr lang="en-US" sz="1800">
+                                  <a:effectLst/>
+                                  <a:latin typeface="Cambria Math"/>
+                                </a:rPr>
+                                <m:t>±0</m:t>
+                              </m:r>
+                            </m:oMath>
+                          </a14:m>
+                          <a:r>
+                            <a:rPr lang="en-US" sz="1800">
+                              <a:effectLst/>
+                            </a:rPr>
+                            <a:t>)</a:t>
+                          </a:r>
+                          <a:endParaRPr lang="en-US" sz="1800">
+                            <a:effectLst/>
+                            <a:latin typeface="Palatino Linotype"/>
+                            <a:ea typeface="宋体"/>
+                            <a:cs typeface="Times New Roman"/>
+                          </a:endParaRPr>
+                        </a:p>
+                      </a:txBody>
+                      <a:tcPr marL="68580" marR="68580" marT="0" marB="0" anchor="ctr"/>
+                    </a:tc>
+                    <a:tc>
+                      <a:txBody>
+                        <a:bodyPr/>
+                        <a:lstStyle/>
+                        <a:p>
+                          <a:pPr marL="0" marR="0" algn="ctr">
+                            <a:spcBef>
+                              <a:spcPts val="0"/>
+                            </a:spcBef>
+                            <a:spcAft>
+                              <a:spcPts val="0"/>
+                            </a:spcAft>
+                          </a:pPr>
+                          <a:r>
+                            <a:rPr lang="en-US" sz="1800">
+                              <a:effectLst/>
+                            </a:rPr>
+                            <a:t>One zero</a:t>
+                          </a:r>
+                          <a:endParaRPr lang="en-US" sz="1800">
+                            <a:effectLst/>
+                            <a:latin typeface="Palatino Linotype"/>
+                            <a:ea typeface="宋体"/>
+                            <a:cs typeface="Times New Roman"/>
+                          </a:endParaRPr>
+                        </a:p>
+                      </a:txBody>
+                      <a:tcPr marL="68580" marR="68580" marT="0" marB="0" anchor="ctr"/>
+                    </a:tc>
+                    <a:extLst>
+                      <a:ext uri="{0D108BD9-81ED-4DB2-BD59-A6C34878D82A}">
+                        <a16:rowId xmlns:a16="http://schemas.microsoft.com/office/drawing/2014/main" val="10002"/>
+                      </a:ext>
+                    </a:extLst>
+                  </a:tr>
+                  <a:tr h="0">
+                    <a:tc>
+                      <a:txBody>
+                        <a:bodyPr/>
+                        <a:lstStyle/>
+                        <a:p>
+                          <a:pPr marL="0" marR="0" algn="ctr">
+                            <a:spcBef>
+                              <a:spcPts val="0"/>
+                            </a:spcBef>
+                            <a:spcAft>
+                              <a:spcPts val="0"/>
+                            </a:spcAft>
+                          </a:pPr>
+                          <a:r>
+                            <a:rPr lang="en-US" sz="1800">
+                              <a:effectLst/>
+                            </a:rPr>
+                            <a:t>Unique Numbers</a:t>
+                          </a:r>
+                          <a:endParaRPr lang="en-US" sz="1800">
+                            <a:effectLst/>
+                            <a:latin typeface="Palatino Linotype"/>
+                            <a:ea typeface="宋体"/>
+                            <a:cs typeface="Times New Roman"/>
+                          </a:endParaRPr>
+                        </a:p>
+                      </a:txBody>
+                      <a:tcPr marL="68580" marR="68580" marT="0" marB="0" anchor="ctr"/>
+                    </a:tc>
+                    <a:tc>
+                      <a:txBody>
+                        <a:bodyPr/>
+                        <a:lstStyle/>
+                        <a:p>
+                          <a:pPr marL="0" marR="0" algn="ctr">
+                            <a:spcBef>
+                              <a:spcPts val="0"/>
+                            </a:spcBef>
+                            <a:spcAft>
+                              <a:spcPts val="0"/>
+                            </a:spcAft>
+                          </a:pPr>
+                          <a14:m>
+                            <m:oMathPara xmlns:m="http://schemas.openxmlformats.org/officeDocument/2006/math">
+                              <m:oMathParaPr>
+                                <m:jc m:val="centerGroup"/>
+                              </m:oMathParaPr>
+                              <m:oMath xmlns:m="http://schemas.openxmlformats.org/officeDocument/2006/math">
+                                <m:sSup>
+                                  <m:sSupPr>
+                                    <m:ctrlPr>
+                                      <a:rPr lang="en-US" sz="1800" i="1">
+                                        <a:effectLst/>
+                                        <a:latin typeface="Cambria Math" panose="02040503050406030204" pitchFamily="18" charset="0"/>
+                                      </a:rPr>
+                                    </m:ctrlPr>
+                                  </m:sSupPr>
+                                  <m:e>
+                                    <m:r>
+                                      <a:rPr lang="en-US" sz="1800">
+                                        <a:effectLst/>
+                                        <a:latin typeface="Cambria Math"/>
+                                      </a:rPr>
+                                      <m:t>2</m:t>
+                                    </m:r>
+                                  </m:e>
+                                  <m:sup>
+                                    <m:r>
+                                      <a:rPr lang="en-US" sz="1800">
+                                        <a:effectLst/>
+                                        <a:latin typeface="Cambria Math"/>
+                                      </a:rPr>
+                                      <m:t>𝑛</m:t>
+                                    </m:r>
+                                  </m:sup>
+                                </m:sSup>
+                                <m:r>
+                                  <a:rPr lang="en-US" sz="1800">
+                                    <a:effectLst/>
+                                    <a:latin typeface="Cambria Math"/>
+                                  </a:rPr>
+                                  <m:t>−1</m:t>
+                                </m:r>
+                              </m:oMath>
+                            </m:oMathPara>
+                          </a14:m>
+                          <a:endParaRPr lang="en-US" sz="1800" dirty="0">
+                            <a:effectLst/>
+                            <a:latin typeface="Palatino Linotype"/>
+                            <a:ea typeface="宋体"/>
+                            <a:cs typeface="Times New Roman"/>
+                          </a:endParaRPr>
+                        </a:p>
+                      </a:txBody>
+                      <a:tcPr marL="68580" marR="68580" marT="0" marB="0" anchor="ctr"/>
+                    </a:tc>
+                    <a:tc>
+                      <a:txBody>
+                        <a:bodyPr/>
+                        <a:lstStyle/>
+                        <a:p>
+                          <a:pPr marL="0" marR="0" algn="ctr">
+                            <a:spcBef>
+                              <a:spcPts val="0"/>
+                            </a:spcBef>
+                            <a:spcAft>
+                              <a:spcPts val="0"/>
+                            </a:spcAft>
+                          </a:pPr>
+                          <a14:m>
+                            <m:oMathPara xmlns:m="http://schemas.openxmlformats.org/officeDocument/2006/math">
+                              <m:oMathParaPr>
+                                <m:jc m:val="centerGroup"/>
+                              </m:oMathParaPr>
+                              <m:oMath xmlns:m="http://schemas.openxmlformats.org/officeDocument/2006/math">
+                                <m:sSup>
+                                  <m:sSupPr>
+                                    <m:ctrlPr>
+                                      <a:rPr lang="en-US" sz="1800" i="1">
+                                        <a:effectLst/>
+                                        <a:latin typeface="Cambria Math" panose="02040503050406030204" pitchFamily="18" charset="0"/>
+                                      </a:rPr>
+                                    </m:ctrlPr>
+                                  </m:sSupPr>
+                                  <m:e>
+                                    <m:r>
+                                      <a:rPr lang="en-US" sz="1800">
+                                        <a:effectLst/>
+                                        <a:latin typeface="Cambria Math"/>
+                                      </a:rPr>
+                                      <m:t>2</m:t>
+                                    </m:r>
+                                  </m:e>
+                                  <m:sup>
+                                    <m:r>
+                                      <a:rPr lang="en-US" sz="1800">
+                                        <a:effectLst/>
+                                        <a:latin typeface="Cambria Math"/>
+                                      </a:rPr>
+                                      <m:t>𝑛</m:t>
+                                    </m:r>
+                                  </m:sup>
+                                </m:sSup>
+                                <m:r>
+                                  <a:rPr lang="en-US" sz="1800">
+                                    <a:effectLst/>
+                                    <a:latin typeface="Cambria Math"/>
+                                  </a:rPr>
+                                  <m:t>−1</m:t>
+                                </m:r>
+                              </m:oMath>
+                            </m:oMathPara>
+                          </a14:m>
+                          <a:endParaRPr lang="en-US" sz="1800" dirty="0">
+                            <a:effectLst/>
+                            <a:latin typeface="Palatino Linotype"/>
+                            <a:ea typeface="宋体"/>
+                            <a:cs typeface="Times New Roman"/>
+                          </a:endParaRPr>
+                        </a:p>
+                      </a:txBody>
+                      <a:tcPr marL="68580" marR="68580" marT="0" marB="0" anchor="ctr"/>
+                    </a:tc>
+                    <a:tc>
+                      <a:txBody>
+                        <a:bodyPr/>
+                        <a:lstStyle/>
+                        <a:p>
+                          <a:pPr marL="0" marR="0" algn="ctr">
+                            <a:spcBef>
+                              <a:spcPts val="0"/>
+                            </a:spcBef>
+                            <a:spcAft>
+                              <a:spcPts val="0"/>
+                            </a:spcAft>
+                          </a:pPr>
+                          <a14:m>
+                            <m:oMathPara xmlns:m="http://schemas.openxmlformats.org/officeDocument/2006/math">
+                              <m:oMathParaPr>
+                                <m:jc m:val="centerGroup"/>
+                              </m:oMathParaPr>
+                              <m:oMath xmlns:m="http://schemas.openxmlformats.org/officeDocument/2006/math">
+                                <m:sSup>
+                                  <m:sSupPr>
+                                    <m:ctrlPr>
+                                      <a:rPr lang="en-US" sz="1800" i="1">
+                                        <a:effectLst/>
+                                        <a:latin typeface="Cambria Math" panose="02040503050406030204" pitchFamily="18" charset="0"/>
+                                      </a:rPr>
+                                    </m:ctrlPr>
+                                  </m:sSupPr>
+                                  <m:e>
+                                    <m:r>
+                                      <a:rPr lang="en-US" sz="1800">
+                                        <a:effectLst/>
+                                        <a:latin typeface="Cambria Math"/>
+                                      </a:rPr>
+                                      <m:t>2</m:t>
+                                    </m:r>
+                                  </m:e>
+                                  <m:sup>
+                                    <m:r>
+                                      <a:rPr lang="en-US" sz="1800">
+                                        <a:effectLst/>
+                                        <a:latin typeface="Cambria Math"/>
+                                      </a:rPr>
+                                      <m:t>𝑛</m:t>
+                                    </m:r>
+                                  </m:sup>
+                                </m:sSup>
+                              </m:oMath>
+                            </m:oMathPara>
+                          </a14:m>
+                          <a:endParaRPr lang="en-US" sz="1800" dirty="0">
+                            <a:effectLst/>
+                            <a:latin typeface="Palatino Linotype"/>
+                            <a:ea typeface="宋体"/>
+                            <a:cs typeface="Times New Roman"/>
+                          </a:endParaRPr>
+                        </a:p>
+                      </a:txBody>
+                      <a:tcPr marL="68580" marR="68580" marT="0" marB="0" anchor="ctr"/>
+                    </a:tc>
+                    <a:extLst>
+                      <a:ext uri="{0D108BD9-81ED-4DB2-BD59-A6C34878D82A}">
+                        <a16:rowId xmlns:a16="http://schemas.microsoft.com/office/drawing/2014/main" val="10003"/>
+                      </a:ext>
+                    </a:extLst>
+                  </a:tr>
+                </a:tbl>
+              </a:graphicData>
+            </a:graphic>
+          </p:graphicFrame>
+        </mc:Choice>
+        <mc:Fallback xmlns="">
+          <p:graphicFrame>
+            <p:nvGraphicFramePr>
+              <p:cNvPr id="3" name="Table 2"/>
+              <p:cNvGraphicFramePr>
+                <a:graphicFrameLocks noGrp="1"/>
+              </p:cNvGraphicFramePr>
+              <p:nvPr>
+                <p:extLst>
+                  <p:ext uri="{D42A27DB-BD31-4B8C-83A1-F6EECF244321}">
+                    <p14:modId xmlns:p14="http://schemas.microsoft.com/office/powerpoint/2010/main" val="2713996848"/>
+                  </p:ext>
+                </p:extLst>
+              </p:nvPr>
+            </p:nvGraphicFramePr>
+            <p:xfrm>
+              <a:off x="228600" y="4267200"/>
+              <a:ext cx="8763001" cy="1813560"/>
+            </p:xfrm>
+            <a:graphic>
+              <a:graphicData uri="http://schemas.openxmlformats.org/drawingml/2006/table">
+                <a:tbl>
+                  <a:tblPr firstRow="1" firstCol="1" bandRow="1">
+                    <a:tableStyleId>{5C22544A-7EE6-4342-B048-85BDC9FD1C3A}</a:tableStyleId>
+                  </a:tblPr>
+                  <a:tblGrid>
+                    <a:gridCol w="1447800"/>
+                    <a:gridCol w="2667000"/>
+                    <a:gridCol w="2590800"/>
+                    <a:gridCol w="2057401"/>
+                  </a:tblGrid>
+                  <a:tr h="548640">
+                    <a:tc>
+                      <a:txBody>
+                        <a:bodyPr/>
+                        <a:lstStyle/>
+                        <a:p>
+                          <a:pPr marL="0" marR="0" algn="just">
+                            <a:spcBef>
+                              <a:spcPts val="0"/>
+                            </a:spcBef>
+                            <a:spcAft>
+                              <a:spcPts val="0"/>
+                            </a:spcAft>
+                          </a:pPr>
+                          <a:r>
+                            <a:rPr lang="en-US" sz="1800" dirty="0">
+                              <a:effectLst/>
+                            </a:rPr>
+                            <a:t> </a:t>
+                          </a:r>
+                          <a:endParaRPr lang="en-US" sz="1800" dirty="0">
+                            <a:effectLst/>
+                            <a:latin typeface="Palatino Linotype"/>
+                            <a:ea typeface="宋体"/>
+                            <a:cs typeface="Times New Roman"/>
+                          </a:endParaRPr>
+                        </a:p>
+                      </a:txBody>
+                      <a:tcPr marL="68580" marR="68580" marT="0" marB="0" anchor="ctr"/>
+                    </a:tc>
+                    <a:tc>
+                      <a:txBody>
+                        <a:bodyPr/>
+                        <a:lstStyle/>
+                        <a:p>
+                          <a:pPr marL="0" marR="0" algn="ctr">
+                            <a:spcBef>
+                              <a:spcPts val="0"/>
+                            </a:spcBef>
+                            <a:spcAft>
+                              <a:spcPts val="0"/>
+                            </a:spcAft>
+                          </a:pPr>
+                          <a:r>
+                            <a:rPr lang="en-US" sz="1800">
+                              <a:effectLst/>
+                            </a:rPr>
+                            <a:t>Sign-and-Magnitude</a:t>
+                          </a:r>
+                          <a:endParaRPr lang="en-US" sz="1800">
+                            <a:effectLst/>
+                            <a:latin typeface="Palatino Linotype"/>
+                            <a:ea typeface="宋体"/>
+                            <a:cs typeface="Times New Roman"/>
+                          </a:endParaRPr>
+                        </a:p>
+                      </a:txBody>
+                      <a:tcPr marL="68580" marR="68580" marT="0" marB="0" anchor="ctr"/>
+                    </a:tc>
+                    <a:tc>
+                      <a:txBody>
+                        <a:bodyPr/>
+                        <a:lstStyle/>
+                        <a:p>
+                          <a:pPr marL="0" marR="0" algn="ctr">
+                            <a:spcBef>
+                              <a:spcPts val="0"/>
+                            </a:spcBef>
+                            <a:spcAft>
+                              <a:spcPts val="0"/>
+                            </a:spcAft>
+                          </a:pPr>
+                          <a:r>
+                            <a:rPr lang="en-US" sz="1800" dirty="0">
+                              <a:effectLst/>
+                            </a:rPr>
+                            <a:t>One’s </a:t>
+                          </a:r>
+                          <a:endParaRPr lang="en-US" sz="1800" dirty="0" smtClean="0">
+                            <a:effectLst/>
+                          </a:endParaRPr>
+                        </a:p>
+                        <a:p>
+                          <a:pPr marL="0" marR="0" algn="ctr">
+                            <a:spcBef>
+                              <a:spcPts val="0"/>
+                            </a:spcBef>
+                            <a:spcAft>
+                              <a:spcPts val="0"/>
+                            </a:spcAft>
+                          </a:pPr>
+                          <a:r>
+                            <a:rPr lang="en-US" sz="1800" dirty="0" smtClean="0">
+                              <a:effectLst/>
+                            </a:rPr>
+                            <a:t>Complement</a:t>
+                          </a:r>
+                          <a:endParaRPr lang="en-US" sz="1800" dirty="0">
+                            <a:effectLst/>
+                            <a:latin typeface="Palatino Linotype"/>
+                            <a:ea typeface="宋体"/>
+                            <a:cs typeface="Times New Roman"/>
+                          </a:endParaRPr>
+                        </a:p>
+                      </a:txBody>
+                      <a:tcPr marL="68580" marR="68580" marT="0" marB="0" anchor="ctr"/>
+                    </a:tc>
+                    <a:tc>
+                      <a:txBody>
+                        <a:bodyPr/>
+                        <a:lstStyle/>
+                        <a:p>
+                          <a:pPr marL="0" marR="0" algn="ctr">
+                            <a:spcBef>
+                              <a:spcPts val="0"/>
+                            </a:spcBef>
+                            <a:spcAft>
+                              <a:spcPts val="0"/>
+                            </a:spcAft>
+                          </a:pPr>
+                          <a:r>
+                            <a:rPr lang="en-US" sz="1800">
+                              <a:effectLst/>
+                            </a:rPr>
+                            <a:t>Two’s Complement</a:t>
+                          </a:r>
+                          <a:endParaRPr lang="en-US" sz="1800">
+                            <a:effectLst/>
+                            <a:latin typeface="Palatino Linotype"/>
+                            <a:ea typeface="宋体"/>
+                            <a:cs typeface="Times New Roman"/>
+                          </a:endParaRPr>
+                        </a:p>
+                      </a:txBody>
+                      <a:tcPr marL="68580" marR="68580" marT="0" marB="0" anchor="ctr"/>
+                    </a:tc>
+                  </a:tr>
+                  <a:tr h="441960">
+                    <a:tc>
+                      <a:txBody>
+                        <a:bodyPr/>
+                        <a:lstStyle/>
+                        <a:p>
+                          <a:pPr marL="0" marR="0" algn="ctr">
+                            <a:spcBef>
+                              <a:spcPts val="0"/>
+                            </a:spcBef>
+                            <a:spcAft>
+                              <a:spcPts val="0"/>
+                            </a:spcAft>
+                          </a:pPr>
+                          <a:r>
+                            <a:rPr lang="en-US" sz="1800" dirty="0">
+                              <a:effectLst/>
+                            </a:rPr>
+                            <a:t>Range</a:t>
+                          </a:r>
+                          <a:endParaRPr lang="en-US" sz="1800" dirty="0">
+                            <a:effectLst/>
+                            <a:latin typeface="Palatino Linotype"/>
+                            <a:ea typeface="宋体"/>
+                            <a:cs typeface="Times New Roman"/>
+                          </a:endParaRPr>
+                        </a:p>
+                      </a:txBody>
+                      <a:tcPr marL="68580" marR="68580" marT="0" marB="0" anchor="ctr"/>
+                    </a:tc>
+                    <a:tc>
+                      <a:txBody>
+                        <a:bodyPr/>
+                        <a:lstStyle/>
+                        <a:p>
+                          <a:endParaRPr lang="en-US"/>
+                        </a:p>
+                      </a:txBody>
+                      <a:tcPr marL="68580" marR="68580" marT="0" marB="0" anchor="ctr">
+                        <a:blipFill rotWithShape="1">
+                          <a:blip r:embed="rId4"/>
+                          <a:stretch>
+                            <a:fillRect l="-54338" t="-139726" r="-173973" b="-215068"/>
+                          </a:stretch>
+                        </a:blipFill>
+                      </a:tcPr>
+                    </a:tc>
+                    <a:tc>
+                      <a:txBody>
+                        <a:bodyPr/>
+                        <a:lstStyle/>
+                        <a:p>
+                          <a:endParaRPr lang="en-US"/>
+                        </a:p>
+                      </a:txBody>
+                      <a:tcPr marL="68580" marR="68580" marT="0" marB="0" anchor="ctr">
+                        <a:blipFill rotWithShape="1">
+                          <a:blip r:embed="rId4"/>
+                          <a:stretch>
+                            <a:fillRect l="-159059" t="-139726" r="-79294" b="-215068"/>
+                          </a:stretch>
+                        </a:blipFill>
+                      </a:tcPr>
+                    </a:tc>
+                    <a:tc>
+                      <a:txBody>
+                        <a:bodyPr/>
+                        <a:lstStyle/>
+                        <a:p>
+                          <a:endParaRPr lang="en-US"/>
+                        </a:p>
+                      </a:txBody>
+                      <a:tcPr marL="68580" marR="68580" marT="0" marB="0" anchor="ctr">
+                        <a:blipFill rotWithShape="1">
+                          <a:blip r:embed="rId4"/>
+                          <a:stretch>
+                            <a:fillRect l="-326706" t="-139726" b="-215068"/>
+                          </a:stretch>
+                        </a:blipFill>
+                      </a:tcPr>
+                    </a:tc>
+                  </a:tr>
+                  <a:tr h="274320">
+                    <a:tc>
+                      <a:txBody>
+                        <a:bodyPr/>
+                        <a:lstStyle/>
+                        <a:p>
+                          <a:pPr marL="0" marR="0" algn="ctr">
+                            <a:spcBef>
+                              <a:spcPts val="0"/>
+                            </a:spcBef>
+                            <a:spcAft>
+                              <a:spcPts val="0"/>
+                            </a:spcAft>
+                          </a:pPr>
+                          <a:r>
+                            <a:rPr lang="en-US" sz="1800">
+                              <a:effectLst/>
+                            </a:rPr>
+                            <a:t>Zero</a:t>
+                          </a:r>
+                          <a:endParaRPr lang="en-US" sz="1800">
+                            <a:effectLst/>
+                            <a:latin typeface="Palatino Linotype"/>
+                            <a:ea typeface="宋体"/>
+                            <a:cs typeface="Times New Roman"/>
+                          </a:endParaRPr>
+                        </a:p>
+                      </a:txBody>
+                      <a:tcPr marL="68580" marR="68580" marT="0" marB="0" anchor="ctr"/>
+                    </a:tc>
+                    <a:tc>
+                      <a:txBody>
+                        <a:bodyPr/>
+                        <a:lstStyle/>
+                        <a:p>
+                          <a:endParaRPr lang="en-US"/>
+                        </a:p>
+                      </a:txBody>
+                      <a:tcPr marL="68580" marR="68580" marT="0" marB="0" anchor="ctr">
+                        <a:blipFill rotWithShape="1">
+                          <a:blip r:embed="rId4"/>
+                          <a:stretch>
+                            <a:fillRect l="-54338" t="-388889" r="-173973" b="-248889"/>
+                          </a:stretch>
+                        </a:blipFill>
+                      </a:tcPr>
+                    </a:tc>
+                    <a:tc>
+                      <a:txBody>
+                        <a:bodyPr/>
+                        <a:lstStyle/>
+                        <a:p>
+                          <a:endParaRPr lang="en-US"/>
+                        </a:p>
+                      </a:txBody>
+                      <a:tcPr marL="68580" marR="68580" marT="0" marB="0" anchor="ctr">
+                        <a:blipFill rotWithShape="1">
+                          <a:blip r:embed="rId4"/>
+                          <a:stretch>
+                            <a:fillRect l="-159059" t="-388889" r="-79294" b="-248889"/>
+                          </a:stretch>
+                        </a:blipFill>
+                      </a:tcPr>
+                    </a:tc>
+                    <a:tc>
+                      <a:txBody>
+                        <a:bodyPr/>
+                        <a:lstStyle/>
+                        <a:p>
+                          <a:pPr marL="0" marR="0" algn="ctr">
+                            <a:spcBef>
+                              <a:spcPts val="0"/>
+                            </a:spcBef>
+                            <a:spcAft>
+                              <a:spcPts val="0"/>
+                            </a:spcAft>
+                          </a:pPr>
+                          <a:r>
+                            <a:rPr lang="en-US" sz="1800">
+                              <a:effectLst/>
+                            </a:rPr>
+                            <a:t>One zero</a:t>
+                          </a:r>
+                          <a:endParaRPr lang="en-US" sz="1800">
+                            <a:effectLst/>
+                            <a:latin typeface="Palatino Linotype"/>
+                            <a:ea typeface="宋体"/>
+                            <a:cs typeface="Times New Roman"/>
+                          </a:endParaRPr>
+                        </a:p>
+                      </a:txBody>
+                      <a:tcPr marL="68580" marR="68580" marT="0" marB="0" anchor="ctr"/>
+                    </a:tc>
+                  </a:tr>
+                  <a:tr h="548640">
+                    <a:tc>
+                      <a:txBody>
+                        <a:bodyPr/>
+                        <a:lstStyle/>
+                        <a:p>
+                          <a:pPr marL="0" marR="0" algn="ctr">
+                            <a:spcBef>
+                              <a:spcPts val="0"/>
+                            </a:spcBef>
+                            <a:spcAft>
+                              <a:spcPts val="0"/>
+                            </a:spcAft>
+                          </a:pPr>
+                          <a:r>
+                            <a:rPr lang="en-US" sz="1800">
+                              <a:effectLst/>
+                            </a:rPr>
+                            <a:t>Unique Numbers</a:t>
+                          </a:r>
+                          <a:endParaRPr lang="en-US" sz="1800">
+                            <a:effectLst/>
+                            <a:latin typeface="Palatino Linotype"/>
+                            <a:ea typeface="宋体"/>
+                            <a:cs typeface="Times New Roman"/>
+                          </a:endParaRPr>
+                        </a:p>
+                      </a:txBody>
+                      <a:tcPr marL="68580" marR="68580" marT="0" marB="0" anchor="ctr"/>
+                    </a:tc>
+                    <a:tc>
+                      <a:txBody>
+                        <a:bodyPr/>
+                        <a:lstStyle/>
+                        <a:p>
+                          <a:endParaRPr lang="en-US"/>
+                        </a:p>
+                      </a:txBody>
+                      <a:tcPr marL="68580" marR="68580" marT="0" marB="0" anchor="ctr">
+                        <a:blipFill rotWithShape="1">
+                          <a:blip r:embed="rId4"/>
+                          <a:stretch>
+                            <a:fillRect l="-54338" t="-244444" r="-173973" b="-24444"/>
+                          </a:stretch>
+                        </a:blipFill>
+                      </a:tcPr>
+                    </a:tc>
+                    <a:tc>
+                      <a:txBody>
+                        <a:bodyPr/>
+                        <a:lstStyle/>
+                        <a:p>
+                          <a:endParaRPr lang="en-US"/>
+                        </a:p>
+                      </a:txBody>
+                      <a:tcPr marL="68580" marR="68580" marT="0" marB="0" anchor="ctr">
+                        <a:blipFill rotWithShape="1">
+                          <a:blip r:embed="rId4"/>
+                          <a:stretch>
+                            <a:fillRect l="-159059" t="-244444" r="-79294" b="-24444"/>
+                          </a:stretch>
+                        </a:blipFill>
+                      </a:tcPr>
+                    </a:tc>
+                    <a:tc>
+                      <a:txBody>
+                        <a:bodyPr/>
+                        <a:lstStyle/>
+                        <a:p>
+                          <a:endParaRPr lang="en-US"/>
+                        </a:p>
+                      </a:txBody>
+                      <a:tcPr marL="68580" marR="68580" marT="0" marB="0" anchor="ctr">
+                        <a:blipFill rotWithShape="1">
+                          <a:blip r:embed="rId4"/>
+                          <a:stretch>
+                            <a:fillRect l="-326706" t="-244444" b="-24444"/>
+                          </a:stretch>
+                        </a:blipFill>
+                      </a:tcPr>
+                    </a:tc>
+                  </a:tr>
+                </a:tbl>
+              </a:graphicData>
+            </a:graphic>
+          </p:graphicFrame>
+        </mc:Fallback>
+      </mc:AlternateContent>
+      <p:sp>
+        <p:nvSpPr>
+          <p:cNvPr id="6" name="Horizontal Scroll 5"/>
+          <p:cNvSpPr/>
+          <p:nvPr/>
+        </p:nvSpPr>
+        <p:spPr>
+          <a:xfrm>
+            <a:off x="294068" y="178297"/>
+            <a:ext cx="1265712" cy="762000"/>
+          </a:xfrm>
+          <a:prstGeom prst="horizontalScroll">
+            <a:avLst/>
+          </a:prstGeom>
+          <a:gradFill rotWithShape="1">
+            <a:gsLst>
+              <a:gs pos="0">
+                <a:srgbClr val="4F81BD">
+                  <a:tint val="50000"/>
+                  <a:satMod val="300000"/>
+                </a:srgbClr>
+              </a:gs>
+              <a:gs pos="35000">
+                <a:srgbClr val="4F81BD">
+                  <a:tint val="37000"/>
+                  <a:satMod val="300000"/>
+                </a:srgbClr>
+              </a:gs>
+              <a:gs pos="100000">
+                <a:srgbClr val="4F81BD">
+                  <a:tint val="15000"/>
+                  <a:satMod val="350000"/>
+                </a:srgbClr>
+              </a:gs>
+            </a:gsLst>
+            <a:lin ang="16200000" scaled="1"/>
+          </a:gradFill>
+          <a:ln w="9525" cap="flat" cmpd="sng" algn="ctr">
+            <a:solidFill>
+              <a:srgbClr val="4F81BD">
+                <a:shade val="95000"/>
+                <a:satMod val="105000"/>
+              </a:srgbClr>
+            </a:solidFill>
+            <a:prstDash val="solid"/>
+          </a:ln>
+          <a:effectLst>
+            <a:outerShdw blurRad="40000" dist="20000" dir="5400000" rotWithShape="0">
+              <a:srgbClr val="000000">
+                <a:alpha val="38000"/>
+              </a:srgbClr>
+            </a:outerShdw>
+          </a:effectLst>
+        </p:spPr>
+        <p:txBody>
+          <a:bodyPr rtlCol="0" anchor="ctr"/>
+          <a:lstStyle/>
+          <a:p>
+            <a:pPr marL="0" marR="0" lvl="0" indent="0" algn="ctr" defTabSz="457200" eaLnBrk="1" fontAlgn="auto" latinLnBrk="0" hangingPunct="1">
+              <a:lnSpc>
+                <a:spcPct val="100000"/>
+              </a:lnSpc>
+              <a:spcBef>
+                <a:spcPts val="0"/>
+              </a:spcBef>
+              <a:spcAft>
+                <a:spcPts val="0"/>
+              </a:spcAft>
+              <a:buClrTx/>
+              <a:buSzTx/>
+              <a:buFontTx/>
+              <a:buNone/>
+              <a:tabLst/>
+              <a:defRPr/>
+            </a:pPr>
+            <a:r>
+              <a:rPr kumimoji="0" lang="en-US" sz="2400" b="0" i="0" u="none" strike="noStrike" kern="0" cap="none" spc="0" normalizeH="0" baseline="0" noProof="0" dirty="0">
+                <a:ln>
+                  <a:noFill/>
+                </a:ln>
+                <a:solidFill>
+                  <a:prstClr val="black"/>
+                </a:solidFill>
+                <a:effectLst/>
+                <a:uLnTx/>
+                <a:uFillTx/>
+                <a:latin typeface="Calibri"/>
+                <a:ea typeface="+mn-ea"/>
+                <a:cs typeface="+mn-cs"/>
+              </a:rPr>
+              <a:t>Review</a:t>
+            </a:r>
+          </a:p>
+        </p:txBody>
+      </p:sp>
+    </p:spTree>
+    <p:extLst>
+      <p:ext uri="{BB962C8B-B14F-4D97-AF65-F5344CB8AC3E}">
+        <p14:creationId xmlns:p14="http://schemas.microsoft.com/office/powerpoint/2010/main" val="2697262119"/>
+      </p:ext>
+    </p:extLst>
+  </p:cSld>
+  <p:clrMapOvr>
+    <a:masterClrMapping/>
+  </p:clrMapOvr>
+</p:sld>
+</file>
+
+<file path=ppt/slides/slide7.xml><?xml version="1.0" encoding="utf-8"?>
+<p:sld xmlns:a="http://schemas.openxmlformats.org/drawingml/2006/main" xmlns:r="http://schemas.openxmlformats.org/officeDocument/2006/relationships" xmlns:p="http://schemas.openxmlformats.org/presentationml/2006/main">
+  <p:cSld>
+    <p:spTree>
+      <p:nvGrpSpPr>
+        <p:cNvPr id="1" name=""/>
+        <p:cNvGrpSpPr/>
+        <p:nvPr/>
+      </p:nvGrpSpPr>
+      <p:grpSpPr>
+        <a:xfrm>
+          <a:off x="0" y="0"/>
+          <a:ext cx="0" cy="0"/>
+          <a:chOff x="0" y="0"/>
+          <a:chExt cx="0" cy="0"/>
+        </a:xfrm>
+      </p:grpSpPr>
+      <p:sp>
+        <p:nvSpPr>
+          <p:cNvPr id="62" name="Rectangle 61"/>
+          <p:cNvSpPr/>
+          <p:nvPr/>
+        </p:nvSpPr>
+        <p:spPr>
+          <a:xfrm>
+            <a:off x="6426258" y="4419600"/>
+            <a:ext cx="802182" cy="589080"/>
+          </a:xfrm>
+          <a:prstGeom prst="rect">
+            <a:avLst/>
+          </a:prstGeom>
+          <a:solidFill>
+            <a:schemeClr val="bg1">
+              <a:lumMod val="75000"/>
+            </a:schemeClr>
+          </a:solidFill>
+          <a:ln>
+            <a:noFill/>
+          </a:ln>
+        </p:spPr>
+        <p:style>
+          <a:lnRef idx="2">
+            <a:schemeClr val="accent1">
+              <a:shade val="50000"/>
+            </a:schemeClr>
+          </a:lnRef>
+          <a:fillRef idx="1">
+            <a:schemeClr val="accent1"/>
+          </a:fillRef>
+          <a:effectRef idx="0">
+            <a:schemeClr val="accent1"/>
+          </a:effectRef>
+          <a:fontRef idx="minor">
+            <a:schemeClr val="lt1"/>
+          </a:fontRef>
+        </p:style>
+        <p:txBody>
+          <a:bodyPr rtlCol="0" anchor="ctr"/>
+          <a:lstStyle/>
+          <a:p>
+            <a:pPr marL="0" marR="0" lvl="0" indent="0" algn="ctr" defTabSz="914400" rtl="0" eaLnBrk="1" fontAlgn="auto" latinLnBrk="0" hangingPunct="1">
+              <a:lnSpc>
+                <a:spcPct val="100000"/>
+              </a:lnSpc>
+              <a:spcBef>
+                <a:spcPts val="0"/>
+              </a:spcBef>
+              <a:spcAft>
+                <a:spcPts val="0"/>
+              </a:spcAft>
+              <a:buClrTx/>
+              <a:buSzTx/>
+              <a:buFontTx/>
+              <a:buNone/>
+              <a:tabLst/>
+              <a:defRPr/>
+            </a:pPr>
+            <a:endParaRPr kumimoji="0" lang="en-US" sz="1800" b="0" i="0" u="none" strike="noStrike" kern="1200" cap="none" spc="0" normalizeH="0" baseline="0" noProof="0">
+              <a:ln>
+                <a:noFill/>
+              </a:ln>
+              <a:solidFill>
+                <a:prstClr val="white"/>
+              </a:solidFill>
+              <a:effectLst/>
+              <a:uLnTx/>
+              <a:uFillTx/>
+              <a:latin typeface="Gill Sans MT"/>
+              <a:ea typeface="+mn-ea"/>
+              <a:cs typeface="+mn-cs"/>
+            </a:endParaRPr>
+          </a:p>
+        </p:txBody>
+      </p:sp>
+      <p:sp>
+        <p:nvSpPr>
+          <p:cNvPr id="30" name="Rectangle 29"/>
+          <p:cNvSpPr/>
+          <p:nvPr/>
+        </p:nvSpPr>
+        <p:spPr>
+          <a:xfrm>
+            <a:off x="685800" y="1814215"/>
+            <a:ext cx="3962400" cy="3362920"/>
+          </a:xfrm>
+          <a:prstGeom prst="rect">
+            <a:avLst/>
+          </a:prstGeom>
+          <a:solidFill>
+            <a:schemeClr val="bg1">
+              <a:lumMod val="75000"/>
+            </a:schemeClr>
+          </a:solidFill>
+        </p:spPr>
+        <p:style>
+          <a:lnRef idx="2">
+            <a:schemeClr val="accent1">
+              <a:shade val="50000"/>
+            </a:schemeClr>
+          </a:lnRef>
+          <a:fillRef idx="1">
+            <a:schemeClr val="accent1"/>
+          </a:fillRef>
+          <a:effectRef idx="0">
+            <a:schemeClr val="accent1"/>
+          </a:effectRef>
+          <a:fontRef idx="minor">
+            <a:schemeClr val="lt1"/>
+          </a:fontRef>
+        </p:style>
+        <p:txBody>
+          <a:bodyPr rtlCol="0" anchor="ctr"/>
+          <a:lstStyle/>
+          <a:p>
+            <a:pPr marL="0" marR="0" lvl="0" indent="0" algn="ctr" defTabSz="914400" rtl="0" eaLnBrk="1" fontAlgn="auto" latinLnBrk="0" hangingPunct="1">
+              <a:lnSpc>
+                <a:spcPct val="100000"/>
+              </a:lnSpc>
+              <a:spcBef>
+                <a:spcPts val="0"/>
+              </a:spcBef>
+              <a:spcAft>
+                <a:spcPts val="0"/>
+              </a:spcAft>
+              <a:buClrTx/>
+              <a:buSzTx/>
+              <a:buFontTx/>
+              <a:buNone/>
+              <a:tabLst/>
+              <a:defRPr/>
+            </a:pPr>
+            <a:endParaRPr kumimoji="0" lang="en-US" sz="1800" b="0" i="0" u="none" strike="noStrike" kern="1200" cap="none" spc="0" normalizeH="0" baseline="0" noProof="0">
+              <a:ln>
+                <a:noFill/>
+              </a:ln>
+              <a:solidFill>
+                <a:prstClr val="white"/>
+              </a:solidFill>
+              <a:effectLst/>
+              <a:uLnTx/>
+              <a:uFillTx/>
+              <a:latin typeface="Gill Sans MT"/>
+              <a:ea typeface="+mn-ea"/>
+              <a:cs typeface="+mn-cs"/>
+            </a:endParaRPr>
+          </a:p>
+        </p:txBody>
+      </p:sp>
+      <p:sp>
+        <p:nvSpPr>
+          <p:cNvPr id="49" name="Rectangle 48"/>
+          <p:cNvSpPr/>
+          <p:nvPr/>
+        </p:nvSpPr>
+        <p:spPr>
+          <a:xfrm>
+            <a:off x="7410643" y="1773120"/>
+            <a:ext cx="802182" cy="589080"/>
+          </a:xfrm>
+          <a:prstGeom prst="rect">
+            <a:avLst/>
+          </a:prstGeom>
+          <a:solidFill>
+            <a:schemeClr val="bg1">
+              <a:lumMod val="75000"/>
+            </a:schemeClr>
+          </a:solidFill>
+          <a:ln>
+            <a:noFill/>
+          </a:ln>
+        </p:spPr>
+        <p:style>
+          <a:lnRef idx="2">
+            <a:schemeClr val="accent1">
+              <a:shade val="50000"/>
+            </a:schemeClr>
+          </a:lnRef>
+          <a:fillRef idx="1">
+            <a:schemeClr val="accent1"/>
+          </a:fillRef>
+          <a:effectRef idx="0">
+            <a:schemeClr val="accent1"/>
+          </a:effectRef>
+          <a:fontRef idx="minor">
+            <a:schemeClr val="lt1"/>
+          </a:fontRef>
+        </p:style>
+        <p:txBody>
+          <a:bodyPr rtlCol="0" anchor="ctr"/>
+          <a:lstStyle/>
+          <a:p>
+            <a:pPr marL="0" marR="0" lvl="0" indent="0" algn="ctr" defTabSz="914400" rtl="0" eaLnBrk="1" fontAlgn="auto" latinLnBrk="0" hangingPunct="1">
+              <a:lnSpc>
+                <a:spcPct val="100000"/>
+              </a:lnSpc>
+              <a:spcBef>
+                <a:spcPts val="0"/>
+              </a:spcBef>
+              <a:spcAft>
+                <a:spcPts val="0"/>
+              </a:spcAft>
+              <a:buClrTx/>
+              <a:buSzTx/>
+              <a:buFontTx/>
+              <a:buNone/>
+              <a:tabLst/>
+              <a:defRPr/>
+            </a:pPr>
+            <a:endParaRPr kumimoji="0" lang="en-US" sz="1800" b="0" i="0" u="none" strike="noStrike" kern="1200" cap="none" spc="0" normalizeH="0" baseline="0" noProof="0">
+              <a:ln>
+                <a:noFill/>
+              </a:ln>
+              <a:solidFill>
+                <a:prstClr val="white"/>
+              </a:solidFill>
+              <a:effectLst/>
+              <a:uLnTx/>
+              <a:uFillTx/>
+              <a:latin typeface="Gill Sans MT"/>
+              <a:ea typeface="+mn-ea"/>
+              <a:cs typeface="+mn-cs"/>
+            </a:endParaRPr>
+          </a:p>
+        </p:txBody>
+      </p:sp>
+      <p:sp>
+        <p:nvSpPr>
+          <p:cNvPr id="2" name="Title 1"/>
+          <p:cNvSpPr>
+            <a:spLocks noGrp="1"/>
+          </p:cNvSpPr>
+          <p:nvPr>
+            <p:ph type="title"/>
+          </p:nvPr>
+        </p:nvSpPr>
+        <p:spPr/>
+        <p:txBody>
+          <a:bodyPr>
+            <a:normAutofit/>
+          </a:bodyPr>
+          <a:lstStyle/>
+          <a:p>
+            <a:r>
+              <a:rPr lang="en-US" dirty="0">
+                <a:solidFill>
+                  <a:srgbClr val="FF0000"/>
+                </a:solidFill>
+              </a:rPr>
+              <a:t>Adding two integers</a:t>
+            </a:r>
+            <a:endParaRPr lang="en-US" b="1" dirty="0">
+              <a:solidFill>
+                <a:srgbClr val="FF0000"/>
+              </a:solidFill>
+              <a:latin typeface="Consolas" panose="020B0609020204030204" pitchFamily="49" charset="0"/>
+              <a:cs typeface="Consolas" panose="020B0609020204030204" pitchFamily="49" charset="0"/>
+            </a:endParaRPr>
+          </a:p>
+        </p:txBody>
+      </p:sp>
+      <p:sp>
+        <p:nvSpPr>
+          <p:cNvPr id="3" name="Slide Number Placeholder 2"/>
+          <p:cNvSpPr>
+            <a:spLocks noGrp="1"/>
+          </p:cNvSpPr>
+          <p:nvPr>
+            <p:ph type="sldNum" sz="quarter" idx="4294967295"/>
+          </p:nvPr>
+        </p:nvSpPr>
+        <p:spPr>
+          <a:xfrm>
+            <a:off x="612648" y="6356350"/>
+            <a:ext cx="1981200" cy="365760"/>
+          </a:xfrm>
+          <a:prstGeom prst="rect">
+            <a:avLst/>
+          </a:prstGeom>
+        </p:spPr>
+        <p:txBody>
+          <a:bodyPr/>
+          <a:lstStyle/>
+          <a:p>
+            <a:pPr marL="0" marR="0" lvl="0" indent="0" algn="l" defTabSz="914400" rtl="0" eaLnBrk="1" fontAlgn="auto" latinLnBrk="0" hangingPunct="1">
+              <a:lnSpc>
+                <a:spcPct val="100000"/>
+              </a:lnSpc>
+              <a:spcBef>
+                <a:spcPts val="0"/>
+              </a:spcBef>
+              <a:spcAft>
+                <a:spcPts val="0"/>
+              </a:spcAft>
+              <a:buClrTx/>
+              <a:buSzTx/>
+              <a:buFontTx/>
+              <a:buNone/>
+              <a:tabLst/>
+              <a:defRPr/>
+            </a:pPr>
+            <a:fld id="{EA7C8D44-3667-46F6-9772-CC52308E2A7F}" type="slidenum">
+              <a:rPr kumimoji="0" lang="en-US" sz="1400" b="0" i="0" u="none" strike="noStrike" kern="1200" cap="none" spc="0" normalizeH="0" baseline="0" noProof="0" smtClean="0">
+                <a:ln>
+                  <a:noFill/>
+                </a:ln>
+                <a:solidFill>
+                  <a:srgbClr val="1F497D"/>
+                </a:solidFill>
+                <a:effectLst/>
+                <a:uLnTx/>
+                <a:uFillTx/>
+                <a:latin typeface="Gill Sans MT"/>
+                <a:ea typeface="+mn-ea"/>
+                <a:cs typeface="+mn-cs"/>
+              </a:rPr>
+              <a:pPr marL="0" marR="0" lvl="0" indent="0" algn="l" defTabSz="914400" rtl="0" eaLnBrk="1" fontAlgn="auto" latinLnBrk="0" hangingPunct="1">
+                <a:lnSpc>
+                  <a:spcPct val="100000"/>
+                </a:lnSpc>
+                <a:spcBef>
+                  <a:spcPts val="0"/>
+                </a:spcBef>
+                <a:spcAft>
+                  <a:spcPts val="0"/>
+                </a:spcAft>
+                <a:buClrTx/>
+                <a:buSzTx/>
+                <a:buFontTx/>
+                <a:buNone/>
+                <a:tabLst/>
+                <a:defRPr/>
+              </a:pPr>
+              <a:t>7</a:t>
             </a:fld>
             <a:endParaRPr kumimoji="0" lang="en-US" sz="1400" b="0" i="0" u="none" strike="noStrike" kern="1200" cap="none" spc="0" normalizeH="0" baseline="0" noProof="0" dirty="0">
               <a:ln>
@@ -34579,3787 +38128,6 @@
 </p:sld>
 </file>
 
-<file path=ppt/slides/slide6.xml><?xml version="1.0" encoding="utf-8"?>
-<p:sld xmlns:a="http://schemas.openxmlformats.org/drawingml/2006/main" xmlns:r="http://schemas.openxmlformats.org/officeDocument/2006/relationships" xmlns:p="http://schemas.openxmlformats.org/presentationml/2006/main">
-  <p:cSld>
-    <p:spTree>
-      <p:nvGrpSpPr>
-        <p:cNvPr id="1" name=""/>
-        <p:cNvGrpSpPr/>
-        <p:nvPr/>
-      </p:nvGrpSpPr>
-      <p:grpSpPr>
-        <a:xfrm>
-          <a:off x="0" y="0"/>
-          <a:ext cx="0" cy="0"/>
-          <a:chOff x="0" y="0"/>
-          <a:chExt cx="0" cy="0"/>
-        </a:xfrm>
-      </p:grpSpPr>
-      <p:sp>
-        <p:nvSpPr>
-          <p:cNvPr id="2" name="Slide Number Placeholder 1"/>
-          <p:cNvSpPr>
-            <a:spLocks noGrp="1"/>
-          </p:cNvSpPr>
-          <p:nvPr>
-            <p:ph type="sldNum" sz="quarter" idx="4294967295"/>
-          </p:nvPr>
-        </p:nvSpPr>
-        <p:spPr>
-          <a:xfrm>
-            <a:off x="612648" y="6356350"/>
-            <a:ext cx="1981200" cy="365760"/>
-          </a:xfrm>
-          <a:prstGeom prst="rect">
-            <a:avLst/>
-          </a:prstGeom>
-        </p:spPr>
-        <p:txBody>
-          <a:bodyPr/>
-          <a:lstStyle/>
-          <a:p>
-            <a:pPr marL="0" marR="0" lvl="0" indent="0" algn="l" defTabSz="914400" rtl="0" eaLnBrk="1" fontAlgn="auto" latinLnBrk="0" hangingPunct="1">
-              <a:lnSpc>
-                <a:spcPct val="100000"/>
-              </a:lnSpc>
-              <a:spcBef>
-                <a:spcPts val="0"/>
-              </a:spcBef>
-              <a:spcAft>
-                <a:spcPts val="0"/>
-              </a:spcAft>
-              <a:buClrTx/>
-              <a:buSzTx/>
-              <a:buFontTx/>
-              <a:buNone/>
-              <a:tabLst/>
-              <a:defRPr/>
-            </a:pPr>
-            <a:fld id="{EA7C8D44-3667-46F6-9772-CC52308E2A7F}" type="slidenum">
-              <a:rPr kumimoji="0" lang="en-US" sz="1400" b="0" i="0" u="none" strike="noStrike" kern="1200" cap="none" spc="0" normalizeH="0" baseline="0" noProof="0" smtClean="0">
-                <a:ln>
-                  <a:noFill/>
-                </a:ln>
-                <a:solidFill>
-                  <a:srgbClr val="1F497D"/>
-                </a:solidFill>
-                <a:effectLst/>
-                <a:uLnTx/>
-                <a:uFillTx/>
-                <a:latin typeface="Gill Sans MT"/>
-                <a:ea typeface="+mn-ea"/>
-                <a:cs typeface="+mn-cs"/>
-              </a:rPr>
-              <a:pPr marL="0" marR="0" lvl="0" indent="0" algn="l" defTabSz="914400" rtl="0" eaLnBrk="1" fontAlgn="auto" latinLnBrk="0" hangingPunct="1">
-                <a:lnSpc>
-                  <a:spcPct val="100000"/>
-                </a:lnSpc>
-                <a:spcBef>
-                  <a:spcPts val="0"/>
-                </a:spcBef>
-                <a:spcAft>
-                  <a:spcPts val="0"/>
-                </a:spcAft>
-                <a:buClrTx/>
-                <a:buSzTx/>
-                <a:buFontTx/>
-                <a:buNone/>
-                <a:tabLst/>
-                <a:defRPr/>
-              </a:pPr>
-              <a:t>6</a:t>
-            </a:fld>
-            <a:endParaRPr kumimoji="0" lang="en-US" sz="1400" b="0" i="0" u="none" strike="noStrike" kern="1200" cap="none" spc="0" normalizeH="0" baseline="0" noProof="0" dirty="0">
-              <a:ln>
-                <a:noFill/>
-              </a:ln>
-              <a:solidFill>
-                <a:srgbClr val="1F497D"/>
-              </a:solidFill>
-              <a:effectLst/>
-              <a:uLnTx/>
-              <a:uFillTx/>
-              <a:latin typeface="Gill Sans MT"/>
-              <a:ea typeface="+mn-ea"/>
-              <a:cs typeface="+mn-cs"/>
-            </a:endParaRPr>
-          </a:p>
-        </p:txBody>
-      </p:sp>
-      <p:sp>
-        <p:nvSpPr>
-          <p:cNvPr id="4" name="Title 3"/>
-          <p:cNvSpPr>
-            <a:spLocks noGrp="1"/>
-          </p:cNvSpPr>
-          <p:nvPr>
-            <p:ph type="title"/>
-          </p:nvPr>
-        </p:nvSpPr>
-        <p:spPr/>
-        <p:txBody>
-          <a:bodyPr>
-            <a:normAutofit/>
-          </a:bodyPr>
-          <a:lstStyle/>
-          <a:p>
-            <a:r>
-              <a:rPr lang="en-US" dirty="0"/>
-              <a:t>Signed Integers</a:t>
-            </a:r>
-            <a:br>
-              <a:rPr lang="en-US" dirty="0"/>
-            </a:br>
-            <a:r>
-              <a:rPr lang="en-US" dirty="0">
-                <a:solidFill>
-                  <a:schemeClr val="accent2"/>
-                </a:solidFill>
-              </a:rPr>
-              <a:t>Method 3: Two’s Complement</a:t>
-            </a:r>
-          </a:p>
-        </p:txBody>
-      </p:sp>
-      <p:pic>
-        <p:nvPicPr>
-          <p:cNvPr id="36866" name="Picture 2"/>
-          <p:cNvPicPr>
-            <a:picLocks noChangeAspect="1" noChangeArrowheads="1"/>
-          </p:cNvPicPr>
-          <p:nvPr/>
-        </p:nvPicPr>
-        <p:blipFill>
-          <a:blip r:embed="rId3">
-            <a:extLst>
-              <a:ext uri="{28A0092B-C50C-407E-A947-70E740481C1C}">
-                <a14:useLocalDpi xmlns:a14="http://schemas.microsoft.com/office/drawing/2010/main" val="0"/>
-              </a:ext>
-            </a:extLst>
-          </a:blip>
-          <a:srcRect/>
-          <a:stretch>
-            <a:fillRect/>
-          </a:stretch>
-        </p:blipFill>
-        <p:spPr bwMode="auto">
-          <a:xfrm>
-            <a:off x="457200" y="2362200"/>
-            <a:ext cx="4202424" cy="4038600"/>
-          </a:xfrm>
-          <a:prstGeom prst="rect">
-            <a:avLst/>
-          </a:prstGeom>
-          <a:noFill/>
-          <a:ln>
-            <a:noFill/>
-          </a:ln>
-          <a:effectLst/>
-          <a:extLst>
-            <a:ext uri="{909E8E84-426E-40DD-AFC4-6F175D3DCCD1}">
-              <a14:hiddenFill xmlns:a14="http://schemas.microsoft.com/office/drawing/2010/main">
-                <a:solidFill>
-                  <a:schemeClr val="accent1"/>
-                </a:solidFill>
-              </a14:hiddenFill>
-            </a:ext>
-            <a:ext uri="{91240B29-F687-4F45-9708-019B960494DF}">
-              <a14:hiddenLine xmlns:a14="http://schemas.microsoft.com/office/drawing/2010/main" w="9525">
-                <a:solidFill>
-                  <a:schemeClr val="tx1"/>
-                </a:solidFill>
-                <a:miter lim="800000"/>
-                <a:headEnd/>
-                <a:tailEnd/>
-              </a14:hiddenLine>
-            </a:ext>
-            <a:ext uri="{AF507438-7753-43E0-B8FC-AC1667EBCBE1}">
-              <a14:hiddenEffects xmlns:a14="http://schemas.microsoft.com/office/drawing/2010/main">
-                <a:effectLst>
-                  <a:outerShdw dist="35921" dir="2700000" algn="ctr" rotWithShape="0">
-                    <a:schemeClr val="bg2"/>
-                  </a:outerShdw>
-                </a:effectLst>
-              </a14:hiddenEffects>
-            </a:ext>
-          </a:extLst>
-        </p:spPr>
-      </p:pic>
-      <mc:AlternateContent xmlns:mc="http://schemas.openxmlformats.org/markup-compatibility/2006" xmlns:a14="http://schemas.microsoft.com/office/drawing/2010/main">
-        <mc:Choice Requires="a14">
-          <p:sp>
-            <p:nvSpPr>
-              <p:cNvPr id="5" name="Rectangle 4"/>
-              <p:cNvSpPr/>
-              <p:nvPr/>
-            </p:nvSpPr>
-            <p:spPr>
-              <a:xfrm>
-                <a:off x="457200" y="1219200"/>
-                <a:ext cx="3352800" cy="707886"/>
-              </a:xfrm>
-              <a:prstGeom prst="rect">
-                <a:avLst/>
-              </a:prstGeom>
-            </p:spPr>
-            <p:txBody>
-              <a:bodyPr wrap="square">
-                <a:spAutoFit/>
-              </a:bodyPr>
-              <a:lstStyle/>
-              <a:p>
-                <a:pPr marL="0" marR="0" lvl="0" indent="0" algn="l" defTabSz="914400" rtl="0" eaLnBrk="1" fontAlgn="auto" latinLnBrk="0" hangingPunct="1">
-                  <a:lnSpc>
-                    <a:spcPct val="100000"/>
-                  </a:lnSpc>
-                  <a:spcBef>
-                    <a:spcPts val="0"/>
-                  </a:spcBef>
-                  <a:spcAft>
-                    <a:spcPts val="0"/>
-                  </a:spcAft>
-                  <a:buClrTx/>
-                  <a:buSzTx/>
-                  <a:buFontTx/>
-                  <a:buNone/>
-                  <a:tabLst/>
-                  <a:defRPr/>
-                </a:pPr>
-                <a:r>
-                  <a:rPr kumimoji="0" lang="en-US" sz="2000" b="1" i="1" u="none" strike="noStrike" kern="1200" cap="none" spc="0" normalizeH="0" baseline="0" noProof="0" dirty="0">
-                    <a:ln>
-                      <a:noFill/>
-                    </a:ln>
-                    <a:solidFill>
-                      <a:prstClr val="black"/>
-                    </a:solidFill>
-                    <a:effectLst/>
-                    <a:uLnTx/>
-                    <a:uFillTx/>
-                    <a:latin typeface="Gill Sans MT"/>
-                    <a:ea typeface="+mn-ea"/>
-                    <a:cs typeface="+mn-cs"/>
-                  </a:rPr>
-                  <a:t>Two’s Complement (</a:t>
-                </a:r>
-                <a14:m>
-                  <m:oMath xmlns:m="http://schemas.openxmlformats.org/officeDocument/2006/math">
-                    <m:acc>
-                      <m:accPr>
-                        <m:chr m:val="̅"/>
-                        <m:ctrlPr>
-                          <a:rPr kumimoji="0" lang="en-US" sz="2000" b="1" i="1" u="none" strike="noStrike" kern="1200" cap="none" spc="0" normalizeH="0" baseline="0" noProof="0">
-                            <a:ln>
-                              <a:noFill/>
-                            </a:ln>
-                            <a:solidFill>
-                              <a:prstClr val="black"/>
-                            </a:solidFill>
-                            <a:effectLst/>
-                            <a:uLnTx/>
-                            <a:uFillTx/>
-                            <a:latin typeface="Cambria Math" panose="02040503050406030204" pitchFamily="18" charset="0"/>
-                            <a:ea typeface="+mn-ea"/>
-                            <a:cs typeface="+mn-cs"/>
-                          </a:rPr>
-                        </m:ctrlPr>
-                      </m:accPr>
-                      <m:e>
-                        <m:r>
-                          <a:rPr kumimoji="0" lang="en-US" sz="2000" b="1" i="1" u="none" strike="noStrike" kern="1200" cap="none" spc="0" normalizeH="0" baseline="0" noProof="0">
-                            <a:ln>
-                              <a:noFill/>
-                            </a:ln>
-                            <a:solidFill>
-                              <a:prstClr val="black"/>
-                            </a:solidFill>
-                            <a:effectLst/>
-                            <a:uLnTx/>
-                            <a:uFillTx/>
-                            <a:latin typeface="Cambria Math"/>
-                            <a:ea typeface="+mn-ea"/>
-                            <a:cs typeface="+mn-cs"/>
-                          </a:rPr>
-                          <m:t>𝜶</m:t>
-                        </m:r>
-                      </m:e>
-                    </m:acc>
-                  </m:oMath>
-                </a14:m>
-                <a:r>
-                  <a:rPr kumimoji="0" lang="en-US" sz="2000" b="1" i="1" u="none" strike="noStrike" kern="1200" cap="none" spc="0" normalizeH="0" baseline="0" noProof="0" dirty="0">
-                    <a:ln>
-                      <a:noFill/>
-                    </a:ln>
-                    <a:solidFill>
-                      <a:prstClr val="black"/>
-                    </a:solidFill>
-                    <a:effectLst/>
-                    <a:uLnTx/>
-                    <a:uFillTx/>
-                    <a:latin typeface="Gill Sans MT"/>
-                    <a:ea typeface="+mn-ea"/>
-                    <a:cs typeface="+mn-cs"/>
-                  </a:rPr>
-                  <a:t>):</a:t>
-                </a:r>
-                <a:endParaRPr kumimoji="0" lang="en-US" sz="2000" b="0" i="0" u="none" strike="noStrike" kern="1200" cap="none" spc="0" normalizeH="0" baseline="0" noProof="0" dirty="0">
-                  <a:ln>
-                    <a:noFill/>
-                  </a:ln>
-                  <a:solidFill>
-                    <a:prstClr val="black"/>
-                  </a:solidFill>
-                  <a:effectLst/>
-                  <a:uLnTx/>
-                  <a:uFillTx/>
-                  <a:latin typeface="Gill Sans MT"/>
-                  <a:ea typeface="+mn-ea"/>
-                  <a:cs typeface="+mn-cs"/>
-                </a:endParaRPr>
-              </a:p>
-              <a:p>
-                <a:pPr marL="0" marR="0" lvl="0" indent="0" algn="l" defTabSz="914400" rtl="0" eaLnBrk="1" fontAlgn="auto" latinLnBrk="0" hangingPunct="1">
-                  <a:lnSpc>
-                    <a:spcPct val="100000"/>
-                  </a:lnSpc>
-                  <a:spcBef>
-                    <a:spcPts val="0"/>
-                  </a:spcBef>
-                  <a:spcAft>
-                    <a:spcPts val="0"/>
-                  </a:spcAft>
-                  <a:buClrTx/>
-                  <a:buSzTx/>
-                  <a:buFontTx/>
-                  <a:buNone/>
-                  <a:tabLst/>
-                  <a:defRPr/>
-                </a:pPr>
-                <a14:m>
-                  <m:oMathPara xmlns:m="http://schemas.openxmlformats.org/officeDocument/2006/math">
-                    <m:oMathParaPr>
-                      <m:jc m:val="centerGroup"/>
-                    </m:oMathParaPr>
-                    <m:oMath xmlns:m="http://schemas.openxmlformats.org/officeDocument/2006/math">
-                      <m:r>
-                        <a:rPr kumimoji="0" lang="en-US" sz="2000" b="1" i="1" u="none" strike="noStrike" kern="1200" cap="none" spc="0" normalizeH="0" baseline="0" noProof="0">
-                          <a:ln>
-                            <a:noFill/>
-                          </a:ln>
-                          <a:solidFill>
-                            <a:prstClr val="black"/>
-                          </a:solidFill>
-                          <a:effectLst/>
-                          <a:uLnTx/>
-                          <a:uFillTx/>
-                          <a:latin typeface="Cambria Math"/>
-                          <a:ea typeface="+mn-ea"/>
-                          <a:cs typeface="+mn-cs"/>
-                        </a:rPr>
-                        <m:t>𝜶</m:t>
-                      </m:r>
-                      <m:r>
-                        <a:rPr kumimoji="0" lang="en-US" sz="2000" b="1" i="1" u="none" strike="noStrike" kern="1200" cap="none" spc="0" normalizeH="0" baseline="0" noProof="0">
-                          <a:ln>
-                            <a:noFill/>
-                          </a:ln>
-                          <a:solidFill>
-                            <a:prstClr val="black"/>
-                          </a:solidFill>
-                          <a:effectLst/>
-                          <a:uLnTx/>
-                          <a:uFillTx/>
-                          <a:latin typeface="Cambria Math"/>
-                          <a:ea typeface="+mn-ea"/>
-                          <a:cs typeface="+mn-cs"/>
-                        </a:rPr>
-                        <m:t>+</m:t>
-                      </m:r>
-                      <m:acc>
-                        <m:accPr>
-                          <m:chr m:val="̅"/>
-                          <m:ctrlPr>
-                            <a:rPr kumimoji="0" lang="en-US" sz="2000" b="1" i="1" u="none" strike="noStrike" kern="1200" cap="none" spc="0" normalizeH="0" baseline="0" noProof="0">
-                              <a:ln>
-                                <a:noFill/>
-                              </a:ln>
-                              <a:solidFill>
-                                <a:prstClr val="black"/>
-                              </a:solidFill>
-                              <a:effectLst/>
-                              <a:uLnTx/>
-                              <a:uFillTx/>
-                              <a:latin typeface="Cambria Math" panose="02040503050406030204" pitchFamily="18" charset="0"/>
-                              <a:ea typeface="+mn-ea"/>
-                              <a:cs typeface="+mn-cs"/>
-                            </a:rPr>
-                          </m:ctrlPr>
-                        </m:accPr>
-                        <m:e>
-                          <m:r>
-                            <a:rPr kumimoji="0" lang="en-US" sz="2000" b="1" i="1" u="none" strike="noStrike" kern="1200" cap="none" spc="0" normalizeH="0" baseline="0" noProof="0">
-                              <a:ln>
-                                <a:noFill/>
-                              </a:ln>
-                              <a:solidFill>
-                                <a:prstClr val="black"/>
-                              </a:solidFill>
-                              <a:effectLst/>
-                              <a:uLnTx/>
-                              <a:uFillTx/>
-                              <a:latin typeface="Cambria Math"/>
-                              <a:ea typeface="+mn-ea"/>
-                              <a:cs typeface="+mn-cs"/>
-                            </a:rPr>
-                            <m:t>𝜶</m:t>
-                          </m:r>
-                        </m:e>
-                      </m:acc>
-                      <m:r>
-                        <a:rPr kumimoji="0" lang="en-US" sz="2000" b="1" i="1" u="none" strike="noStrike" kern="1200" cap="none" spc="0" normalizeH="0" baseline="0" noProof="0">
-                          <a:ln>
-                            <a:noFill/>
-                          </a:ln>
-                          <a:solidFill>
-                            <a:prstClr val="black"/>
-                          </a:solidFill>
-                          <a:effectLst/>
-                          <a:uLnTx/>
-                          <a:uFillTx/>
-                          <a:latin typeface="Cambria Math"/>
-                          <a:ea typeface="+mn-ea"/>
-                          <a:cs typeface="+mn-cs"/>
-                        </a:rPr>
-                        <m:t>=</m:t>
-                      </m:r>
-                      <m:sSup>
-                        <m:sSupPr>
-                          <m:ctrlPr>
-                            <a:rPr kumimoji="0" lang="en-US" sz="2000" b="1" i="1" u="none" strike="noStrike" kern="1200" cap="none" spc="0" normalizeH="0" baseline="0" noProof="0">
-                              <a:ln>
-                                <a:noFill/>
-                              </a:ln>
-                              <a:solidFill>
-                                <a:prstClr val="black"/>
-                              </a:solidFill>
-                              <a:effectLst/>
-                              <a:uLnTx/>
-                              <a:uFillTx/>
-                              <a:latin typeface="Cambria Math" panose="02040503050406030204" pitchFamily="18" charset="0"/>
-                              <a:ea typeface="+mn-ea"/>
-                              <a:cs typeface="+mn-cs"/>
-                            </a:rPr>
-                          </m:ctrlPr>
-                        </m:sSupPr>
-                        <m:e>
-                          <m:r>
-                            <a:rPr kumimoji="0" lang="en-US" sz="2000" b="1" i="1" u="none" strike="noStrike" kern="1200" cap="none" spc="0" normalizeH="0" baseline="0" noProof="0">
-                              <a:ln>
-                                <a:noFill/>
-                              </a:ln>
-                              <a:solidFill>
-                                <a:prstClr val="black"/>
-                              </a:solidFill>
-                              <a:effectLst/>
-                              <a:uLnTx/>
-                              <a:uFillTx/>
-                              <a:latin typeface="Cambria Math"/>
-                              <a:ea typeface="+mn-ea"/>
-                              <a:cs typeface="+mn-cs"/>
-                            </a:rPr>
-                            <m:t>𝟐</m:t>
-                          </m:r>
-                        </m:e>
-                        <m:sup>
-                          <m:r>
-                            <a:rPr kumimoji="0" lang="en-US" sz="2000" b="1" i="1" u="none" strike="noStrike" kern="1200" cap="none" spc="0" normalizeH="0" baseline="0" noProof="0">
-                              <a:ln>
-                                <a:noFill/>
-                              </a:ln>
-                              <a:solidFill>
-                                <a:prstClr val="black"/>
-                              </a:solidFill>
-                              <a:effectLst/>
-                              <a:uLnTx/>
-                              <a:uFillTx/>
-                              <a:latin typeface="Cambria Math"/>
-                              <a:ea typeface="+mn-ea"/>
-                              <a:cs typeface="+mn-cs"/>
-                            </a:rPr>
-                            <m:t>𝒏</m:t>
-                          </m:r>
-                        </m:sup>
-                      </m:sSup>
-                    </m:oMath>
-                  </m:oMathPara>
-                </a14:m>
-                <a:endParaRPr kumimoji="0" lang="en-US" sz="2000" b="0" i="0" u="none" strike="noStrike" kern="1200" cap="none" spc="0" normalizeH="0" baseline="0" noProof="0" dirty="0">
-                  <a:ln>
-                    <a:noFill/>
-                  </a:ln>
-                  <a:solidFill>
-                    <a:prstClr val="black"/>
-                  </a:solidFill>
-                  <a:effectLst/>
-                  <a:uLnTx/>
-                  <a:uFillTx/>
-                  <a:latin typeface="Gill Sans MT"/>
-                  <a:ea typeface="+mn-ea"/>
-                  <a:cs typeface="+mn-cs"/>
-                </a:endParaRPr>
-              </a:p>
-            </p:txBody>
-          </p:sp>
-        </mc:Choice>
-        <mc:Fallback xmlns="">
-          <p:sp>
-            <p:nvSpPr>
-              <p:cNvPr id="5" name="Rectangle 4"/>
-              <p:cNvSpPr>
-                <a:spLocks noRot="1" noChangeAspect="1" noMove="1" noResize="1" noEditPoints="1" noAdjustHandles="1" noChangeArrowheads="1" noChangeShapeType="1" noTextEdit="1"/>
-              </p:cNvSpPr>
-              <p:nvPr/>
-            </p:nvSpPr>
-            <p:spPr>
-              <a:xfrm>
-                <a:off x="457200" y="1219200"/>
-                <a:ext cx="3352800" cy="707886"/>
-              </a:xfrm>
-              <a:prstGeom prst="rect">
-                <a:avLst/>
-              </a:prstGeom>
-              <a:blipFill rotWithShape="1">
-                <a:blip r:embed="rId4"/>
-                <a:stretch>
-                  <a:fillRect l="-1818" t="-4310"/>
-                </a:stretch>
-              </a:blipFill>
-            </p:spPr>
-            <p:txBody>
-              <a:bodyPr/>
-              <a:lstStyle/>
-              <a:p>
-                <a:r>
-                  <a:rPr lang="en-US">
-                    <a:noFill/>
-                  </a:rPr>
-                  <a:t> </a:t>
-                </a:r>
-              </a:p>
-            </p:txBody>
-          </p:sp>
-        </mc:Fallback>
-      </mc:AlternateContent>
-      <p:sp>
-        <p:nvSpPr>
-          <p:cNvPr id="6" name="Rectangle 5"/>
-          <p:cNvSpPr/>
-          <p:nvPr/>
-        </p:nvSpPr>
-        <p:spPr>
-          <a:xfrm>
-            <a:off x="4918862" y="2242388"/>
-            <a:ext cx="3996538" cy="646331"/>
-          </a:xfrm>
-          <a:prstGeom prst="rect">
-            <a:avLst/>
-          </a:prstGeom>
-        </p:spPr>
-        <p:txBody>
-          <a:bodyPr wrap="square">
-            <a:spAutoFit/>
-          </a:bodyPr>
-          <a:lstStyle/>
-          <a:p>
-            <a:pPr marL="0" marR="0" lvl="0" indent="0" algn="l" defTabSz="914400" rtl="0" eaLnBrk="1" fontAlgn="auto" latinLnBrk="0" hangingPunct="1">
-              <a:lnSpc>
-                <a:spcPct val="100000"/>
-              </a:lnSpc>
-              <a:spcBef>
-                <a:spcPts val="0"/>
-              </a:spcBef>
-              <a:spcAft>
-                <a:spcPts val="0"/>
-              </a:spcAft>
-              <a:buClrTx/>
-              <a:buSzTx/>
-              <a:buFontTx/>
-              <a:buNone/>
-              <a:tabLst/>
-              <a:defRPr/>
-            </a:pPr>
-            <a:r>
-              <a:rPr kumimoji="0" lang="en-US" sz="1800" b="1" i="0" u="none" strike="noStrike" kern="1200" cap="none" spc="0" normalizeH="0" baseline="0" noProof="0" dirty="0">
-                <a:ln>
-                  <a:noFill/>
-                </a:ln>
-                <a:solidFill>
-                  <a:srgbClr val="C00000"/>
-                </a:solidFill>
-                <a:effectLst/>
-                <a:uLnTx/>
-                <a:uFillTx/>
-                <a:latin typeface="Gill Sans MT"/>
-                <a:ea typeface="+mn-ea"/>
-                <a:cs typeface="+mn-cs"/>
-              </a:rPr>
-              <a:t>TC of a number can be obtained by its bitwise NOT plus one. </a:t>
-            </a:r>
-          </a:p>
-        </p:txBody>
-      </p:sp>
-      <p:graphicFrame>
-        <p:nvGraphicFramePr>
-          <p:cNvPr id="8" name="Table 7"/>
-          <p:cNvGraphicFramePr>
-            <a:graphicFrameLocks noGrp="1"/>
-          </p:cNvGraphicFramePr>
-          <p:nvPr/>
-        </p:nvGraphicFramePr>
-        <p:xfrm>
-          <a:off x="4871772" y="4013201"/>
-          <a:ext cx="4090718" cy="1589172"/>
-        </p:xfrm>
-        <a:graphic>
-          <a:graphicData uri="http://schemas.openxmlformats.org/drawingml/2006/table">
-            <a:tbl>
-              <a:tblPr firstRow="1" firstCol="1" bandRow="1">
-                <a:tableStyleId>{5C22544A-7EE6-4342-B048-85BDC9FD1C3A}</a:tableStyleId>
-              </a:tblPr>
-              <a:tblGrid>
-                <a:gridCol w="1957118">
-                  <a:extLst>
-                    <a:ext uri="{9D8B030D-6E8A-4147-A177-3AD203B41FA5}">
-                      <a16:colId xmlns:a16="http://schemas.microsoft.com/office/drawing/2014/main" val="20000"/>
-                    </a:ext>
-                  </a:extLst>
-                </a:gridCol>
-                <a:gridCol w="1199988">
-                  <a:extLst>
-                    <a:ext uri="{9D8B030D-6E8A-4147-A177-3AD203B41FA5}">
-                      <a16:colId xmlns:a16="http://schemas.microsoft.com/office/drawing/2014/main" val="20001"/>
-                    </a:ext>
-                  </a:extLst>
-                </a:gridCol>
-                <a:gridCol w="933612">
-                  <a:extLst>
-                    <a:ext uri="{9D8B030D-6E8A-4147-A177-3AD203B41FA5}">
-                      <a16:colId xmlns:a16="http://schemas.microsoft.com/office/drawing/2014/main" val="20002"/>
-                    </a:ext>
-                  </a:extLst>
-                </a:gridCol>
-              </a:tblGrid>
-              <a:tr h="301176">
-                <a:tc>
-                  <a:txBody>
-                    <a:bodyPr/>
-                    <a:lstStyle/>
-                    <a:p>
-                      <a:pPr marL="0" marR="0" algn="r">
-                        <a:spcBef>
-                          <a:spcPts val="0"/>
-                        </a:spcBef>
-                        <a:spcAft>
-                          <a:spcPts val="0"/>
-                        </a:spcAft>
-                      </a:pPr>
-                      <a:r>
-                        <a:rPr lang="en-US" sz="1600" dirty="0">
-                          <a:effectLst/>
-                          <a:latin typeface="Consolas" panose="020B0609020204030204" pitchFamily="49" charset="0"/>
-                          <a:cs typeface="Consolas" panose="020B0609020204030204" pitchFamily="49" charset="0"/>
-                        </a:rPr>
-                        <a:t> </a:t>
-                      </a:r>
-                      <a:endParaRPr lang="en-US" sz="2000" dirty="0">
-                        <a:effectLst/>
-                        <a:latin typeface="Consolas" panose="020B0609020204030204" pitchFamily="49" charset="0"/>
-                        <a:ea typeface="宋体"/>
-                        <a:cs typeface="Consolas" panose="020B0609020204030204" pitchFamily="49" charset="0"/>
-                      </a:endParaRPr>
-                    </a:p>
-                  </a:txBody>
-                  <a:tcPr marL="68580" marR="68580" marT="0" marB="0" anchor="ctr"/>
-                </a:tc>
-                <a:tc>
-                  <a:txBody>
-                    <a:bodyPr/>
-                    <a:lstStyle/>
-                    <a:p>
-                      <a:pPr marL="0" marR="0" algn="r">
-                        <a:spcBef>
-                          <a:spcPts val="0"/>
-                        </a:spcBef>
-                        <a:spcAft>
-                          <a:spcPts val="0"/>
-                        </a:spcAft>
-                      </a:pPr>
-                      <a:r>
-                        <a:rPr lang="en-US" sz="1600">
-                          <a:effectLst/>
-                          <a:latin typeface="Consolas" panose="020B0609020204030204" pitchFamily="49" charset="0"/>
-                          <a:cs typeface="Consolas" panose="020B0609020204030204" pitchFamily="49" charset="0"/>
-                        </a:rPr>
-                        <a:t>Binary</a:t>
-                      </a:r>
-                      <a:endParaRPr lang="en-US" sz="2000">
-                        <a:effectLst/>
-                        <a:latin typeface="Consolas" panose="020B0609020204030204" pitchFamily="49" charset="0"/>
-                        <a:ea typeface="宋体"/>
-                        <a:cs typeface="Consolas" panose="020B0609020204030204" pitchFamily="49" charset="0"/>
-                      </a:endParaRPr>
-                    </a:p>
-                  </a:txBody>
-                  <a:tcPr marL="68580" marR="68580" marT="0" marB="0" anchor="ctr"/>
-                </a:tc>
-                <a:tc>
-                  <a:txBody>
-                    <a:bodyPr/>
-                    <a:lstStyle/>
-                    <a:p>
-                      <a:pPr marL="0" marR="0" algn="r">
-                        <a:spcBef>
-                          <a:spcPts val="0"/>
-                        </a:spcBef>
-                        <a:spcAft>
-                          <a:spcPts val="0"/>
-                        </a:spcAft>
-                      </a:pPr>
-                      <a:r>
-                        <a:rPr lang="en-US" sz="1600">
-                          <a:effectLst/>
-                          <a:latin typeface="Consolas" panose="020B0609020204030204" pitchFamily="49" charset="0"/>
-                          <a:cs typeface="Consolas" panose="020B0609020204030204" pitchFamily="49" charset="0"/>
-                        </a:rPr>
-                        <a:t>Decimal</a:t>
-                      </a:r>
-                      <a:endParaRPr lang="en-US" sz="2000">
-                        <a:effectLst/>
-                        <a:latin typeface="Consolas" panose="020B0609020204030204" pitchFamily="49" charset="0"/>
-                        <a:ea typeface="宋体"/>
-                        <a:cs typeface="Consolas" panose="020B0609020204030204" pitchFamily="49" charset="0"/>
-                      </a:endParaRPr>
-                    </a:p>
-                  </a:txBody>
-                  <a:tcPr marL="68580" marR="68580" marT="0" marB="0" anchor="ctr"/>
-                </a:tc>
-                <a:extLst>
-                  <a:ext uri="{0D108BD9-81ED-4DB2-BD59-A6C34878D82A}">
-                    <a16:rowId xmlns:a16="http://schemas.microsoft.com/office/drawing/2014/main" val="10000"/>
-                  </a:ext>
-                </a:extLst>
-              </a:tr>
-              <a:tr h="233216">
-                <a:tc>
-                  <a:txBody>
-                    <a:bodyPr/>
-                    <a:lstStyle/>
-                    <a:p>
-                      <a:pPr marL="0" marR="0" algn="r">
-                        <a:spcBef>
-                          <a:spcPts val="0"/>
-                        </a:spcBef>
-                        <a:spcAft>
-                          <a:spcPts val="0"/>
-                        </a:spcAft>
-                      </a:pPr>
-                      <a:r>
-                        <a:rPr lang="en-US" sz="1600" dirty="0">
-                          <a:effectLst/>
-                          <a:latin typeface="Consolas" panose="020B0609020204030204" pitchFamily="49" charset="0"/>
-                          <a:cs typeface="Consolas" panose="020B0609020204030204" pitchFamily="49" charset="0"/>
-                        </a:rPr>
-                        <a:t>Original number</a:t>
-                      </a:r>
-                      <a:endParaRPr lang="en-US" sz="2000" dirty="0">
-                        <a:effectLst/>
-                        <a:latin typeface="Consolas" panose="020B0609020204030204" pitchFamily="49" charset="0"/>
-                        <a:ea typeface="宋体"/>
-                        <a:cs typeface="Consolas" panose="020B0609020204030204" pitchFamily="49" charset="0"/>
-                      </a:endParaRPr>
-                    </a:p>
-                  </a:txBody>
-                  <a:tcPr marL="68580" marR="68580" marT="0" marB="0" anchor="ctr"/>
-                </a:tc>
-                <a:tc>
-                  <a:txBody>
-                    <a:bodyPr/>
-                    <a:lstStyle/>
-                    <a:p>
-                      <a:pPr marL="0" marR="0" algn="r">
-                        <a:spcBef>
-                          <a:spcPts val="0"/>
-                        </a:spcBef>
-                        <a:spcAft>
-                          <a:spcPts val="0"/>
-                        </a:spcAft>
-                      </a:pPr>
-                      <a:r>
-                        <a:rPr lang="en-US" sz="1600" dirty="0">
-                          <a:effectLst/>
-                          <a:latin typeface="Consolas" panose="020B0609020204030204" pitchFamily="49" charset="0"/>
-                          <a:cs typeface="Consolas" panose="020B0609020204030204" pitchFamily="49" charset="0"/>
-                        </a:rPr>
-                        <a:t>00011</a:t>
-                      </a:r>
-                      <a:endParaRPr lang="en-US" sz="2000" dirty="0">
-                        <a:effectLst/>
-                        <a:latin typeface="Consolas" panose="020B0609020204030204" pitchFamily="49" charset="0"/>
-                        <a:ea typeface="宋体"/>
-                        <a:cs typeface="Consolas" panose="020B0609020204030204" pitchFamily="49" charset="0"/>
-                      </a:endParaRPr>
-                    </a:p>
-                  </a:txBody>
-                  <a:tcPr marL="68580" marR="68580" marT="0" marB="0" anchor="ctr"/>
-                </a:tc>
-                <a:tc>
-                  <a:txBody>
-                    <a:bodyPr/>
-                    <a:lstStyle/>
-                    <a:p>
-                      <a:pPr marL="0" marR="0" algn="r">
-                        <a:spcBef>
-                          <a:spcPts val="0"/>
-                        </a:spcBef>
-                        <a:spcAft>
-                          <a:spcPts val="0"/>
-                        </a:spcAft>
-                      </a:pPr>
-                      <a:r>
-                        <a:rPr lang="en-US" sz="1600">
-                          <a:effectLst/>
-                          <a:latin typeface="Consolas" panose="020B0609020204030204" pitchFamily="49" charset="0"/>
-                          <a:cs typeface="Consolas" panose="020B0609020204030204" pitchFamily="49" charset="0"/>
-                        </a:rPr>
-                        <a:t>3</a:t>
-                      </a:r>
-                      <a:endParaRPr lang="en-US" sz="2000">
-                        <a:effectLst/>
-                        <a:latin typeface="Consolas" panose="020B0609020204030204" pitchFamily="49" charset="0"/>
-                        <a:ea typeface="宋体"/>
-                        <a:cs typeface="Consolas" panose="020B0609020204030204" pitchFamily="49" charset="0"/>
-                      </a:endParaRPr>
-                    </a:p>
-                  </a:txBody>
-                  <a:tcPr marL="68580" marR="68580" marT="0" marB="0" anchor="ctr"/>
-                </a:tc>
-                <a:extLst>
-                  <a:ext uri="{0D108BD9-81ED-4DB2-BD59-A6C34878D82A}">
-                    <a16:rowId xmlns:a16="http://schemas.microsoft.com/office/drawing/2014/main" val="10001"/>
-                  </a:ext>
-                </a:extLst>
-              </a:tr>
-              <a:tr h="466433">
-                <a:tc>
-                  <a:txBody>
-                    <a:bodyPr/>
-                    <a:lstStyle/>
-                    <a:p>
-                      <a:pPr marL="0" marR="0" algn="r">
-                        <a:spcBef>
-                          <a:spcPts val="0"/>
-                        </a:spcBef>
-                        <a:spcAft>
-                          <a:spcPts val="0"/>
-                        </a:spcAft>
-                      </a:pPr>
-                      <a:r>
-                        <a:rPr lang="en-US" sz="1600" dirty="0">
-                          <a:effectLst/>
-                          <a:latin typeface="Consolas" panose="020B0609020204030204" pitchFamily="49" charset="0"/>
-                          <a:cs typeface="Consolas" panose="020B0609020204030204" pitchFamily="49" charset="0"/>
-                        </a:rPr>
-                        <a:t>Step 1: Invert every bit</a:t>
-                      </a:r>
-                      <a:endParaRPr lang="en-US" sz="2000" dirty="0">
-                        <a:effectLst/>
-                        <a:latin typeface="Consolas" panose="020B0609020204030204" pitchFamily="49" charset="0"/>
-                        <a:ea typeface="宋体"/>
-                        <a:cs typeface="Consolas" panose="020B0609020204030204" pitchFamily="49" charset="0"/>
-                      </a:endParaRPr>
-                    </a:p>
-                  </a:txBody>
-                  <a:tcPr marL="68580" marR="68580" marT="0" marB="0" anchor="ctr"/>
-                </a:tc>
-                <a:tc>
-                  <a:txBody>
-                    <a:bodyPr/>
-                    <a:lstStyle/>
-                    <a:p>
-                      <a:pPr marL="0" marR="0" algn="r">
-                        <a:spcBef>
-                          <a:spcPts val="0"/>
-                        </a:spcBef>
-                        <a:spcAft>
-                          <a:spcPts val="0"/>
-                        </a:spcAft>
-                      </a:pPr>
-                      <a:r>
-                        <a:rPr lang="en-US" sz="1600" dirty="0">
-                          <a:effectLst/>
-                          <a:latin typeface="Consolas" panose="020B0609020204030204" pitchFamily="49" charset="0"/>
-                          <a:cs typeface="Consolas" panose="020B0609020204030204" pitchFamily="49" charset="0"/>
-                        </a:rPr>
-                        <a:t>11100</a:t>
-                      </a:r>
-                      <a:endParaRPr lang="en-US" sz="2000" dirty="0">
-                        <a:effectLst/>
-                        <a:latin typeface="Consolas" panose="020B0609020204030204" pitchFamily="49" charset="0"/>
-                        <a:ea typeface="宋体"/>
-                        <a:cs typeface="Consolas" panose="020B0609020204030204" pitchFamily="49" charset="0"/>
-                      </a:endParaRPr>
-                    </a:p>
-                  </a:txBody>
-                  <a:tcPr marL="68580" marR="68580" marT="0" marB="0" anchor="ctr"/>
-                </a:tc>
-                <a:tc>
-                  <a:txBody>
-                    <a:bodyPr/>
-                    <a:lstStyle/>
-                    <a:p>
-                      <a:pPr marL="0" marR="0" algn="r">
-                        <a:spcBef>
-                          <a:spcPts val="0"/>
-                        </a:spcBef>
-                        <a:spcAft>
-                          <a:spcPts val="0"/>
-                        </a:spcAft>
-                      </a:pPr>
-                      <a:r>
-                        <a:rPr lang="en-US" sz="1600">
-                          <a:effectLst/>
-                          <a:latin typeface="Consolas" panose="020B0609020204030204" pitchFamily="49" charset="0"/>
-                          <a:cs typeface="Consolas" panose="020B0609020204030204" pitchFamily="49" charset="0"/>
-                        </a:rPr>
-                        <a:t> </a:t>
-                      </a:r>
-                      <a:endParaRPr lang="en-US" sz="2000">
-                        <a:effectLst/>
-                        <a:latin typeface="Consolas" panose="020B0609020204030204" pitchFamily="49" charset="0"/>
-                        <a:ea typeface="宋体"/>
-                        <a:cs typeface="Consolas" panose="020B0609020204030204" pitchFamily="49" charset="0"/>
-                      </a:endParaRPr>
-                    </a:p>
-                  </a:txBody>
-                  <a:tcPr marL="68580" marR="68580" marT="0" marB="0" anchor="ctr"/>
-                </a:tc>
-                <a:extLst>
-                  <a:ext uri="{0D108BD9-81ED-4DB2-BD59-A6C34878D82A}">
-                    <a16:rowId xmlns:a16="http://schemas.microsoft.com/office/drawing/2014/main" val="10002"/>
-                  </a:ext>
-                </a:extLst>
-              </a:tr>
-              <a:tr h="288737">
-                <a:tc>
-                  <a:txBody>
-                    <a:bodyPr/>
-                    <a:lstStyle/>
-                    <a:p>
-                      <a:pPr marL="0" marR="0" algn="r">
-                        <a:spcBef>
-                          <a:spcPts val="0"/>
-                        </a:spcBef>
-                        <a:spcAft>
-                          <a:spcPts val="0"/>
-                        </a:spcAft>
-                      </a:pPr>
-                      <a:r>
-                        <a:rPr lang="en-US" sz="1600">
-                          <a:effectLst/>
-                          <a:latin typeface="Consolas" panose="020B0609020204030204" pitchFamily="49" charset="0"/>
-                          <a:cs typeface="Consolas" panose="020B0609020204030204" pitchFamily="49" charset="0"/>
-                        </a:rPr>
-                        <a:t>Step 2: Add 1</a:t>
-                      </a:r>
-                      <a:endParaRPr lang="en-US" sz="2000">
-                        <a:effectLst/>
-                        <a:latin typeface="Consolas" panose="020B0609020204030204" pitchFamily="49" charset="0"/>
-                        <a:ea typeface="宋体"/>
-                        <a:cs typeface="Consolas" panose="020B0609020204030204" pitchFamily="49" charset="0"/>
-                      </a:endParaRPr>
-                    </a:p>
-                  </a:txBody>
-                  <a:tcPr marL="68580" marR="68580" marT="0" marB="0" anchor="ctr">
-                    <a:lnB w="12700" cap="flat" cmpd="sng" algn="ctr">
-                      <a:solidFill>
-                        <a:schemeClr val="tx1"/>
-                      </a:solidFill>
-                      <a:prstDash val="solid"/>
-                      <a:round/>
-                      <a:headEnd type="none" w="med" len="med"/>
-                      <a:tailEnd type="none" w="med" len="med"/>
-                    </a:lnB>
-                  </a:tcPr>
-                </a:tc>
-                <a:tc>
-                  <a:txBody>
-                    <a:bodyPr/>
-                    <a:lstStyle/>
-                    <a:p>
-                      <a:pPr marL="0" marR="0" algn="r">
-                        <a:spcBef>
-                          <a:spcPts val="0"/>
-                        </a:spcBef>
-                        <a:spcAft>
-                          <a:spcPts val="0"/>
-                        </a:spcAft>
-                      </a:pPr>
-                      <a:r>
-                        <a:rPr lang="en-US" sz="1600" dirty="0">
-                          <a:effectLst/>
-                          <a:latin typeface="Consolas" panose="020B0609020204030204" pitchFamily="49" charset="0"/>
-                          <a:cs typeface="Consolas" panose="020B0609020204030204" pitchFamily="49" charset="0"/>
-                        </a:rPr>
-                        <a:t>+ 00001</a:t>
-                      </a:r>
-                      <a:endParaRPr lang="en-US" sz="2000" dirty="0">
-                        <a:effectLst/>
-                        <a:latin typeface="Consolas" panose="020B0609020204030204" pitchFamily="49" charset="0"/>
-                        <a:ea typeface="宋体"/>
-                        <a:cs typeface="Consolas" panose="020B0609020204030204" pitchFamily="49" charset="0"/>
-                      </a:endParaRPr>
-                    </a:p>
-                  </a:txBody>
-                  <a:tcPr marL="68580" marR="68580" marT="0" marB="0" anchor="ctr">
-                    <a:lnB w="12700" cap="flat" cmpd="sng" algn="ctr">
-                      <a:solidFill>
-                        <a:schemeClr val="tx1"/>
-                      </a:solidFill>
-                      <a:prstDash val="solid"/>
-                      <a:round/>
-                      <a:headEnd type="none" w="med" len="med"/>
-                      <a:tailEnd type="none" w="med" len="med"/>
-                    </a:lnB>
-                  </a:tcPr>
-                </a:tc>
-                <a:tc>
-                  <a:txBody>
-                    <a:bodyPr/>
-                    <a:lstStyle/>
-                    <a:p>
-                      <a:pPr marL="0" marR="0" algn="r">
-                        <a:spcBef>
-                          <a:spcPts val="0"/>
-                        </a:spcBef>
-                        <a:spcAft>
-                          <a:spcPts val="0"/>
-                        </a:spcAft>
-                      </a:pPr>
-                      <a:r>
-                        <a:rPr lang="en-US" sz="1600">
-                          <a:effectLst/>
-                          <a:latin typeface="Consolas" panose="020B0609020204030204" pitchFamily="49" charset="0"/>
-                          <a:cs typeface="Consolas" panose="020B0609020204030204" pitchFamily="49" charset="0"/>
-                        </a:rPr>
-                        <a:t> </a:t>
-                      </a:r>
-                      <a:endParaRPr lang="en-US" sz="2000">
-                        <a:effectLst/>
-                        <a:latin typeface="Consolas" panose="020B0609020204030204" pitchFamily="49" charset="0"/>
-                        <a:ea typeface="宋体"/>
-                        <a:cs typeface="Consolas" panose="020B0609020204030204" pitchFamily="49" charset="0"/>
-                      </a:endParaRPr>
-                    </a:p>
-                  </a:txBody>
-                  <a:tcPr marL="68580" marR="68580" marT="0" marB="0" anchor="ctr"/>
-                </a:tc>
-                <a:extLst>
-                  <a:ext uri="{0D108BD9-81ED-4DB2-BD59-A6C34878D82A}">
-                    <a16:rowId xmlns:a16="http://schemas.microsoft.com/office/drawing/2014/main" val="10003"/>
-                  </a:ext>
-                </a:extLst>
-              </a:tr>
-              <a:tr h="267739">
-                <a:tc>
-                  <a:txBody>
-                    <a:bodyPr/>
-                    <a:lstStyle/>
-                    <a:p>
-                      <a:pPr marL="0" marR="0" algn="r">
-                        <a:spcBef>
-                          <a:spcPts val="0"/>
-                        </a:spcBef>
-                        <a:spcAft>
-                          <a:spcPts val="0"/>
-                        </a:spcAft>
-                      </a:pPr>
-                      <a:r>
-                        <a:rPr lang="en-US" sz="1600">
-                          <a:effectLst/>
-                          <a:latin typeface="Consolas" panose="020B0609020204030204" pitchFamily="49" charset="0"/>
-                          <a:cs typeface="Consolas" panose="020B0609020204030204" pitchFamily="49" charset="0"/>
-                        </a:rPr>
-                        <a:t>Two’s complement</a:t>
-                      </a:r>
-                      <a:endParaRPr lang="en-US" sz="2000">
-                        <a:effectLst/>
-                        <a:latin typeface="Consolas" panose="020B0609020204030204" pitchFamily="49" charset="0"/>
-                        <a:ea typeface="宋体"/>
-                        <a:cs typeface="Consolas" panose="020B0609020204030204" pitchFamily="49" charset="0"/>
-                      </a:endParaRPr>
-                    </a:p>
-                  </a:txBody>
-                  <a:tcPr marL="68580" marR="68580" marT="0" marB="0" anchor="ctr">
-                    <a:lnT w="12700" cap="flat" cmpd="sng" algn="ctr">
-                      <a:solidFill>
-                        <a:schemeClr val="tx1"/>
-                      </a:solidFill>
-                      <a:prstDash val="solid"/>
-                      <a:round/>
-                      <a:headEnd type="none" w="med" len="med"/>
-                      <a:tailEnd type="none" w="med" len="med"/>
-                    </a:lnT>
-                  </a:tcPr>
-                </a:tc>
-                <a:tc>
-                  <a:txBody>
-                    <a:bodyPr/>
-                    <a:lstStyle/>
-                    <a:p>
-                      <a:pPr marL="0" marR="0" algn="r">
-                        <a:spcBef>
-                          <a:spcPts val="0"/>
-                        </a:spcBef>
-                        <a:spcAft>
-                          <a:spcPts val="0"/>
-                        </a:spcAft>
-                      </a:pPr>
-                      <a:r>
-                        <a:rPr lang="en-US" sz="1600" dirty="0">
-                          <a:effectLst/>
-                          <a:latin typeface="Consolas" panose="020B0609020204030204" pitchFamily="49" charset="0"/>
-                          <a:cs typeface="Consolas" panose="020B0609020204030204" pitchFamily="49" charset="0"/>
-                        </a:rPr>
-                        <a:t>11101</a:t>
-                      </a:r>
-                      <a:endParaRPr lang="en-US" sz="2000" dirty="0">
-                        <a:effectLst/>
-                        <a:latin typeface="Consolas" panose="020B0609020204030204" pitchFamily="49" charset="0"/>
-                        <a:ea typeface="宋体"/>
-                        <a:cs typeface="Consolas" panose="020B0609020204030204" pitchFamily="49" charset="0"/>
-                      </a:endParaRPr>
-                    </a:p>
-                  </a:txBody>
-                  <a:tcPr marL="68580" marR="68580" marT="0" marB="0" anchor="ctr">
-                    <a:lnT w="12700" cap="flat" cmpd="sng" algn="ctr">
-                      <a:solidFill>
-                        <a:schemeClr val="tx1"/>
-                      </a:solidFill>
-                      <a:prstDash val="solid"/>
-                      <a:round/>
-                      <a:headEnd type="none" w="med" len="med"/>
-                      <a:tailEnd type="none" w="med" len="med"/>
-                    </a:lnT>
-                  </a:tcPr>
-                </a:tc>
-                <a:tc>
-                  <a:txBody>
-                    <a:bodyPr/>
-                    <a:lstStyle/>
-                    <a:p>
-                      <a:pPr marL="0" marR="0" algn="r">
-                        <a:spcBef>
-                          <a:spcPts val="0"/>
-                        </a:spcBef>
-                        <a:spcAft>
-                          <a:spcPts val="0"/>
-                        </a:spcAft>
-                      </a:pPr>
-                      <a:r>
-                        <a:rPr lang="en-US" sz="1600" dirty="0">
-                          <a:effectLst/>
-                          <a:latin typeface="Consolas" panose="020B0609020204030204" pitchFamily="49" charset="0"/>
-                          <a:cs typeface="Consolas" panose="020B0609020204030204" pitchFamily="49" charset="0"/>
-                        </a:rPr>
-                        <a:t>-3</a:t>
-                      </a:r>
-                      <a:endParaRPr lang="en-US" sz="2000" dirty="0">
-                        <a:effectLst/>
-                        <a:latin typeface="Consolas" panose="020B0609020204030204" pitchFamily="49" charset="0"/>
-                        <a:ea typeface="宋体"/>
-                        <a:cs typeface="Consolas" panose="020B0609020204030204" pitchFamily="49" charset="0"/>
-                      </a:endParaRPr>
-                    </a:p>
-                  </a:txBody>
-                  <a:tcPr marL="68580" marR="68580" marT="0" marB="0" anchor="ctr"/>
-                </a:tc>
-                <a:extLst>
-                  <a:ext uri="{0D108BD9-81ED-4DB2-BD59-A6C34878D82A}">
-                    <a16:rowId xmlns:a16="http://schemas.microsoft.com/office/drawing/2014/main" val="10004"/>
-                  </a:ext>
-                </a:extLst>
-              </a:tr>
-            </a:tbl>
-          </a:graphicData>
-        </a:graphic>
-      </p:graphicFrame>
-      <p:sp>
-        <p:nvSpPr>
-          <p:cNvPr id="9" name="TextBox 8"/>
-          <p:cNvSpPr txBox="1"/>
-          <p:nvPr/>
-        </p:nvSpPr>
-        <p:spPr>
-          <a:xfrm>
-            <a:off x="4892320" y="3409846"/>
-            <a:ext cx="2270480" cy="369332"/>
-          </a:xfrm>
-          <a:prstGeom prst="rect">
-            <a:avLst/>
-          </a:prstGeom>
-          <a:noFill/>
-        </p:spPr>
-        <p:txBody>
-          <a:bodyPr wrap="square" rtlCol="0">
-            <a:spAutoFit/>
-          </a:bodyPr>
-          <a:lstStyle/>
-          <a:p>
-            <a:pPr marL="0" marR="0" lvl="0" indent="0" algn="l" defTabSz="914400" rtl="0" eaLnBrk="1" fontAlgn="auto" latinLnBrk="0" hangingPunct="1">
-              <a:lnSpc>
-                <a:spcPct val="100000"/>
-              </a:lnSpc>
-              <a:spcBef>
-                <a:spcPts val="0"/>
-              </a:spcBef>
-              <a:spcAft>
-                <a:spcPts val="0"/>
-              </a:spcAft>
-              <a:buClrTx/>
-              <a:buSzTx/>
-              <a:buFontTx/>
-              <a:buNone/>
-              <a:tabLst/>
-              <a:defRPr/>
-            </a:pPr>
-            <a:r>
-              <a:rPr kumimoji="0" lang="en-US" sz="1800" b="0" i="0" u="none" strike="noStrike" kern="1200" cap="none" spc="0" normalizeH="0" baseline="0" noProof="0" dirty="0">
-                <a:ln>
-                  <a:noFill/>
-                </a:ln>
-                <a:solidFill>
-                  <a:prstClr val="black"/>
-                </a:solidFill>
-                <a:effectLst/>
-                <a:uLnTx/>
-                <a:uFillTx/>
-                <a:latin typeface="Gill Sans MT"/>
-                <a:ea typeface="+mn-ea"/>
-                <a:cs typeface="+mn-cs"/>
-              </a:rPr>
-              <a:t>Example </a:t>
-            </a:r>
-            <a:r>
-              <a:rPr kumimoji="0" lang="en-US" sz="1800" b="1" i="0" u="none" strike="noStrike" kern="1200" cap="none" spc="0" normalizeH="0" baseline="0" noProof="0" dirty="0">
-                <a:ln>
-                  <a:noFill/>
-                </a:ln>
-                <a:solidFill>
-                  <a:prstClr val="black"/>
-                </a:solidFill>
-                <a:effectLst/>
-                <a:uLnTx/>
-                <a:uFillTx/>
-                <a:latin typeface="Consolas" panose="020B0609020204030204" pitchFamily="49" charset="0"/>
-                <a:ea typeface="+mn-ea"/>
-                <a:cs typeface="Consolas" panose="020B0609020204030204" pitchFamily="49" charset="0"/>
-              </a:rPr>
-              <a:t>1</a:t>
-            </a:r>
-            <a:r>
-              <a:rPr kumimoji="0" lang="en-US" sz="1800" b="0" i="0" u="none" strike="noStrike" kern="1200" cap="none" spc="0" normalizeH="0" baseline="0" noProof="0" dirty="0">
-                <a:ln>
-                  <a:noFill/>
-                </a:ln>
-                <a:solidFill>
-                  <a:prstClr val="black"/>
-                </a:solidFill>
-                <a:effectLst/>
-                <a:uLnTx/>
-                <a:uFillTx/>
-                <a:latin typeface="Gill Sans MT"/>
-                <a:ea typeface="+mn-ea"/>
-                <a:cs typeface="+mn-cs"/>
-              </a:rPr>
-              <a:t>:  </a:t>
-            </a:r>
-            <a:r>
-              <a:rPr kumimoji="0" lang="en-US" sz="1800" b="0" i="0" u="none" strike="noStrike" kern="1200" cap="none" spc="0" normalizeH="0" baseline="0" noProof="0" dirty="0">
-                <a:ln>
-                  <a:noFill/>
-                </a:ln>
-                <a:solidFill>
-                  <a:srgbClr val="C00000"/>
-                </a:solidFill>
-                <a:effectLst/>
-                <a:uLnTx/>
-                <a:uFillTx/>
-                <a:latin typeface="Gill Sans MT"/>
-                <a:ea typeface="+mn-ea"/>
-                <a:cs typeface="+mn-cs"/>
-              </a:rPr>
-              <a:t>TC(3)</a:t>
-            </a:r>
-          </a:p>
-        </p:txBody>
-      </p:sp>
-      <p:sp>
-        <p:nvSpPr>
-          <p:cNvPr id="10" name="Oval 9"/>
-          <p:cNvSpPr/>
-          <p:nvPr/>
-        </p:nvSpPr>
-        <p:spPr>
-          <a:xfrm rot="18357225">
-            <a:off x="3080056" y="2718154"/>
-            <a:ext cx="902864" cy="415032"/>
-          </a:xfrm>
-          <a:prstGeom prst="ellipse">
-            <a:avLst/>
-          </a:prstGeom>
-          <a:noFill/>
-          <a:ln>
-            <a:solidFill>
-              <a:srgbClr val="C00000"/>
-            </a:solidFill>
-          </a:ln>
-        </p:spPr>
-        <p:style>
-          <a:lnRef idx="2">
-            <a:schemeClr val="accent1">
-              <a:shade val="50000"/>
-            </a:schemeClr>
-          </a:lnRef>
-          <a:fillRef idx="1">
-            <a:schemeClr val="accent1"/>
-          </a:fillRef>
-          <a:effectRef idx="0">
-            <a:schemeClr val="accent1"/>
-          </a:effectRef>
-          <a:fontRef idx="minor">
-            <a:schemeClr val="lt1"/>
-          </a:fontRef>
-        </p:style>
-        <p:txBody>
-          <a:bodyPr rtlCol="0" anchor="ctr"/>
-          <a:lstStyle/>
-          <a:p>
-            <a:pPr marL="0" marR="0" lvl="0" indent="0" algn="ctr" defTabSz="914400" rtl="0" eaLnBrk="1" fontAlgn="auto" latinLnBrk="0" hangingPunct="1">
-              <a:lnSpc>
-                <a:spcPct val="100000"/>
-              </a:lnSpc>
-              <a:spcBef>
-                <a:spcPts val="0"/>
-              </a:spcBef>
-              <a:spcAft>
-                <a:spcPts val="0"/>
-              </a:spcAft>
-              <a:buClrTx/>
-              <a:buSzTx/>
-              <a:buFontTx/>
-              <a:buNone/>
-              <a:tabLst/>
-              <a:defRPr/>
-            </a:pPr>
-            <a:endParaRPr kumimoji="0" lang="en-US" sz="1800" b="0" i="0" u="none" strike="noStrike" kern="1200" cap="none" spc="0" normalizeH="0" baseline="0" noProof="0">
-              <a:ln>
-                <a:noFill/>
-              </a:ln>
-              <a:solidFill>
-                <a:prstClr val="white"/>
-              </a:solidFill>
-              <a:effectLst/>
-              <a:uLnTx/>
-              <a:uFillTx/>
-              <a:latin typeface="Gill Sans MT"/>
-              <a:ea typeface="+mn-ea"/>
-              <a:cs typeface="+mn-cs"/>
-            </a:endParaRPr>
-          </a:p>
-        </p:txBody>
-      </p:sp>
-      <p:sp>
-        <p:nvSpPr>
-          <p:cNvPr id="11" name="Oval 10"/>
-          <p:cNvSpPr/>
-          <p:nvPr/>
-        </p:nvSpPr>
-        <p:spPr>
-          <a:xfrm rot="2867065">
-            <a:off x="1148587" y="2704659"/>
-            <a:ext cx="902864" cy="415032"/>
-          </a:xfrm>
-          <a:prstGeom prst="ellipse">
-            <a:avLst/>
-          </a:prstGeom>
-          <a:noFill/>
-          <a:ln>
-            <a:solidFill>
-              <a:srgbClr val="C00000"/>
-            </a:solidFill>
-          </a:ln>
-        </p:spPr>
-        <p:style>
-          <a:lnRef idx="2">
-            <a:schemeClr val="accent1">
-              <a:shade val="50000"/>
-            </a:schemeClr>
-          </a:lnRef>
-          <a:fillRef idx="1">
-            <a:schemeClr val="accent1"/>
-          </a:fillRef>
-          <a:effectRef idx="0">
-            <a:schemeClr val="accent1"/>
-          </a:effectRef>
-          <a:fontRef idx="minor">
-            <a:schemeClr val="lt1"/>
-          </a:fontRef>
-        </p:style>
-        <p:txBody>
-          <a:bodyPr rtlCol="0" anchor="ctr"/>
-          <a:lstStyle/>
-          <a:p>
-            <a:pPr marL="0" marR="0" lvl="0" indent="0" algn="ctr" defTabSz="914400" rtl="0" eaLnBrk="1" fontAlgn="auto" latinLnBrk="0" hangingPunct="1">
-              <a:lnSpc>
-                <a:spcPct val="100000"/>
-              </a:lnSpc>
-              <a:spcBef>
-                <a:spcPts val="0"/>
-              </a:spcBef>
-              <a:spcAft>
-                <a:spcPts val="0"/>
-              </a:spcAft>
-              <a:buClrTx/>
-              <a:buSzTx/>
-              <a:buFontTx/>
-              <a:buNone/>
-              <a:tabLst/>
-              <a:defRPr/>
-            </a:pPr>
-            <a:endParaRPr kumimoji="0" lang="en-US" sz="1800" b="0" i="0" u="none" strike="noStrike" kern="1200" cap="none" spc="0" normalizeH="0" baseline="0" noProof="0">
-              <a:ln>
-                <a:noFill/>
-              </a:ln>
-              <a:solidFill>
-                <a:prstClr val="white"/>
-              </a:solidFill>
-              <a:effectLst/>
-              <a:uLnTx/>
-              <a:uFillTx/>
-              <a:latin typeface="Gill Sans MT"/>
-              <a:ea typeface="+mn-ea"/>
-              <a:cs typeface="+mn-cs"/>
-            </a:endParaRPr>
-          </a:p>
-        </p:txBody>
-      </p:sp>
-      <p:sp>
-        <p:nvSpPr>
-          <p:cNvPr id="12" name="Horizontal Scroll 11"/>
-          <p:cNvSpPr/>
-          <p:nvPr/>
-        </p:nvSpPr>
-        <p:spPr>
-          <a:xfrm>
-            <a:off x="294068" y="178297"/>
-            <a:ext cx="1265712" cy="762000"/>
-          </a:xfrm>
-          <a:prstGeom prst="horizontalScroll">
-            <a:avLst/>
-          </a:prstGeom>
-          <a:gradFill rotWithShape="1">
-            <a:gsLst>
-              <a:gs pos="0">
-                <a:srgbClr val="4F81BD">
-                  <a:tint val="50000"/>
-                  <a:satMod val="300000"/>
-                </a:srgbClr>
-              </a:gs>
-              <a:gs pos="35000">
-                <a:srgbClr val="4F81BD">
-                  <a:tint val="37000"/>
-                  <a:satMod val="300000"/>
-                </a:srgbClr>
-              </a:gs>
-              <a:gs pos="100000">
-                <a:srgbClr val="4F81BD">
-                  <a:tint val="15000"/>
-                  <a:satMod val="350000"/>
-                </a:srgbClr>
-              </a:gs>
-            </a:gsLst>
-            <a:lin ang="16200000" scaled="1"/>
-          </a:gradFill>
-          <a:ln w="9525" cap="flat" cmpd="sng" algn="ctr">
-            <a:solidFill>
-              <a:srgbClr val="4F81BD">
-                <a:shade val="95000"/>
-                <a:satMod val="105000"/>
-              </a:srgbClr>
-            </a:solidFill>
-            <a:prstDash val="solid"/>
-          </a:ln>
-          <a:effectLst>
-            <a:outerShdw blurRad="40000" dist="20000" dir="5400000" rotWithShape="0">
-              <a:srgbClr val="000000">
-                <a:alpha val="38000"/>
-              </a:srgbClr>
-            </a:outerShdw>
-          </a:effectLst>
-        </p:spPr>
-        <p:txBody>
-          <a:bodyPr rtlCol="0" anchor="ctr"/>
-          <a:lstStyle/>
-          <a:p>
-            <a:pPr marL="0" marR="0" lvl="0" indent="0" algn="ctr" defTabSz="457200" eaLnBrk="1" fontAlgn="auto" latinLnBrk="0" hangingPunct="1">
-              <a:lnSpc>
-                <a:spcPct val="100000"/>
-              </a:lnSpc>
-              <a:spcBef>
-                <a:spcPts val="0"/>
-              </a:spcBef>
-              <a:spcAft>
-                <a:spcPts val="0"/>
-              </a:spcAft>
-              <a:buClrTx/>
-              <a:buSzTx/>
-              <a:buFontTx/>
-              <a:buNone/>
-              <a:tabLst/>
-              <a:defRPr/>
-            </a:pPr>
-            <a:r>
-              <a:rPr kumimoji="0" lang="en-US" sz="2400" b="0" i="0" u="none" strike="noStrike" kern="0" cap="none" spc="0" normalizeH="0" baseline="0" noProof="0" dirty="0">
-                <a:ln>
-                  <a:noFill/>
-                </a:ln>
-                <a:solidFill>
-                  <a:prstClr val="black"/>
-                </a:solidFill>
-                <a:effectLst/>
-                <a:uLnTx/>
-                <a:uFillTx/>
-                <a:latin typeface="Calibri"/>
-                <a:ea typeface="+mn-ea"/>
-                <a:cs typeface="+mn-cs"/>
-              </a:rPr>
-              <a:t>Review</a:t>
-            </a:r>
-          </a:p>
-        </p:txBody>
-      </p:sp>
-    </p:spTree>
-    <p:extLst>
-      <p:ext uri="{BB962C8B-B14F-4D97-AF65-F5344CB8AC3E}">
-        <p14:creationId xmlns:p14="http://schemas.microsoft.com/office/powerpoint/2010/main" val="3967346349"/>
-      </p:ext>
-    </p:extLst>
-  </p:cSld>
-  <p:clrMapOvr>
-    <a:masterClrMapping/>
-  </p:clrMapOvr>
-  <p:timing>
-    <p:tnLst>
-      <p:par>
-        <p:cTn id="1" dur="indefinite" restart="never" nodeType="tmRoot">
-          <p:childTnLst>
-            <p:seq concurrent="1" nextAc="seek">
-              <p:cTn id="2" dur="indefinite" nodeType="mainSeq">
-                <p:childTnLst>
-                  <p:par>
-                    <p:cTn id="3" fill="hold">
-                      <p:stCondLst>
-                        <p:cond delay="indefinite"/>
-                      </p:stCondLst>
-                      <p:childTnLst>
-                        <p:par>
-                          <p:cTn id="4" fill="hold">
-                            <p:stCondLst>
-                              <p:cond delay="0"/>
-                            </p:stCondLst>
-                            <p:childTnLst>
-                              <p:par>
-                                <p:cTn id="5" presetID="1" presetClass="entr" presetSubtype="0" fill="hold" nodeType="clickEffect">
-                                  <p:stCondLst>
-                                    <p:cond delay="0"/>
-                                  </p:stCondLst>
-                                  <p:childTnLst>
-                                    <p:set>
-                                      <p:cBhvr>
-                                        <p:cTn id="6" dur="1" fill="hold">
-                                          <p:stCondLst>
-                                            <p:cond delay="0"/>
-                                          </p:stCondLst>
-                                        </p:cTn>
-                                        <p:tgtEl>
-                                          <p:spTgt spid="8"/>
-                                        </p:tgtEl>
-                                        <p:attrNameLst>
-                                          <p:attrName>style.visibility</p:attrName>
-                                        </p:attrNameLst>
-                                      </p:cBhvr>
-                                      <p:to>
-                                        <p:strVal val="visible"/>
-                                      </p:to>
-                                    </p:set>
-                                  </p:childTnLst>
-                                </p:cTn>
-                              </p:par>
-                            </p:childTnLst>
-                          </p:cTn>
-                        </p:par>
-                      </p:childTnLst>
-                    </p:cTn>
-                  </p:par>
-                  <p:par>
-                    <p:cTn id="7" fill="hold">
-                      <p:stCondLst>
-                        <p:cond delay="indefinite"/>
-                      </p:stCondLst>
-                      <p:childTnLst>
-                        <p:par>
-                          <p:cTn id="8" fill="hold">
-                            <p:stCondLst>
-                              <p:cond delay="0"/>
-                            </p:stCondLst>
-                            <p:childTnLst>
-                              <p:par>
-                                <p:cTn id="9" presetID="1" presetClass="entr" presetSubtype="0" fill="hold" grpId="0" nodeType="clickEffect">
-                                  <p:stCondLst>
-                                    <p:cond delay="0"/>
-                                  </p:stCondLst>
-                                  <p:childTnLst>
-                                    <p:set>
-                                      <p:cBhvr>
-                                        <p:cTn id="10" dur="1" fill="hold">
-                                          <p:stCondLst>
-                                            <p:cond delay="0"/>
-                                          </p:stCondLst>
-                                        </p:cTn>
-                                        <p:tgtEl>
-                                          <p:spTgt spid="11"/>
-                                        </p:tgtEl>
-                                        <p:attrNameLst>
-                                          <p:attrName>style.visibility</p:attrName>
-                                        </p:attrNameLst>
-                                      </p:cBhvr>
-                                      <p:to>
-                                        <p:strVal val="visible"/>
-                                      </p:to>
-                                    </p:set>
-                                  </p:childTnLst>
-                                </p:cTn>
-                              </p:par>
-                            </p:childTnLst>
-                          </p:cTn>
-                        </p:par>
-                      </p:childTnLst>
-                    </p:cTn>
-                  </p:par>
-                </p:childTnLst>
-              </p:cTn>
-              <p:prevCondLst>
-                <p:cond evt="onPrev" delay="0">
-                  <p:tgtEl>
-                    <p:sldTgt/>
-                  </p:tgtEl>
-                </p:cond>
-              </p:prevCondLst>
-              <p:nextCondLst>
-                <p:cond evt="onNext" delay="0">
-                  <p:tgtEl>
-                    <p:sldTgt/>
-                  </p:tgtEl>
-                </p:cond>
-              </p:nextCondLst>
-            </p:seq>
-          </p:childTnLst>
-        </p:cTn>
-      </p:par>
-    </p:tnLst>
-    <p:bldLst>
-      <p:bldP spid="11" grpId="0" animBg="1"/>
-    </p:bldLst>
-  </p:timing>
-</p:sld>
-</file>
-
-<file path=ppt/slides/slide7.xml><?xml version="1.0" encoding="utf-8"?>
-<p:sld xmlns:a="http://schemas.openxmlformats.org/drawingml/2006/main" xmlns:r="http://schemas.openxmlformats.org/officeDocument/2006/relationships" xmlns:p="http://schemas.openxmlformats.org/presentationml/2006/main">
-  <p:cSld>
-    <p:spTree>
-      <p:nvGrpSpPr>
-        <p:cNvPr id="1" name=""/>
-        <p:cNvGrpSpPr/>
-        <p:nvPr/>
-      </p:nvGrpSpPr>
-      <p:grpSpPr>
-        <a:xfrm>
-          <a:off x="0" y="0"/>
-          <a:ext cx="0" cy="0"/>
-          <a:chOff x="0" y="0"/>
-          <a:chExt cx="0" cy="0"/>
-        </a:xfrm>
-      </p:grpSpPr>
-      <p:sp>
-        <p:nvSpPr>
-          <p:cNvPr id="4" name="Slide Number Placeholder 5"/>
-          <p:cNvSpPr>
-            <a:spLocks noGrp="1"/>
-          </p:cNvSpPr>
-          <p:nvPr>
-            <p:ph type="sldNum" sz="quarter" idx="4294967295"/>
-          </p:nvPr>
-        </p:nvSpPr>
-        <p:spPr>
-          <a:xfrm>
-            <a:off x="612648" y="6356350"/>
-            <a:ext cx="1981200" cy="365760"/>
-          </a:xfrm>
-          <a:prstGeom prst="rect">
-            <a:avLst/>
-          </a:prstGeom>
-        </p:spPr>
-        <p:txBody>
-          <a:bodyPr/>
-          <a:lstStyle/>
-          <a:p>
-            <a:pPr marL="0" marR="0" lvl="0" indent="0" algn="l" defTabSz="914400" rtl="0" eaLnBrk="1" fontAlgn="auto" latinLnBrk="0" hangingPunct="1">
-              <a:lnSpc>
-                <a:spcPct val="100000"/>
-              </a:lnSpc>
-              <a:spcBef>
-                <a:spcPts val="0"/>
-              </a:spcBef>
-              <a:spcAft>
-                <a:spcPts val="0"/>
-              </a:spcAft>
-              <a:buClrTx/>
-              <a:buSzTx/>
-              <a:buFontTx/>
-              <a:buNone/>
-              <a:tabLst/>
-              <a:defRPr/>
-            </a:pPr>
-            <a:fld id="{A0CDAA7F-72E9-4BAF-9D1D-807702175D95}" type="slidenum">
-              <a:rPr kumimoji="0" lang="en-US" sz="1400" b="0" i="0" u="none" strike="noStrike" kern="1200" cap="none" spc="0" normalizeH="0" baseline="0" noProof="0">
-                <a:ln>
-                  <a:noFill/>
-                </a:ln>
-                <a:solidFill>
-                  <a:srgbClr val="1F497D"/>
-                </a:solidFill>
-                <a:effectLst/>
-                <a:uLnTx/>
-                <a:uFillTx/>
-                <a:latin typeface="Gill Sans MT"/>
-                <a:ea typeface="+mn-ea"/>
-                <a:cs typeface="+mn-cs"/>
-              </a:rPr>
-              <a:pPr marL="0" marR="0" lvl="0" indent="0" algn="l" defTabSz="914400" rtl="0" eaLnBrk="1" fontAlgn="auto" latinLnBrk="0" hangingPunct="1">
-                <a:lnSpc>
-                  <a:spcPct val="100000"/>
-                </a:lnSpc>
-                <a:spcBef>
-                  <a:spcPts val="0"/>
-                </a:spcBef>
-                <a:spcAft>
-                  <a:spcPts val="0"/>
-                </a:spcAft>
-                <a:buClrTx/>
-                <a:buSzTx/>
-                <a:buFontTx/>
-                <a:buNone/>
-                <a:tabLst/>
-                <a:defRPr/>
-              </a:pPr>
-              <a:t>7</a:t>
-            </a:fld>
-            <a:endParaRPr kumimoji="0" lang="en-US" sz="1400" b="0" i="0" u="none" strike="noStrike" kern="1200" cap="none" spc="0" normalizeH="0" baseline="0" noProof="0">
-              <a:ln>
-                <a:noFill/>
-              </a:ln>
-              <a:solidFill>
-                <a:srgbClr val="1F497D"/>
-              </a:solidFill>
-              <a:effectLst/>
-              <a:uLnTx/>
-              <a:uFillTx/>
-              <a:latin typeface="Gill Sans MT"/>
-              <a:ea typeface="+mn-ea"/>
-              <a:cs typeface="+mn-cs"/>
-            </a:endParaRPr>
-          </a:p>
-        </p:txBody>
-      </p:sp>
-      <mc:AlternateContent xmlns:mc="http://schemas.openxmlformats.org/markup-compatibility/2006" xmlns:a14="http://schemas.microsoft.com/office/drawing/2010/main">
-        <mc:Choice Requires="a14">
-          <p:sp>
-            <p:nvSpPr>
-              <p:cNvPr id="185347" name="Rectangle 3"/>
-              <p:cNvSpPr>
-                <a:spLocks noGrp="1" noChangeArrowheads="1"/>
-              </p:cNvSpPr>
-              <p:nvPr>
-                <p:ph type="body" idx="1"/>
-              </p:nvPr>
-            </p:nvSpPr>
-            <p:spPr>
-              <a:xfrm>
-                <a:off x="457200" y="1295400"/>
-                <a:ext cx="7696200" cy="4572000"/>
-              </a:xfrm>
-              <a:noFill/>
-              <a:extLst>
-                <a:ext uri="{909E8E84-426E-40DD-AFC4-6F175D3DCCD1}">
-                  <a14:hiddenFill>
-                    <a:solidFill>
-                      <a:srgbClr val="E4F5FF"/>
-                    </a:solidFill>
-                  </a14:hiddenFill>
-                </a:ext>
-              </a:extLst>
-            </p:spPr>
-            <p:txBody>
-              <a:bodyPr/>
-              <a:lstStyle/>
-              <a:p>
-                <a:r>
-                  <a:rPr lang="en-US" sz="2600" dirty="0">
-                    <a:latin typeface="Arial" charset="0"/>
-                  </a:rPr>
-                  <a:t>Three ways to represent signed binary integers:  </a:t>
-                </a:r>
-              </a:p>
-              <a:p>
-                <a:pPr lvl="1"/>
-                <a:r>
-                  <a:rPr lang="en-US" sz="2200" dirty="0">
-                    <a:latin typeface="Arial" charset="0"/>
-                  </a:rPr>
-                  <a:t>Signed magnitude </a:t>
-                </a:r>
-              </a:p>
-              <a:p>
-                <a:pPr lvl="2"/>
-                <a14:m>
-                  <m:oMath xmlns:m="http://schemas.openxmlformats.org/officeDocument/2006/math">
-                    <m:r>
-                      <a:rPr lang="en-US" sz="1800" b="1" i="1">
-                        <a:latin typeface="Cambria Math"/>
-                      </a:rPr>
-                      <m:t>𝒗𝒂𝒍𝒖𝒆</m:t>
-                    </m:r>
-                    <m:r>
-                      <a:rPr lang="en-US" sz="1800" b="1" i="1">
-                        <a:latin typeface="Cambria Math"/>
-                      </a:rPr>
-                      <m:t>=</m:t>
-                    </m:r>
-                    <m:sSup>
-                      <m:sSupPr>
-                        <m:ctrlPr>
-                          <a:rPr lang="en-US" sz="1800" b="1" i="1">
-                            <a:latin typeface="Cambria Math" panose="02040503050406030204" pitchFamily="18" charset="0"/>
-                          </a:rPr>
-                        </m:ctrlPr>
-                      </m:sSupPr>
-                      <m:e>
-                        <m:r>
-                          <a:rPr lang="en-US" sz="1800" b="1" i="1">
-                            <a:latin typeface="Cambria Math"/>
-                          </a:rPr>
-                          <m:t>(−</m:t>
-                        </m:r>
-                        <m:r>
-                          <a:rPr lang="en-US" sz="1800" b="1" i="1">
-                            <a:latin typeface="Cambria Math"/>
-                          </a:rPr>
-                          <m:t>𝟏</m:t>
-                        </m:r>
-                        <m:r>
-                          <a:rPr lang="en-US" sz="1800" b="1" i="1">
-                            <a:latin typeface="Cambria Math"/>
-                          </a:rPr>
-                          <m:t>)</m:t>
-                        </m:r>
-                      </m:e>
-                      <m:sup>
-                        <m:r>
-                          <a:rPr lang="en-US" sz="1800" b="1" i="1">
-                            <a:solidFill>
-                              <a:srgbClr val="FF0000"/>
-                            </a:solidFill>
-                            <a:latin typeface="Cambria Math"/>
-                          </a:rPr>
-                          <m:t>𝒔𝒊𝒈𝒏</m:t>
-                        </m:r>
-                      </m:sup>
-                    </m:sSup>
-                    <m:r>
-                      <a:rPr lang="en-US" sz="1800" b="1" i="1">
-                        <a:latin typeface="Cambria Math"/>
-                      </a:rPr>
-                      <m:t>×</m:t>
-                    </m:r>
-                    <m:r>
-                      <a:rPr lang="en-US" sz="1800" b="1" i="1">
-                        <a:solidFill>
-                          <a:srgbClr val="0000FF"/>
-                        </a:solidFill>
-                        <a:latin typeface="Cambria Math"/>
-                      </a:rPr>
-                      <m:t>𝑴𝒂𝒈𝒏𝒊𝒕𝒖𝒅𝒆</m:t>
-                    </m:r>
-                  </m:oMath>
-                </a14:m>
-                <a:endParaRPr lang="en-US" sz="1900" dirty="0">
-                  <a:latin typeface="Arial" charset="0"/>
-                </a:endParaRPr>
-              </a:p>
-              <a:p>
-                <a:pPr lvl="1"/>
-                <a:r>
-                  <a:rPr lang="en-US" sz="2200" dirty="0">
-                    <a:latin typeface="Arial" charset="0"/>
-                  </a:rPr>
-                  <a:t>One’s complement (</a:t>
-                </a:r>
-                <a14:m>
-                  <m:oMath xmlns:m="http://schemas.openxmlformats.org/officeDocument/2006/math">
-                    <m:acc>
-                      <m:accPr>
-                        <m:chr m:val="̃"/>
-                        <m:ctrlPr>
-                          <a:rPr lang="en-US" sz="2400" b="1" i="1">
-                            <a:latin typeface="Cambria Math" panose="02040503050406030204" pitchFamily="18" charset="0"/>
-                          </a:rPr>
-                        </m:ctrlPr>
-                      </m:accPr>
-                      <m:e>
-                        <m:r>
-                          <a:rPr lang="en-US" sz="2400" b="1" i="1">
-                            <a:latin typeface="Cambria Math"/>
-                          </a:rPr>
-                          <m:t>𝜶</m:t>
-                        </m:r>
-                      </m:e>
-                    </m:acc>
-                  </m:oMath>
-                </a14:m>
-                <a:r>
-                  <a:rPr lang="en-US" sz="2200" dirty="0">
-                    <a:latin typeface="Arial" charset="0"/>
-                  </a:rPr>
-                  <a:t>)</a:t>
-                </a:r>
-              </a:p>
-              <a:p>
-                <a:pPr lvl="2"/>
-                <a14:m>
-                  <m:oMath xmlns:m="http://schemas.openxmlformats.org/officeDocument/2006/math">
-                    <m:r>
-                      <a:rPr lang="en-US" sz="1800" b="1" i="1">
-                        <a:latin typeface="Cambria Math"/>
-                      </a:rPr>
-                      <m:t>𝜶</m:t>
-                    </m:r>
-                    <m:r>
-                      <a:rPr lang="en-US" sz="1800" b="1" i="1">
-                        <a:latin typeface="Cambria Math"/>
-                      </a:rPr>
-                      <m:t>+</m:t>
-                    </m:r>
-                    <m:acc>
-                      <m:accPr>
-                        <m:chr m:val="̃"/>
-                        <m:ctrlPr>
-                          <a:rPr lang="en-US" sz="1800" b="1" i="1">
-                            <a:latin typeface="Cambria Math" panose="02040503050406030204" pitchFamily="18" charset="0"/>
-                          </a:rPr>
-                        </m:ctrlPr>
-                      </m:accPr>
-                      <m:e>
-                        <m:r>
-                          <a:rPr lang="en-US" sz="1800" b="1" i="1">
-                            <a:latin typeface="Cambria Math"/>
-                          </a:rPr>
-                          <m:t>𝜶</m:t>
-                        </m:r>
-                      </m:e>
-                    </m:acc>
-                    <m:r>
-                      <a:rPr lang="en-US" sz="1800" b="1" i="1">
-                        <a:latin typeface="Cambria Math"/>
-                      </a:rPr>
-                      <m:t>=</m:t>
-                    </m:r>
-                    <m:sSup>
-                      <m:sSupPr>
-                        <m:ctrlPr>
-                          <a:rPr lang="en-US" sz="1800" b="1" i="1">
-                            <a:latin typeface="Cambria Math" panose="02040503050406030204" pitchFamily="18" charset="0"/>
-                          </a:rPr>
-                        </m:ctrlPr>
-                      </m:sSupPr>
-                      <m:e>
-                        <m:r>
-                          <a:rPr lang="en-US" sz="1800" b="1" i="1">
-                            <a:latin typeface="Cambria Math"/>
-                          </a:rPr>
-                          <m:t>𝟐</m:t>
-                        </m:r>
-                      </m:e>
-                      <m:sup>
-                        <m:r>
-                          <a:rPr lang="en-US" sz="1800" b="1" i="1">
-                            <a:latin typeface="Cambria Math"/>
-                          </a:rPr>
-                          <m:t>𝒏</m:t>
-                        </m:r>
-                      </m:sup>
-                    </m:sSup>
-                    <m:r>
-                      <a:rPr lang="en-US" sz="1800" b="1" i="1">
-                        <a:latin typeface="Cambria Math"/>
-                      </a:rPr>
-                      <m:t>−</m:t>
-                    </m:r>
-                    <m:r>
-                      <a:rPr lang="en-US" sz="1800" b="1" i="1">
-                        <a:latin typeface="Cambria Math"/>
-                      </a:rPr>
-                      <m:t>𝟏</m:t>
-                    </m:r>
-                  </m:oMath>
-                </a14:m>
-                <a:endParaRPr lang="en-US" sz="1900" dirty="0">
-                  <a:latin typeface="Arial" charset="0"/>
-                </a:endParaRPr>
-              </a:p>
-              <a:p>
-                <a:pPr lvl="1"/>
-                <a:r>
-                  <a:rPr lang="en-US" sz="2200" dirty="0">
-                    <a:latin typeface="Arial" charset="0"/>
-                  </a:rPr>
-                  <a:t>Two’s complement (</a:t>
-                </a:r>
-                <a14:m>
-                  <m:oMath xmlns:m="http://schemas.openxmlformats.org/officeDocument/2006/math">
-                    <m:acc>
-                      <m:accPr>
-                        <m:chr m:val="̅"/>
-                        <m:ctrlPr>
-                          <a:rPr lang="en-US" sz="2400" b="1" i="1">
-                            <a:latin typeface="Cambria Math" panose="02040503050406030204" pitchFamily="18" charset="0"/>
-                          </a:rPr>
-                        </m:ctrlPr>
-                      </m:accPr>
-                      <m:e>
-                        <m:r>
-                          <a:rPr lang="en-US" sz="2400" b="1" i="1">
-                            <a:latin typeface="Cambria Math"/>
-                          </a:rPr>
-                          <m:t>𝜶</m:t>
-                        </m:r>
-                      </m:e>
-                    </m:acc>
-                  </m:oMath>
-                </a14:m>
-                <a:r>
-                  <a:rPr lang="en-US" sz="2200" dirty="0">
-                    <a:latin typeface="Arial" charset="0"/>
-                  </a:rPr>
-                  <a:t>)</a:t>
-                </a:r>
-              </a:p>
-              <a:p>
-                <a:pPr lvl="2"/>
-                <a14:m>
-                  <m:oMath xmlns:m="http://schemas.openxmlformats.org/officeDocument/2006/math">
-                    <m:r>
-                      <a:rPr lang="en-US" sz="1800" b="1" i="1">
-                        <a:latin typeface="Cambria Math"/>
-                      </a:rPr>
-                      <m:t>𝜶</m:t>
-                    </m:r>
-                    <m:r>
-                      <a:rPr lang="en-US" sz="1800" b="1" i="1">
-                        <a:latin typeface="Cambria Math"/>
-                      </a:rPr>
-                      <m:t>+</m:t>
-                    </m:r>
-                    <m:acc>
-                      <m:accPr>
-                        <m:chr m:val="̅"/>
-                        <m:ctrlPr>
-                          <a:rPr lang="en-US" sz="1800" b="1" i="1">
-                            <a:latin typeface="Cambria Math" panose="02040503050406030204" pitchFamily="18" charset="0"/>
-                          </a:rPr>
-                        </m:ctrlPr>
-                      </m:accPr>
-                      <m:e>
-                        <m:r>
-                          <a:rPr lang="en-US" sz="1800" b="1" i="1">
-                            <a:latin typeface="Cambria Math"/>
-                          </a:rPr>
-                          <m:t>𝜶</m:t>
-                        </m:r>
-                      </m:e>
-                    </m:acc>
-                    <m:r>
-                      <a:rPr lang="en-US" sz="1800" b="1" i="1">
-                        <a:latin typeface="Cambria Math"/>
-                      </a:rPr>
-                      <m:t>=</m:t>
-                    </m:r>
-                    <m:sSup>
-                      <m:sSupPr>
-                        <m:ctrlPr>
-                          <a:rPr lang="en-US" sz="1800" b="1" i="1">
-                            <a:latin typeface="Cambria Math" panose="02040503050406030204" pitchFamily="18" charset="0"/>
-                          </a:rPr>
-                        </m:ctrlPr>
-                      </m:sSupPr>
-                      <m:e>
-                        <m:r>
-                          <a:rPr lang="en-US" sz="1800" b="1" i="1">
-                            <a:latin typeface="Cambria Math"/>
-                          </a:rPr>
-                          <m:t>𝟐</m:t>
-                        </m:r>
-                      </m:e>
-                      <m:sup>
-                        <m:r>
-                          <a:rPr lang="en-US" sz="1800" b="1" i="1">
-                            <a:latin typeface="Cambria Math"/>
-                          </a:rPr>
-                          <m:t>𝒏</m:t>
-                        </m:r>
-                      </m:sup>
-                    </m:sSup>
-                  </m:oMath>
-                </a14:m>
-                <a:endParaRPr lang="en-US" sz="1800" dirty="0"/>
-              </a:p>
-              <a:p>
-                <a:pPr marL="594360" lvl="2" indent="0">
-                  <a:buNone/>
-                </a:pPr>
-                <a:endParaRPr lang="en-US" sz="1900" dirty="0">
-                  <a:latin typeface="Arial" charset="0"/>
-                </a:endParaRPr>
-              </a:p>
-            </p:txBody>
-          </p:sp>
-        </mc:Choice>
-        <mc:Fallback xmlns="">
-          <p:sp>
-            <p:nvSpPr>
-              <p:cNvPr id="185347" name="Rectangle 3"/>
-              <p:cNvSpPr>
-                <a:spLocks noGrp="1" noRot="1" noChangeAspect="1" noMove="1" noResize="1" noEditPoints="1" noAdjustHandles="1" noChangeArrowheads="1" noChangeShapeType="1" noTextEdit="1"/>
-              </p:cNvSpPr>
-              <p:nvPr>
-                <p:ph type="body" idx="1"/>
-              </p:nvPr>
-            </p:nvSpPr>
-            <p:spPr>
-              <a:xfrm>
-                <a:off x="457200" y="1295400"/>
-                <a:ext cx="7696200" cy="4572000"/>
-              </a:xfrm>
-              <a:blipFill rotWithShape="1">
-                <a:blip r:embed="rId3"/>
-                <a:stretch>
-                  <a:fillRect l="-633" t="-1200" r="-475"/>
-                </a:stretch>
-              </a:blipFill>
-              <a:extLst>
-                <a:ext uri="{909E8E84-426E-40DD-AFC4-6F175D3DCCD1}">
-                  <a14:hiddenFill xmlns:a14="http://schemas.microsoft.com/office/drawing/2010/main">
-                    <a:solidFill>
-                      <a:srgbClr val="E4F5FF"/>
-                    </a:solidFill>
-                  </a14:hiddenFill>
-                </a:ext>
-              </a:extLst>
-            </p:spPr>
-            <p:txBody>
-              <a:bodyPr/>
-              <a:lstStyle/>
-              <a:p>
-                <a:r>
-                  <a:rPr lang="en-US">
-                    <a:noFill/>
-                  </a:rPr>
-                  <a:t> </a:t>
-                </a:r>
-              </a:p>
-            </p:txBody>
-          </p:sp>
-        </mc:Fallback>
-      </mc:AlternateContent>
-      <p:sp>
-        <p:nvSpPr>
-          <p:cNvPr id="2" name="Title 1"/>
-          <p:cNvSpPr>
-            <a:spLocks noGrp="1"/>
-          </p:cNvSpPr>
-          <p:nvPr>
-            <p:ph type="title"/>
-          </p:nvPr>
-        </p:nvSpPr>
-        <p:spPr/>
-        <p:txBody>
-          <a:bodyPr>
-            <a:normAutofit/>
-          </a:bodyPr>
-          <a:lstStyle/>
-          <a:p>
-            <a:r>
-              <a:rPr lang="en-US" dirty="0"/>
-              <a:t>Signed Integer Representation</a:t>
-            </a:r>
-            <a:br>
-              <a:rPr lang="en-US" dirty="0"/>
-            </a:br>
-            <a:r>
-              <a:rPr lang="en-US" dirty="0"/>
-              <a:t>Overview</a:t>
-            </a:r>
-          </a:p>
-        </p:txBody>
-      </p:sp>
-      <mc:AlternateContent xmlns:mc="http://schemas.openxmlformats.org/markup-compatibility/2006" xmlns:a14="http://schemas.microsoft.com/office/drawing/2010/main">
-        <mc:Choice Requires="a14">
-          <p:graphicFrame>
-            <p:nvGraphicFramePr>
-              <p:cNvPr id="3" name="Table 2"/>
-              <p:cNvGraphicFramePr>
-                <a:graphicFrameLocks noGrp="1"/>
-              </p:cNvGraphicFramePr>
-              <p:nvPr/>
-            </p:nvGraphicFramePr>
-            <p:xfrm>
-              <a:off x="228600" y="4267200"/>
-              <a:ext cx="8763001" cy="1813560"/>
-            </p:xfrm>
-            <a:graphic>
-              <a:graphicData uri="http://schemas.openxmlformats.org/drawingml/2006/table">
-                <a:tbl>
-                  <a:tblPr firstRow="1" firstCol="1" bandRow="1">
-                    <a:tableStyleId>{5C22544A-7EE6-4342-B048-85BDC9FD1C3A}</a:tableStyleId>
-                  </a:tblPr>
-                  <a:tblGrid>
-                    <a:gridCol w="1447800">
-                      <a:extLst>
-                        <a:ext uri="{9D8B030D-6E8A-4147-A177-3AD203B41FA5}">
-                          <a16:colId xmlns:a16="http://schemas.microsoft.com/office/drawing/2014/main" val="20000"/>
-                        </a:ext>
-                      </a:extLst>
-                    </a:gridCol>
-                    <a:gridCol w="2667000">
-                      <a:extLst>
-                        <a:ext uri="{9D8B030D-6E8A-4147-A177-3AD203B41FA5}">
-                          <a16:colId xmlns:a16="http://schemas.microsoft.com/office/drawing/2014/main" val="20001"/>
-                        </a:ext>
-                      </a:extLst>
-                    </a:gridCol>
-                    <a:gridCol w="2590800">
-                      <a:extLst>
-                        <a:ext uri="{9D8B030D-6E8A-4147-A177-3AD203B41FA5}">
-                          <a16:colId xmlns:a16="http://schemas.microsoft.com/office/drawing/2014/main" val="20002"/>
-                        </a:ext>
-                      </a:extLst>
-                    </a:gridCol>
-                    <a:gridCol w="2057401">
-                      <a:extLst>
-                        <a:ext uri="{9D8B030D-6E8A-4147-A177-3AD203B41FA5}">
-                          <a16:colId xmlns:a16="http://schemas.microsoft.com/office/drawing/2014/main" val="20003"/>
-                        </a:ext>
-                      </a:extLst>
-                    </a:gridCol>
-                  </a:tblGrid>
-                  <a:tr h="0">
-                    <a:tc>
-                      <a:txBody>
-                        <a:bodyPr/>
-                        <a:lstStyle/>
-                        <a:p>
-                          <a:pPr marL="0" marR="0" algn="just">
-                            <a:spcBef>
-                              <a:spcPts val="0"/>
-                            </a:spcBef>
-                            <a:spcAft>
-                              <a:spcPts val="0"/>
-                            </a:spcAft>
-                          </a:pPr>
-                          <a:r>
-                            <a:rPr lang="en-US" sz="1800" dirty="0">
-                              <a:effectLst/>
-                            </a:rPr>
-                            <a:t> </a:t>
-                          </a:r>
-                          <a:endParaRPr lang="en-US" sz="1800" dirty="0">
-                            <a:effectLst/>
-                            <a:latin typeface="Palatino Linotype"/>
-                            <a:ea typeface="宋体"/>
-                            <a:cs typeface="Times New Roman"/>
-                          </a:endParaRPr>
-                        </a:p>
-                      </a:txBody>
-                      <a:tcPr marL="68580" marR="68580" marT="0" marB="0" anchor="ctr"/>
-                    </a:tc>
-                    <a:tc>
-                      <a:txBody>
-                        <a:bodyPr/>
-                        <a:lstStyle/>
-                        <a:p>
-                          <a:pPr marL="0" marR="0" algn="ctr">
-                            <a:spcBef>
-                              <a:spcPts val="0"/>
-                            </a:spcBef>
-                            <a:spcAft>
-                              <a:spcPts val="0"/>
-                            </a:spcAft>
-                          </a:pPr>
-                          <a:r>
-                            <a:rPr lang="en-US" sz="1800">
-                              <a:effectLst/>
-                            </a:rPr>
-                            <a:t>Sign-and-Magnitude</a:t>
-                          </a:r>
-                          <a:endParaRPr lang="en-US" sz="1800">
-                            <a:effectLst/>
-                            <a:latin typeface="Palatino Linotype"/>
-                            <a:ea typeface="宋体"/>
-                            <a:cs typeface="Times New Roman"/>
-                          </a:endParaRPr>
-                        </a:p>
-                      </a:txBody>
-                      <a:tcPr marL="68580" marR="68580" marT="0" marB="0" anchor="ctr"/>
-                    </a:tc>
-                    <a:tc>
-                      <a:txBody>
-                        <a:bodyPr/>
-                        <a:lstStyle/>
-                        <a:p>
-                          <a:pPr marL="0" marR="0" algn="ctr">
-                            <a:spcBef>
-                              <a:spcPts val="0"/>
-                            </a:spcBef>
-                            <a:spcAft>
-                              <a:spcPts val="0"/>
-                            </a:spcAft>
-                          </a:pPr>
-                          <a:r>
-                            <a:rPr lang="en-US" sz="1800" dirty="0">
-                              <a:effectLst/>
-                            </a:rPr>
-                            <a:t>One’s </a:t>
-                          </a:r>
-                        </a:p>
-                        <a:p>
-                          <a:pPr marL="0" marR="0" algn="ctr">
-                            <a:spcBef>
-                              <a:spcPts val="0"/>
-                            </a:spcBef>
-                            <a:spcAft>
-                              <a:spcPts val="0"/>
-                            </a:spcAft>
-                          </a:pPr>
-                          <a:r>
-                            <a:rPr lang="en-US" sz="1800" dirty="0">
-                              <a:effectLst/>
-                            </a:rPr>
-                            <a:t>Complement</a:t>
-                          </a:r>
-                          <a:endParaRPr lang="en-US" sz="1800" dirty="0">
-                            <a:effectLst/>
-                            <a:latin typeface="Palatino Linotype"/>
-                            <a:ea typeface="宋体"/>
-                            <a:cs typeface="Times New Roman"/>
-                          </a:endParaRPr>
-                        </a:p>
-                      </a:txBody>
-                      <a:tcPr marL="68580" marR="68580" marT="0" marB="0" anchor="ctr"/>
-                    </a:tc>
-                    <a:tc>
-                      <a:txBody>
-                        <a:bodyPr/>
-                        <a:lstStyle/>
-                        <a:p>
-                          <a:pPr marL="0" marR="0" algn="ctr">
-                            <a:spcBef>
-                              <a:spcPts val="0"/>
-                            </a:spcBef>
-                            <a:spcAft>
-                              <a:spcPts val="0"/>
-                            </a:spcAft>
-                          </a:pPr>
-                          <a:r>
-                            <a:rPr lang="en-US" sz="1800">
-                              <a:effectLst/>
-                            </a:rPr>
-                            <a:t>Two’s Complement</a:t>
-                          </a:r>
-                          <a:endParaRPr lang="en-US" sz="1800">
-                            <a:effectLst/>
-                            <a:latin typeface="Palatino Linotype"/>
-                            <a:ea typeface="宋体"/>
-                            <a:cs typeface="Times New Roman"/>
-                          </a:endParaRPr>
-                        </a:p>
-                      </a:txBody>
-                      <a:tcPr marL="68580" marR="68580" marT="0" marB="0" anchor="ctr"/>
-                    </a:tc>
-                    <a:extLst>
-                      <a:ext uri="{0D108BD9-81ED-4DB2-BD59-A6C34878D82A}">
-                        <a16:rowId xmlns:a16="http://schemas.microsoft.com/office/drawing/2014/main" val="10000"/>
-                      </a:ext>
-                    </a:extLst>
-                  </a:tr>
-                  <a:tr h="441960">
-                    <a:tc>
-                      <a:txBody>
-                        <a:bodyPr/>
-                        <a:lstStyle/>
-                        <a:p>
-                          <a:pPr marL="0" marR="0" algn="ctr">
-                            <a:spcBef>
-                              <a:spcPts val="0"/>
-                            </a:spcBef>
-                            <a:spcAft>
-                              <a:spcPts val="0"/>
-                            </a:spcAft>
-                          </a:pPr>
-                          <a:r>
-                            <a:rPr lang="en-US" sz="1800" dirty="0">
-                              <a:effectLst/>
-                            </a:rPr>
-                            <a:t>Range</a:t>
-                          </a:r>
-                          <a:endParaRPr lang="en-US" sz="1800" dirty="0">
-                            <a:effectLst/>
-                            <a:latin typeface="Palatino Linotype"/>
-                            <a:ea typeface="宋体"/>
-                            <a:cs typeface="Times New Roman"/>
-                          </a:endParaRPr>
-                        </a:p>
-                      </a:txBody>
-                      <a:tcPr marL="68580" marR="68580" marT="0" marB="0" anchor="ctr"/>
-                    </a:tc>
-                    <a:tc>
-                      <a:txBody>
-                        <a:bodyPr/>
-                        <a:lstStyle/>
-                        <a:p>
-                          <a:pPr marL="0" marR="0" algn="ctr">
-                            <a:spcBef>
-                              <a:spcPts val="0"/>
-                            </a:spcBef>
-                            <a:spcAft>
-                              <a:spcPts val="0"/>
-                            </a:spcAft>
-                          </a:pPr>
-                          <a14:m>
-                            <m:oMathPara xmlns:m="http://schemas.openxmlformats.org/officeDocument/2006/math">
-                              <m:oMathParaPr>
-                                <m:jc m:val="centerGroup"/>
-                              </m:oMathParaPr>
-                              <m:oMath xmlns:m="http://schemas.openxmlformats.org/officeDocument/2006/math">
-                                <m:r>
-                                  <a:rPr lang="en-US" sz="1800">
-                                    <a:effectLst/>
-                                    <a:latin typeface="Cambria Math"/>
-                                  </a:rPr>
-                                  <m:t>[−</m:t>
-                                </m:r>
-                                <m:sSup>
-                                  <m:sSupPr>
-                                    <m:ctrlPr>
-                                      <a:rPr lang="en-US" sz="1800" i="1">
-                                        <a:effectLst/>
-                                        <a:latin typeface="Cambria Math" panose="02040503050406030204" pitchFamily="18" charset="0"/>
-                                      </a:rPr>
-                                    </m:ctrlPr>
-                                  </m:sSupPr>
-                                  <m:e>
-                                    <m:r>
-                                      <a:rPr lang="en-US" sz="1800">
-                                        <a:effectLst/>
-                                        <a:latin typeface="Cambria Math"/>
-                                      </a:rPr>
-                                      <m:t>2</m:t>
-                                    </m:r>
-                                  </m:e>
-                                  <m:sup>
-                                    <m:r>
-                                      <a:rPr lang="en-US" sz="1800">
-                                        <a:effectLst/>
-                                        <a:latin typeface="Cambria Math"/>
-                                      </a:rPr>
-                                      <m:t>𝑛</m:t>
-                                    </m:r>
-                                    <m:r>
-                                      <a:rPr lang="en-US" sz="1800">
-                                        <a:effectLst/>
-                                        <a:latin typeface="Cambria Math"/>
-                                      </a:rPr>
-                                      <m:t>−1</m:t>
-                                    </m:r>
-                                  </m:sup>
-                                </m:sSup>
-                                <m:r>
-                                  <a:rPr lang="en-US" sz="1800">
-                                    <a:effectLst/>
-                                    <a:latin typeface="Cambria Math"/>
-                                  </a:rPr>
-                                  <m:t>+1, </m:t>
-                                </m:r>
-                                <m:sSup>
-                                  <m:sSupPr>
-                                    <m:ctrlPr>
-                                      <a:rPr lang="en-US" sz="1800" i="1">
-                                        <a:effectLst/>
-                                        <a:latin typeface="Cambria Math" panose="02040503050406030204" pitchFamily="18" charset="0"/>
-                                      </a:rPr>
-                                    </m:ctrlPr>
-                                  </m:sSupPr>
-                                  <m:e>
-                                    <m:r>
-                                      <a:rPr lang="en-US" sz="1800">
-                                        <a:effectLst/>
-                                        <a:latin typeface="Cambria Math"/>
-                                      </a:rPr>
-                                      <m:t>2</m:t>
-                                    </m:r>
-                                  </m:e>
-                                  <m:sup>
-                                    <m:r>
-                                      <a:rPr lang="en-US" sz="1800">
-                                        <a:effectLst/>
-                                        <a:latin typeface="Cambria Math"/>
-                                      </a:rPr>
-                                      <m:t>𝑛</m:t>
-                                    </m:r>
-                                    <m:r>
-                                      <a:rPr lang="en-US" sz="1800">
-                                        <a:effectLst/>
-                                        <a:latin typeface="Cambria Math"/>
-                                      </a:rPr>
-                                      <m:t>−1</m:t>
-                                    </m:r>
-                                  </m:sup>
-                                </m:sSup>
-                                <m:r>
-                                  <a:rPr lang="en-US" sz="1800">
-                                    <a:effectLst/>
-                                    <a:latin typeface="Cambria Math"/>
-                                  </a:rPr>
-                                  <m:t>−1]</m:t>
-                                </m:r>
-                              </m:oMath>
-                            </m:oMathPara>
-                          </a14:m>
-                          <a:endParaRPr lang="en-US" sz="1800" dirty="0">
-                            <a:effectLst/>
-                            <a:latin typeface="Palatino Linotype"/>
-                            <a:ea typeface="宋体"/>
-                            <a:cs typeface="Times New Roman"/>
-                          </a:endParaRPr>
-                        </a:p>
-                      </a:txBody>
-                      <a:tcPr marL="68580" marR="68580" marT="0" marB="0" anchor="ctr"/>
-                    </a:tc>
-                    <a:tc>
-                      <a:txBody>
-                        <a:bodyPr/>
-                        <a:lstStyle/>
-                        <a:p>
-                          <a:pPr marL="0" marR="0" algn="ctr">
-                            <a:spcBef>
-                              <a:spcPts val="0"/>
-                            </a:spcBef>
-                            <a:spcAft>
-                              <a:spcPts val="0"/>
-                            </a:spcAft>
-                          </a:pPr>
-                          <a14:m>
-                            <m:oMathPara xmlns:m="http://schemas.openxmlformats.org/officeDocument/2006/math">
-                              <m:oMathParaPr>
-                                <m:jc m:val="centerGroup"/>
-                              </m:oMathParaPr>
-                              <m:oMath xmlns:m="http://schemas.openxmlformats.org/officeDocument/2006/math">
-                                <m:r>
-                                  <a:rPr lang="en-US" sz="1800">
-                                    <a:effectLst/>
-                                    <a:latin typeface="Cambria Math"/>
-                                  </a:rPr>
-                                  <m:t>[−</m:t>
-                                </m:r>
-                                <m:sSup>
-                                  <m:sSupPr>
-                                    <m:ctrlPr>
-                                      <a:rPr lang="en-US" sz="1800" i="1">
-                                        <a:effectLst/>
-                                        <a:latin typeface="Cambria Math" panose="02040503050406030204" pitchFamily="18" charset="0"/>
-                                      </a:rPr>
-                                    </m:ctrlPr>
-                                  </m:sSupPr>
-                                  <m:e>
-                                    <m:r>
-                                      <a:rPr lang="en-US" sz="1800">
-                                        <a:effectLst/>
-                                        <a:latin typeface="Cambria Math"/>
-                                      </a:rPr>
-                                      <m:t>2</m:t>
-                                    </m:r>
-                                  </m:e>
-                                  <m:sup>
-                                    <m:r>
-                                      <a:rPr lang="en-US" sz="1800">
-                                        <a:effectLst/>
-                                        <a:latin typeface="Cambria Math"/>
-                                      </a:rPr>
-                                      <m:t>𝑛</m:t>
-                                    </m:r>
-                                    <m:r>
-                                      <a:rPr lang="en-US" sz="1800">
-                                        <a:effectLst/>
-                                        <a:latin typeface="Cambria Math"/>
-                                      </a:rPr>
-                                      <m:t>−1</m:t>
-                                    </m:r>
-                                  </m:sup>
-                                </m:sSup>
-                                <m:r>
-                                  <a:rPr lang="en-US" sz="1800">
-                                    <a:effectLst/>
-                                    <a:latin typeface="Cambria Math"/>
-                                  </a:rPr>
-                                  <m:t>+1, </m:t>
-                                </m:r>
-                                <m:sSup>
-                                  <m:sSupPr>
-                                    <m:ctrlPr>
-                                      <a:rPr lang="en-US" sz="1800" i="1">
-                                        <a:effectLst/>
-                                        <a:latin typeface="Cambria Math" panose="02040503050406030204" pitchFamily="18" charset="0"/>
-                                      </a:rPr>
-                                    </m:ctrlPr>
-                                  </m:sSupPr>
-                                  <m:e>
-                                    <m:r>
-                                      <a:rPr lang="en-US" sz="1800">
-                                        <a:effectLst/>
-                                        <a:latin typeface="Cambria Math"/>
-                                      </a:rPr>
-                                      <m:t>2</m:t>
-                                    </m:r>
-                                  </m:e>
-                                  <m:sup>
-                                    <m:r>
-                                      <a:rPr lang="en-US" sz="1800">
-                                        <a:effectLst/>
-                                        <a:latin typeface="Cambria Math"/>
-                                      </a:rPr>
-                                      <m:t>𝑛</m:t>
-                                    </m:r>
-                                    <m:r>
-                                      <a:rPr lang="en-US" sz="1800">
-                                        <a:effectLst/>
-                                        <a:latin typeface="Cambria Math"/>
-                                      </a:rPr>
-                                      <m:t>−1</m:t>
-                                    </m:r>
-                                  </m:sup>
-                                </m:sSup>
-                                <m:r>
-                                  <a:rPr lang="en-US" sz="1800">
-                                    <a:effectLst/>
-                                    <a:latin typeface="Cambria Math"/>
-                                  </a:rPr>
-                                  <m:t>−1]</m:t>
-                                </m:r>
-                              </m:oMath>
-                            </m:oMathPara>
-                          </a14:m>
-                          <a:endParaRPr lang="en-US" sz="1800" dirty="0">
-                            <a:effectLst/>
-                            <a:latin typeface="Palatino Linotype"/>
-                            <a:ea typeface="宋体"/>
-                            <a:cs typeface="Times New Roman"/>
-                          </a:endParaRPr>
-                        </a:p>
-                      </a:txBody>
-                      <a:tcPr marL="68580" marR="68580" marT="0" marB="0" anchor="ctr"/>
-                    </a:tc>
-                    <a:tc>
-                      <a:txBody>
-                        <a:bodyPr/>
-                        <a:lstStyle/>
-                        <a:p>
-                          <a:pPr marL="0" marR="0" algn="ctr">
-                            <a:spcBef>
-                              <a:spcPts val="0"/>
-                            </a:spcBef>
-                            <a:spcAft>
-                              <a:spcPts val="0"/>
-                            </a:spcAft>
-                          </a:pPr>
-                          <a14:m>
-                            <m:oMathPara xmlns:m="http://schemas.openxmlformats.org/officeDocument/2006/math">
-                              <m:oMathParaPr>
-                                <m:jc m:val="centerGroup"/>
-                              </m:oMathParaPr>
-                              <m:oMath xmlns:m="http://schemas.openxmlformats.org/officeDocument/2006/math">
-                                <m:r>
-                                  <a:rPr lang="en-US" sz="1800">
-                                    <a:effectLst/>
-                                    <a:latin typeface="Cambria Math"/>
-                                  </a:rPr>
-                                  <m:t> [−</m:t>
-                                </m:r>
-                                <m:sSup>
-                                  <m:sSupPr>
-                                    <m:ctrlPr>
-                                      <a:rPr lang="en-US" sz="1800" i="1">
-                                        <a:effectLst/>
-                                        <a:latin typeface="Cambria Math" panose="02040503050406030204" pitchFamily="18" charset="0"/>
-                                      </a:rPr>
-                                    </m:ctrlPr>
-                                  </m:sSupPr>
-                                  <m:e>
-                                    <m:r>
-                                      <a:rPr lang="en-US" sz="1800">
-                                        <a:effectLst/>
-                                        <a:latin typeface="Cambria Math"/>
-                                      </a:rPr>
-                                      <m:t>2</m:t>
-                                    </m:r>
-                                  </m:e>
-                                  <m:sup>
-                                    <m:r>
-                                      <a:rPr lang="en-US" sz="1800">
-                                        <a:effectLst/>
-                                        <a:latin typeface="Cambria Math"/>
-                                      </a:rPr>
-                                      <m:t>𝑛</m:t>
-                                    </m:r>
-                                    <m:r>
-                                      <a:rPr lang="en-US" sz="1800">
-                                        <a:effectLst/>
-                                        <a:latin typeface="Cambria Math"/>
-                                      </a:rPr>
-                                      <m:t>−1</m:t>
-                                    </m:r>
-                                  </m:sup>
-                                </m:sSup>
-                                <m:r>
-                                  <a:rPr lang="en-US" sz="1800">
-                                    <a:effectLst/>
-                                    <a:latin typeface="Cambria Math"/>
-                                  </a:rPr>
-                                  <m:t>, </m:t>
-                                </m:r>
-                                <m:sSup>
-                                  <m:sSupPr>
-                                    <m:ctrlPr>
-                                      <a:rPr lang="en-US" sz="1800" i="1">
-                                        <a:effectLst/>
-                                        <a:latin typeface="Cambria Math" panose="02040503050406030204" pitchFamily="18" charset="0"/>
-                                      </a:rPr>
-                                    </m:ctrlPr>
-                                  </m:sSupPr>
-                                  <m:e>
-                                    <m:r>
-                                      <a:rPr lang="en-US" sz="1800">
-                                        <a:effectLst/>
-                                        <a:latin typeface="Cambria Math"/>
-                                      </a:rPr>
-                                      <m:t>2</m:t>
-                                    </m:r>
-                                  </m:e>
-                                  <m:sup>
-                                    <m:r>
-                                      <a:rPr lang="en-US" sz="1800">
-                                        <a:effectLst/>
-                                        <a:latin typeface="Cambria Math"/>
-                                      </a:rPr>
-                                      <m:t>𝑛</m:t>
-                                    </m:r>
-                                    <m:r>
-                                      <a:rPr lang="en-US" sz="1800">
-                                        <a:effectLst/>
-                                        <a:latin typeface="Cambria Math"/>
-                                      </a:rPr>
-                                      <m:t>−1</m:t>
-                                    </m:r>
-                                  </m:sup>
-                                </m:sSup>
-                                <m:r>
-                                  <a:rPr lang="en-US" sz="1800">
-                                    <a:effectLst/>
-                                    <a:latin typeface="Cambria Math"/>
-                                  </a:rPr>
-                                  <m:t>−1]</m:t>
-                                </m:r>
-                              </m:oMath>
-                            </m:oMathPara>
-                          </a14:m>
-                          <a:endParaRPr lang="en-US" sz="1800" dirty="0">
-                            <a:effectLst/>
-                            <a:latin typeface="Palatino Linotype"/>
-                            <a:ea typeface="宋体"/>
-                            <a:cs typeface="Times New Roman"/>
-                          </a:endParaRPr>
-                        </a:p>
-                      </a:txBody>
-                      <a:tcPr marL="68580" marR="68580" marT="0" marB="0" anchor="ctr"/>
-                    </a:tc>
-                    <a:extLst>
-                      <a:ext uri="{0D108BD9-81ED-4DB2-BD59-A6C34878D82A}">
-                        <a16:rowId xmlns:a16="http://schemas.microsoft.com/office/drawing/2014/main" val="10001"/>
-                      </a:ext>
-                    </a:extLst>
-                  </a:tr>
-                  <a:tr h="0">
-                    <a:tc>
-                      <a:txBody>
-                        <a:bodyPr/>
-                        <a:lstStyle/>
-                        <a:p>
-                          <a:pPr marL="0" marR="0" algn="ctr">
-                            <a:spcBef>
-                              <a:spcPts val="0"/>
-                            </a:spcBef>
-                            <a:spcAft>
-                              <a:spcPts val="0"/>
-                            </a:spcAft>
-                          </a:pPr>
-                          <a:r>
-                            <a:rPr lang="en-US" sz="1800">
-                              <a:effectLst/>
-                            </a:rPr>
-                            <a:t>Zero</a:t>
-                          </a:r>
-                          <a:endParaRPr lang="en-US" sz="1800">
-                            <a:effectLst/>
-                            <a:latin typeface="Palatino Linotype"/>
-                            <a:ea typeface="宋体"/>
-                            <a:cs typeface="Times New Roman"/>
-                          </a:endParaRPr>
-                        </a:p>
-                      </a:txBody>
-                      <a:tcPr marL="68580" marR="68580" marT="0" marB="0" anchor="ctr"/>
-                    </a:tc>
-                    <a:tc>
-                      <a:txBody>
-                        <a:bodyPr/>
-                        <a:lstStyle/>
-                        <a:p>
-                          <a:pPr marL="0" marR="0" algn="ctr">
-                            <a:spcBef>
-                              <a:spcPts val="0"/>
-                            </a:spcBef>
-                            <a:spcAft>
-                              <a:spcPts val="0"/>
-                            </a:spcAft>
-                          </a:pPr>
-                          <a:r>
-                            <a:rPr lang="en-US" sz="1800" dirty="0">
-                              <a:effectLst/>
-                            </a:rPr>
-                            <a:t>Two zeroes (</a:t>
-                          </a:r>
-                          <a14:m>
-                            <m:oMath xmlns:m="http://schemas.openxmlformats.org/officeDocument/2006/math">
-                              <m:r>
-                                <a:rPr lang="en-US" sz="1800">
-                                  <a:effectLst/>
-                                  <a:latin typeface="Cambria Math"/>
-                                </a:rPr>
-                                <m:t>±0</m:t>
-                              </m:r>
-                            </m:oMath>
-                          </a14:m>
-                          <a:r>
-                            <a:rPr lang="en-US" sz="1800" dirty="0">
-                              <a:effectLst/>
-                            </a:rPr>
-                            <a:t>)</a:t>
-                          </a:r>
-                          <a:endParaRPr lang="en-US" sz="1800" dirty="0">
-                            <a:effectLst/>
-                            <a:latin typeface="Palatino Linotype"/>
-                            <a:ea typeface="宋体"/>
-                            <a:cs typeface="Times New Roman"/>
-                          </a:endParaRPr>
-                        </a:p>
-                      </a:txBody>
-                      <a:tcPr marL="68580" marR="68580" marT="0" marB="0" anchor="ctr"/>
-                    </a:tc>
-                    <a:tc>
-                      <a:txBody>
-                        <a:bodyPr/>
-                        <a:lstStyle/>
-                        <a:p>
-                          <a:pPr marL="0" marR="0" algn="ctr">
-                            <a:spcBef>
-                              <a:spcPts val="0"/>
-                            </a:spcBef>
-                            <a:spcAft>
-                              <a:spcPts val="0"/>
-                            </a:spcAft>
-                          </a:pPr>
-                          <a:r>
-                            <a:rPr lang="en-US" sz="1800">
-                              <a:effectLst/>
-                            </a:rPr>
-                            <a:t>Two zeroes (</a:t>
-                          </a:r>
-                          <a14:m>
-                            <m:oMath xmlns:m="http://schemas.openxmlformats.org/officeDocument/2006/math">
-                              <m:r>
-                                <a:rPr lang="en-US" sz="1800">
-                                  <a:effectLst/>
-                                  <a:latin typeface="Cambria Math"/>
-                                </a:rPr>
-                                <m:t>±0</m:t>
-                              </m:r>
-                            </m:oMath>
-                          </a14:m>
-                          <a:r>
-                            <a:rPr lang="en-US" sz="1800">
-                              <a:effectLst/>
-                            </a:rPr>
-                            <a:t>)</a:t>
-                          </a:r>
-                          <a:endParaRPr lang="en-US" sz="1800">
-                            <a:effectLst/>
-                            <a:latin typeface="Palatino Linotype"/>
-                            <a:ea typeface="宋体"/>
-                            <a:cs typeface="Times New Roman"/>
-                          </a:endParaRPr>
-                        </a:p>
-                      </a:txBody>
-                      <a:tcPr marL="68580" marR="68580" marT="0" marB="0" anchor="ctr"/>
-                    </a:tc>
-                    <a:tc>
-                      <a:txBody>
-                        <a:bodyPr/>
-                        <a:lstStyle/>
-                        <a:p>
-                          <a:pPr marL="0" marR="0" algn="ctr">
-                            <a:spcBef>
-                              <a:spcPts val="0"/>
-                            </a:spcBef>
-                            <a:spcAft>
-                              <a:spcPts val="0"/>
-                            </a:spcAft>
-                          </a:pPr>
-                          <a:r>
-                            <a:rPr lang="en-US" sz="1800">
-                              <a:effectLst/>
-                            </a:rPr>
-                            <a:t>One zero</a:t>
-                          </a:r>
-                          <a:endParaRPr lang="en-US" sz="1800">
-                            <a:effectLst/>
-                            <a:latin typeface="Palatino Linotype"/>
-                            <a:ea typeface="宋体"/>
-                            <a:cs typeface="Times New Roman"/>
-                          </a:endParaRPr>
-                        </a:p>
-                      </a:txBody>
-                      <a:tcPr marL="68580" marR="68580" marT="0" marB="0" anchor="ctr"/>
-                    </a:tc>
-                    <a:extLst>
-                      <a:ext uri="{0D108BD9-81ED-4DB2-BD59-A6C34878D82A}">
-                        <a16:rowId xmlns:a16="http://schemas.microsoft.com/office/drawing/2014/main" val="10002"/>
-                      </a:ext>
-                    </a:extLst>
-                  </a:tr>
-                  <a:tr h="0">
-                    <a:tc>
-                      <a:txBody>
-                        <a:bodyPr/>
-                        <a:lstStyle/>
-                        <a:p>
-                          <a:pPr marL="0" marR="0" algn="ctr">
-                            <a:spcBef>
-                              <a:spcPts val="0"/>
-                            </a:spcBef>
-                            <a:spcAft>
-                              <a:spcPts val="0"/>
-                            </a:spcAft>
-                          </a:pPr>
-                          <a:r>
-                            <a:rPr lang="en-US" sz="1800">
-                              <a:effectLst/>
-                            </a:rPr>
-                            <a:t>Unique Numbers</a:t>
-                          </a:r>
-                          <a:endParaRPr lang="en-US" sz="1800">
-                            <a:effectLst/>
-                            <a:latin typeface="Palatino Linotype"/>
-                            <a:ea typeface="宋体"/>
-                            <a:cs typeface="Times New Roman"/>
-                          </a:endParaRPr>
-                        </a:p>
-                      </a:txBody>
-                      <a:tcPr marL="68580" marR="68580" marT="0" marB="0" anchor="ctr"/>
-                    </a:tc>
-                    <a:tc>
-                      <a:txBody>
-                        <a:bodyPr/>
-                        <a:lstStyle/>
-                        <a:p>
-                          <a:pPr marL="0" marR="0" algn="ctr">
-                            <a:spcBef>
-                              <a:spcPts val="0"/>
-                            </a:spcBef>
-                            <a:spcAft>
-                              <a:spcPts val="0"/>
-                            </a:spcAft>
-                          </a:pPr>
-                          <a14:m>
-                            <m:oMathPara xmlns:m="http://schemas.openxmlformats.org/officeDocument/2006/math">
-                              <m:oMathParaPr>
-                                <m:jc m:val="centerGroup"/>
-                              </m:oMathParaPr>
-                              <m:oMath xmlns:m="http://schemas.openxmlformats.org/officeDocument/2006/math">
-                                <m:sSup>
-                                  <m:sSupPr>
-                                    <m:ctrlPr>
-                                      <a:rPr lang="en-US" sz="1800" i="1">
-                                        <a:effectLst/>
-                                        <a:latin typeface="Cambria Math" panose="02040503050406030204" pitchFamily="18" charset="0"/>
-                                      </a:rPr>
-                                    </m:ctrlPr>
-                                  </m:sSupPr>
-                                  <m:e>
-                                    <m:r>
-                                      <a:rPr lang="en-US" sz="1800">
-                                        <a:effectLst/>
-                                        <a:latin typeface="Cambria Math"/>
-                                      </a:rPr>
-                                      <m:t>2</m:t>
-                                    </m:r>
-                                  </m:e>
-                                  <m:sup>
-                                    <m:r>
-                                      <a:rPr lang="en-US" sz="1800">
-                                        <a:effectLst/>
-                                        <a:latin typeface="Cambria Math"/>
-                                      </a:rPr>
-                                      <m:t>𝑛</m:t>
-                                    </m:r>
-                                  </m:sup>
-                                </m:sSup>
-                                <m:r>
-                                  <a:rPr lang="en-US" sz="1800">
-                                    <a:effectLst/>
-                                    <a:latin typeface="Cambria Math"/>
-                                  </a:rPr>
-                                  <m:t>−1</m:t>
-                                </m:r>
-                              </m:oMath>
-                            </m:oMathPara>
-                          </a14:m>
-                          <a:endParaRPr lang="en-US" sz="1800" dirty="0">
-                            <a:effectLst/>
-                            <a:latin typeface="Palatino Linotype"/>
-                            <a:ea typeface="宋体"/>
-                            <a:cs typeface="Times New Roman"/>
-                          </a:endParaRPr>
-                        </a:p>
-                      </a:txBody>
-                      <a:tcPr marL="68580" marR="68580" marT="0" marB="0" anchor="ctr"/>
-                    </a:tc>
-                    <a:tc>
-                      <a:txBody>
-                        <a:bodyPr/>
-                        <a:lstStyle/>
-                        <a:p>
-                          <a:pPr marL="0" marR="0" algn="ctr">
-                            <a:spcBef>
-                              <a:spcPts val="0"/>
-                            </a:spcBef>
-                            <a:spcAft>
-                              <a:spcPts val="0"/>
-                            </a:spcAft>
-                          </a:pPr>
-                          <a14:m>
-                            <m:oMathPara xmlns:m="http://schemas.openxmlformats.org/officeDocument/2006/math">
-                              <m:oMathParaPr>
-                                <m:jc m:val="centerGroup"/>
-                              </m:oMathParaPr>
-                              <m:oMath xmlns:m="http://schemas.openxmlformats.org/officeDocument/2006/math">
-                                <m:sSup>
-                                  <m:sSupPr>
-                                    <m:ctrlPr>
-                                      <a:rPr lang="en-US" sz="1800" i="1">
-                                        <a:effectLst/>
-                                        <a:latin typeface="Cambria Math" panose="02040503050406030204" pitchFamily="18" charset="0"/>
-                                      </a:rPr>
-                                    </m:ctrlPr>
-                                  </m:sSupPr>
-                                  <m:e>
-                                    <m:r>
-                                      <a:rPr lang="en-US" sz="1800">
-                                        <a:effectLst/>
-                                        <a:latin typeface="Cambria Math"/>
-                                      </a:rPr>
-                                      <m:t>2</m:t>
-                                    </m:r>
-                                  </m:e>
-                                  <m:sup>
-                                    <m:r>
-                                      <a:rPr lang="en-US" sz="1800">
-                                        <a:effectLst/>
-                                        <a:latin typeface="Cambria Math"/>
-                                      </a:rPr>
-                                      <m:t>𝑛</m:t>
-                                    </m:r>
-                                  </m:sup>
-                                </m:sSup>
-                                <m:r>
-                                  <a:rPr lang="en-US" sz="1800">
-                                    <a:effectLst/>
-                                    <a:latin typeface="Cambria Math"/>
-                                  </a:rPr>
-                                  <m:t>−1</m:t>
-                                </m:r>
-                              </m:oMath>
-                            </m:oMathPara>
-                          </a14:m>
-                          <a:endParaRPr lang="en-US" sz="1800" dirty="0">
-                            <a:effectLst/>
-                            <a:latin typeface="Palatino Linotype"/>
-                            <a:ea typeface="宋体"/>
-                            <a:cs typeface="Times New Roman"/>
-                          </a:endParaRPr>
-                        </a:p>
-                      </a:txBody>
-                      <a:tcPr marL="68580" marR="68580" marT="0" marB="0" anchor="ctr"/>
-                    </a:tc>
-                    <a:tc>
-                      <a:txBody>
-                        <a:bodyPr/>
-                        <a:lstStyle/>
-                        <a:p>
-                          <a:pPr marL="0" marR="0" algn="ctr">
-                            <a:spcBef>
-                              <a:spcPts val="0"/>
-                            </a:spcBef>
-                            <a:spcAft>
-                              <a:spcPts val="0"/>
-                            </a:spcAft>
-                          </a:pPr>
-                          <a14:m>
-                            <m:oMathPara xmlns:m="http://schemas.openxmlformats.org/officeDocument/2006/math">
-                              <m:oMathParaPr>
-                                <m:jc m:val="centerGroup"/>
-                              </m:oMathParaPr>
-                              <m:oMath xmlns:m="http://schemas.openxmlformats.org/officeDocument/2006/math">
-                                <m:sSup>
-                                  <m:sSupPr>
-                                    <m:ctrlPr>
-                                      <a:rPr lang="en-US" sz="1800" i="1">
-                                        <a:effectLst/>
-                                        <a:latin typeface="Cambria Math" panose="02040503050406030204" pitchFamily="18" charset="0"/>
-                                      </a:rPr>
-                                    </m:ctrlPr>
-                                  </m:sSupPr>
-                                  <m:e>
-                                    <m:r>
-                                      <a:rPr lang="en-US" sz="1800">
-                                        <a:effectLst/>
-                                        <a:latin typeface="Cambria Math"/>
-                                      </a:rPr>
-                                      <m:t>2</m:t>
-                                    </m:r>
-                                  </m:e>
-                                  <m:sup>
-                                    <m:r>
-                                      <a:rPr lang="en-US" sz="1800">
-                                        <a:effectLst/>
-                                        <a:latin typeface="Cambria Math"/>
-                                      </a:rPr>
-                                      <m:t>𝑛</m:t>
-                                    </m:r>
-                                  </m:sup>
-                                </m:sSup>
-                              </m:oMath>
-                            </m:oMathPara>
-                          </a14:m>
-                          <a:endParaRPr lang="en-US" sz="1800" dirty="0">
-                            <a:effectLst/>
-                            <a:latin typeface="Palatino Linotype"/>
-                            <a:ea typeface="宋体"/>
-                            <a:cs typeface="Times New Roman"/>
-                          </a:endParaRPr>
-                        </a:p>
-                      </a:txBody>
-                      <a:tcPr marL="68580" marR="68580" marT="0" marB="0" anchor="ctr"/>
-                    </a:tc>
-                    <a:extLst>
-                      <a:ext uri="{0D108BD9-81ED-4DB2-BD59-A6C34878D82A}">
-                        <a16:rowId xmlns:a16="http://schemas.microsoft.com/office/drawing/2014/main" val="10003"/>
-                      </a:ext>
-                    </a:extLst>
-                  </a:tr>
-                </a:tbl>
-              </a:graphicData>
-            </a:graphic>
-          </p:graphicFrame>
-        </mc:Choice>
-        <mc:Fallback xmlns="">
-          <p:graphicFrame>
-            <p:nvGraphicFramePr>
-              <p:cNvPr id="3" name="Table 2"/>
-              <p:cNvGraphicFramePr>
-                <a:graphicFrameLocks noGrp="1"/>
-              </p:cNvGraphicFramePr>
-              <p:nvPr>
-                <p:extLst>
-                  <p:ext uri="{D42A27DB-BD31-4B8C-83A1-F6EECF244321}">
-                    <p14:modId xmlns:p14="http://schemas.microsoft.com/office/powerpoint/2010/main" val="2713996848"/>
-                  </p:ext>
-                </p:extLst>
-              </p:nvPr>
-            </p:nvGraphicFramePr>
-            <p:xfrm>
-              <a:off x="228600" y="4267200"/>
-              <a:ext cx="8763001" cy="1813560"/>
-            </p:xfrm>
-            <a:graphic>
-              <a:graphicData uri="http://schemas.openxmlformats.org/drawingml/2006/table">
-                <a:tbl>
-                  <a:tblPr firstRow="1" firstCol="1" bandRow="1">
-                    <a:tableStyleId>{5C22544A-7EE6-4342-B048-85BDC9FD1C3A}</a:tableStyleId>
-                  </a:tblPr>
-                  <a:tblGrid>
-                    <a:gridCol w="1447800"/>
-                    <a:gridCol w="2667000"/>
-                    <a:gridCol w="2590800"/>
-                    <a:gridCol w="2057401"/>
-                  </a:tblGrid>
-                  <a:tr h="548640">
-                    <a:tc>
-                      <a:txBody>
-                        <a:bodyPr/>
-                        <a:lstStyle/>
-                        <a:p>
-                          <a:pPr marL="0" marR="0" algn="just">
-                            <a:spcBef>
-                              <a:spcPts val="0"/>
-                            </a:spcBef>
-                            <a:spcAft>
-                              <a:spcPts val="0"/>
-                            </a:spcAft>
-                          </a:pPr>
-                          <a:r>
-                            <a:rPr lang="en-US" sz="1800" dirty="0">
-                              <a:effectLst/>
-                            </a:rPr>
-                            <a:t> </a:t>
-                          </a:r>
-                          <a:endParaRPr lang="en-US" sz="1800" dirty="0">
-                            <a:effectLst/>
-                            <a:latin typeface="Palatino Linotype"/>
-                            <a:ea typeface="宋体"/>
-                            <a:cs typeface="Times New Roman"/>
-                          </a:endParaRPr>
-                        </a:p>
-                      </a:txBody>
-                      <a:tcPr marL="68580" marR="68580" marT="0" marB="0" anchor="ctr"/>
-                    </a:tc>
-                    <a:tc>
-                      <a:txBody>
-                        <a:bodyPr/>
-                        <a:lstStyle/>
-                        <a:p>
-                          <a:pPr marL="0" marR="0" algn="ctr">
-                            <a:spcBef>
-                              <a:spcPts val="0"/>
-                            </a:spcBef>
-                            <a:spcAft>
-                              <a:spcPts val="0"/>
-                            </a:spcAft>
-                          </a:pPr>
-                          <a:r>
-                            <a:rPr lang="en-US" sz="1800">
-                              <a:effectLst/>
-                            </a:rPr>
-                            <a:t>Sign-and-Magnitude</a:t>
-                          </a:r>
-                          <a:endParaRPr lang="en-US" sz="1800">
-                            <a:effectLst/>
-                            <a:latin typeface="Palatino Linotype"/>
-                            <a:ea typeface="宋体"/>
-                            <a:cs typeface="Times New Roman"/>
-                          </a:endParaRPr>
-                        </a:p>
-                      </a:txBody>
-                      <a:tcPr marL="68580" marR="68580" marT="0" marB="0" anchor="ctr"/>
-                    </a:tc>
-                    <a:tc>
-                      <a:txBody>
-                        <a:bodyPr/>
-                        <a:lstStyle/>
-                        <a:p>
-                          <a:pPr marL="0" marR="0" algn="ctr">
-                            <a:spcBef>
-                              <a:spcPts val="0"/>
-                            </a:spcBef>
-                            <a:spcAft>
-                              <a:spcPts val="0"/>
-                            </a:spcAft>
-                          </a:pPr>
-                          <a:r>
-                            <a:rPr lang="en-US" sz="1800" dirty="0">
-                              <a:effectLst/>
-                            </a:rPr>
-                            <a:t>One’s </a:t>
-                          </a:r>
-                          <a:endParaRPr lang="en-US" sz="1800" dirty="0" smtClean="0">
-                            <a:effectLst/>
-                          </a:endParaRPr>
-                        </a:p>
-                        <a:p>
-                          <a:pPr marL="0" marR="0" algn="ctr">
-                            <a:spcBef>
-                              <a:spcPts val="0"/>
-                            </a:spcBef>
-                            <a:spcAft>
-                              <a:spcPts val="0"/>
-                            </a:spcAft>
-                          </a:pPr>
-                          <a:r>
-                            <a:rPr lang="en-US" sz="1800" dirty="0" smtClean="0">
-                              <a:effectLst/>
-                            </a:rPr>
-                            <a:t>Complement</a:t>
-                          </a:r>
-                          <a:endParaRPr lang="en-US" sz="1800" dirty="0">
-                            <a:effectLst/>
-                            <a:latin typeface="Palatino Linotype"/>
-                            <a:ea typeface="宋体"/>
-                            <a:cs typeface="Times New Roman"/>
-                          </a:endParaRPr>
-                        </a:p>
-                      </a:txBody>
-                      <a:tcPr marL="68580" marR="68580" marT="0" marB="0" anchor="ctr"/>
-                    </a:tc>
-                    <a:tc>
-                      <a:txBody>
-                        <a:bodyPr/>
-                        <a:lstStyle/>
-                        <a:p>
-                          <a:pPr marL="0" marR="0" algn="ctr">
-                            <a:spcBef>
-                              <a:spcPts val="0"/>
-                            </a:spcBef>
-                            <a:spcAft>
-                              <a:spcPts val="0"/>
-                            </a:spcAft>
-                          </a:pPr>
-                          <a:r>
-                            <a:rPr lang="en-US" sz="1800">
-                              <a:effectLst/>
-                            </a:rPr>
-                            <a:t>Two’s Complement</a:t>
-                          </a:r>
-                          <a:endParaRPr lang="en-US" sz="1800">
-                            <a:effectLst/>
-                            <a:latin typeface="Palatino Linotype"/>
-                            <a:ea typeface="宋体"/>
-                            <a:cs typeface="Times New Roman"/>
-                          </a:endParaRPr>
-                        </a:p>
-                      </a:txBody>
-                      <a:tcPr marL="68580" marR="68580" marT="0" marB="0" anchor="ctr"/>
-                    </a:tc>
-                  </a:tr>
-                  <a:tr h="441960">
-                    <a:tc>
-                      <a:txBody>
-                        <a:bodyPr/>
-                        <a:lstStyle/>
-                        <a:p>
-                          <a:pPr marL="0" marR="0" algn="ctr">
-                            <a:spcBef>
-                              <a:spcPts val="0"/>
-                            </a:spcBef>
-                            <a:spcAft>
-                              <a:spcPts val="0"/>
-                            </a:spcAft>
-                          </a:pPr>
-                          <a:r>
-                            <a:rPr lang="en-US" sz="1800" dirty="0">
-                              <a:effectLst/>
-                            </a:rPr>
-                            <a:t>Range</a:t>
-                          </a:r>
-                          <a:endParaRPr lang="en-US" sz="1800" dirty="0">
-                            <a:effectLst/>
-                            <a:latin typeface="Palatino Linotype"/>
-                            <a:ea typeface="宋体"/>
-                            <a:cs typeface="Times New Roman"/>
-                          </a:endParaRPr>
-                        </a:p>
-                      </a:txBody>
-                      <a:tcPr marL="68580" marR="68580" marT="0" marB="0" anchor="ctr"/>
-                    </a:tc>
-                    <a:tc>
-                      <a:txBody>
-                        <a:bodyPr/>
-                        <a:lstStyle/>
-                        <a:p>
-                          <a:endParaRPr lang="en-US"/>
-                        </a:p>
-                      </a:txBody>
-                      <a:tcPr marL="68580" marR="68580" marT="0" marB="0" anchor="ctr">
-                        <a:blipFill rotWithShape="1">
-                          <a:blip r:embed="rId4"/>
-                          <a:stretch>
-                            <a:fillRect l="-54338" t="-139726" r="-173973" b="-215068"/>
-                          </a:stretch>
-                        </a:blipFill>
-                      </a:tcPr>
-                    </a:tc>
-                    <a:tc>
-                      <a:txBody>
-                        <a:bodyPr/>
-                        <a:lstStyle/>
-                        <a:p>
-                          <a:endParaRPr lang="en-US"/>
-                        </a:p>
-                      </a:txBody>
-                      <a:tcPr marL="68580" marR="68580" marT="0" marB="0" anchor="ctr">
-                        <a:blipFill rotWithShape="1">
-                          <a:blip r:embed="rId4"/>
-                          <a:stretch>
-                            <a:fillRect l="-159059" t="-139726" r="-79294" b="-215068"/>
-                          </a:stretch>
-                        </a:blipFill>
-                      </a:tcPr>
-                    </a:tc>
-                    <a:tc>
-                      <a:txBody>
-                        <a:bodyPr/>
-                        <a:lstStyle/>
-                        <a:p>
-                          <a:endParaRPr lang="en-US"/>
-                        </a:p>
-                      </a:txBody>
-                      <a:tcPr marL="68580" marR="68580" marT="0" marB="0" anchor="ctr">
-                        <a:blipFill rotWithShape="1">
-                          <a:blip r:embed="rId4"/>
-                          <a:stretch>
-                            <a:fillRect l="-326706" t="-139726" b="-215068"/>
-                          </a:stretch>
-                        </a:blipFill>
-                      </a:tcPr>
-                    </a:tc>
-                  </a:tr>
-                  <a:tr h="274320">
-                    <a:tc>
-                      <a:txBody>
-                        <a:bodyPr/>
-                        <a:lstStyle/>
-                        <a:p>
-                          <a:pPr marL="0" marR="0" algn="ctr">
-                            <a:spcBef>
-                              <a:spcPts val="0"/>
-                            </a:spcBef>
-                            <a:spcAft>
-                              <a:spcPts val="0"/>
-                            </a:spcAft>
-                          </a:pPr>
-                          <a:r>
-                            <a:rPr lang="en-US" sz="1800">
-                              <a:effectLst/>
-                            </a:rPr>
-                            <a:t>Zero</a:t>
-                          </a:r>
-                          <a:endParaRPr lang="en-US" sz="1800">
-                            <a:effectLst/>
-                            <a:latin typeface="Palatino Linotype"/>
-                            <a:ea typeface="宋体"/>
-                            <a:cs typeface="Times New Roman"/>
-                          </a:endParaRPr>
-                        </a:p>
-                      </a:txBody>
-                      <a:tcPr marL="68580" marR="68580" marT="0" marB="0" anchor="ctr"/>
-                    </a:tc>
-                    <a:tc>
-                      <a:txBody>
-                        <a:bodyPr/>
-                        <a:lstStyle/>
-                        <a:p>
-                          <a:endParaRPr lang="en-US"/>
-                        </a:p>
-                      </a:txBody>
-                      <a:tcPr marL="68580" marR="68580" marT="0" marB="0" anchor="ctr">
-                        <a:blipFill rotWithShape="1">
-                          <a:blip r:embed="rId4"/>
-                          <a:stretch>
-                            <a:fillRect l="-54338" t="-388889" r="-173973" b="-248889"/>
-                          </a:stretch>
-                        </a:blipFill>
-                      </a:tcPr>
-                    </a:tc>
-                    <a:tc>
-                      <a:txBody>
-                        <a:bodyPr/>
-                        <a:lstStyle/>
-                        <a:p>
-                          <a:endParaRPr lang="en-US"/>
-                        </a:p>
-                      </a:txBody>
-                      <a:tcPr marL="68580" marR="68580" marT="0" marB="0" anchor="ctr">
-                        <a:blipFill rotWithShape="1">
-                          <a:blip r:embed="rId4"/>
-                          <a:stretch>
-                            <a:fillRect l="-159059" t="-388889" r="-79294" b="-248889"/>
-                          </a:stretch>
-                        </a:blipFill>
-                      </a:tcPr>
-                    </a:tc>
-                    <a:tc>
-                      <a:txBody>
-                        <a:bodyPr/>
-                        <a:lstStyle/>
-                        <a:p>
-                          <a:pPr marL="0" marR="0" algn="ctr">
-                            <a:spcBef>
-                              <a:spcPts val="0"/>
-                            </a:spcBef>
-                            <a:spcAft>
-                              <a:spcPts val="0"/>
-                            </a:spcAft>
-                          </a:pPr>
-                          <a:r>
-                            <a:rPr lang="en-US" sz="1800">
-                              <a:effectLst/>
-                            </a:rPr>
-                            <a:t>One zero</a:t>
-                          </a:r>
-                          <a:endParaRPr lang="en-US" sz="1800">
-                            <a:effectLst/>
-                            <a:latin typeface="Palatino Linotype"/>
-                            <a:ea typeface="宋体"/>
-                            <a:cs typeface="Times New Roman"/>
-                          </a:endParaRPr>
-                        </a:p>
-                      </a:txBody>
-                      <a:tcPr marL="68580" marR="68580" marT="0" marB="0" anchor="ctr"/>
-                    </a:tc>
-                  </a:tr>
-                  <a:tr h="548640">
-                    <a:tc>
-                      <a:txBody>
-                        <a:bodyPr/>
-                        <a:lstStyle/>
-                        <a:p>
-                          <a:pPr marL="0" marR="0" algn="ctr">
-                            <a:spcBef>
-                              <a:spcPts val="0"/>
-                            </a:spcBef>
-                            <a:spcAft>
-                              <a:spcPts val="0"/>
-                            </a:spcAft>
-                          </a:pPr>
-                          <a:r>
-                            <a:rPr lang="en-US" sz="1800">
-                              <a:effectLst/>
-                            </a:rPr>
-                            <a:t>Unique Numbers</a:t>
-                          </a:r>
-                          <a:endParaRPr lang="en-US" sz="1800">
-                            <a:effectLst/>
-                            <a:latin typeface="Palatino Linotype"/>
-                            <a:ea typeface="宋体"/>
-                            <a:cs typeface="Times New Roman"/>
-                          </a:endParaRPr>
-                        </a:p>
-                      </a:txBody>
-                      <a:tcPr marL="68580" marR="68580" marT="0" marB="0" anchor="ctr"/>
-                    </a:tc>
-                    <a:tc>
-                      <a:txBody>
-                        <a:bodyPr/>
-                        <a:lstStyle/>
-                        <a:p>
-                          <a:endParaRPr lang="en-US"/>
-                        </a:p>
-                      </a:txBody>
-                      <a:tcPr marL="68580" marR="68580" marT="0" marB="0" anchor="ctr">
-                        <a:blipFill rotWithShape="1">
-                          <a:blip r:embed="rId4"/>
-                          <a:stretch>
-                            <a:fillRect l="-54338" t="-244444" r="-173973" b="-24444"/>
-                          </a:stretch>
-                        </a:blipFill>
-                      </a:tcPr>
-                    </a:tc>
-                    <a:tc>
-                      <a:txBody>
-                        <a:bodyPr/>
-                        <a:lstStyle/>
-                        <a:p>
-                          <a:endParaRPr lang="en-US"/>
-                        </a:p>
-                      </a:txBody>
-                      <a:tcPr marL="68580" marR="68580" marT="0" marB="0" anchor="ctr">
-                        <a:blipFill rotWithShape="1">
-                          <a:blip r:embed="rId4"/>
-                          <a:stretch>
-                            <a:fillRect l="-159059" t="-244444" r="-79294" b="-24444"/>
-                          </a:stretch>
-                        </a:blipFill>
-                      </a:tcPr>
-                    </a:tc>
-                    <a:tc>
-                      <a:txBody>
-                        <a:bodyPr/>
-                        <a:lstStyle/>
-                        <a:p>
-                          <a:endParaRPr lang="en-US"/>
-                        </a:p>
-                      </a:txBody>
-                      <a:tcPr marL="68580" marR="68580" marT="0" marB="0" anchor="ctr">
-                        <a:blipFill rotWithShape="1">
-                          <a:blip r:embed="rId4"/>
-                          <a:stretch>
-                            <a:fillRect l="-326706" t="-244444" b="-24444"/>
-                          </a:stretch>
-                        </a:blipFill>
-                      </a:tcPr>
-                    </a:tc>
-                  </a:tr>
-                </a:tbl>
-              </a:graphicData>
-            </a:graphic>
-          </p:graphicFrame>
-        </mc:Fallback>
-      </mc:AlternateContent>
-      <p:sp>
-        <p:nvSpPr>
-          <p:cNvPr id="6" name="Horizontal Scroll 5"/>
-          <p:cNvSpPr/>
-          <p:nvPr/>
-        </p:nvSpPr>
-        <p:spPr>
-          <a:xfrm>
-            <a:off x="294068" y="178297"/>
-            <a:ext cx="1265712" cy="762000"/>
-          </a:xfrm>
-          <a:prstGeom prst="horizontalScroll">
-            <a:avLst/>
-          </a:prstGeom>
-          <a:gradFill rotWithShape="1">
-            <a:gsLst>
-              <a:gs pos="0">
-                <a:srgbClr val="4F81BD">
-                  <a:tint val="50000"/>
-                  <a:satMod val="300000"/>
-                </a:srgbClr>
-              </a:gs>
-              <a:gs pos="35000">
-                <a:srgbClr val="4F81BD">
-                  <a:tint val="37000"/>
-                  <a:satMod val="300000"/>
-                </a:srgbClr>
-              </a:gs>
-              <a:gs pos="100000">
-                <a:srgbClr val="4F81BD">
-                  <a:tint val="15000"/>
-                  <a:satMod val="350000"/>
-                </a:srgbClr>
-              </a:gs>
-            </a:gsLst>
-            <a:lin ang="16200000" scaled="1"/>
-          </a:gradFill>
-          <a:ln w="9525" cap="flat" cmpd="sng" algn="ctr">
-            <a:solidFill>
-              <a:srgbClr val="4F81BD">
-                <a:shade val="95000"/>
-                <a:satMod val="105000"/>
-              </a:srgbClr>
-            </a:solidFill>
-            <a:prstDash val="solid"/>
-          </a:ln>
-          <a:effectLst>
-            <a:outerShdw blurRad="40000" dist="20000" dir="5400000" rotWithShape="0">
-              <a:srgbClr val="000000">
-                <a:alpha val="38000"/>
-              </a:srgbClr>
-            </a:outerShdw>
-          </a:effectLst>
-        </p:spPr>
-        <p:txBody>
-          <a:bodyPr rtlCol="0" anchor="ctr"/>
-          <a:lstStyle/>
-          <a:p>
-            <a:pPr marL="0" marR="0" lvl="0" indent="0" algn="ctr" defTabSz="457200" eaLnBrk="1" fontAlgn="auto" latinLnBrk="0" hangingPunct="1">
-              <a:lnSpc>
-                <a:spcPct val="100000"/>
-              </a:lnSpc>
-              <a:spcBef>
-                <a:spcPts val="0"/>
-              </a:spcBef>
-              <a:spcAft>
-                <a:spcPts val="0"/>
-              </a:spcAft>
-              <a:buClrTx/>
-              <a:buSzTx/>
-              <a:buFontTx/>
-              <a:buNone/>
-              <a:tabLst/>
-              <a:defRPr/>
-            </a:pPr>
-            <a:r>
-              <a:rPr kumimoji="0" lang="en-US" sz="2400" b="0" i="0" u="none" strike="noStrike" kern="0" cap="none" spc="0" normalizeH="0" baseline="0" noProof="0" dirty="0">
-                <a:ln>
-                  <a:noFill/>
-                </a:ln>
-                <a:solidFill>
-                  <a:prstClr val="black"/>
-                </a:solidFill>
-                <a:effectLst/>
-                <a:uLnTx/>
-                <a:uFillTx/>
-                <a:latin typeface="Calibri"/>
-                <a:ea typeface="+mn-ea"/>
-                <a:cs typeface="+mn-cs"/>
-              </a:rPr>
-              <a:t>Review</a:t>
-            </a:r>
-          </a:p>
-        </p:txBody>
-      </p:sp>
-    </p:spTree>
-    <p:extLst>
-      <p:ext uri="{BB962C8B-B14F-4D97-AF65-F5344CB8AC3E}">
-        <p14:creationId xmlns:p14="http://schemas.microsoft.com/office/powerpoint/2010/main" val="2697262119"/>
-      </p:ext>
-    </p:extLst>
-  </p:cSld>
-  <p:clrMapOvr>
-    <a:masterClrMapping/>
-  </p:clrMapOvr>
-</p:sld>
-</file>
-
 <file path=ppt/slides/slide8.xml><?xml version="1.0" encoding="utf-8"?>
 <p:sld xmlns:a="http://schemas.openxmlformats.org/drawingml/2006/main" xmlns:r="http://schemas.openxmlformats.org/officeDocument/2006/relationships" xmlns:p="http://schemas.openxmlformats.org/presentationml/2006/main">
   <p:cSld>
